--- a/presentations/scPTR talk.pptx
+++ b/presentations/scPTR talk.pptx
@@ -22,10 +22,18 @@
     <p:sldId id="267" r:id="rId16"/>
     <p:sldId id="268" r:id="rId17"/>
     <p:sldId id="269" r:id="rId18"/>
+    <p:sldId id="279" r:id="rId28"/>
+    <p:sldId id="280" r:id="rId29"/>
+    <p:sldId id="281" r:id="rId30"/>
+    <p:sldId id="282" r:id="rId31"/>
     <p:sldId id="270" r:id="rId19"/>
     <p:sldId id="271" r:id="rId20"/>
     <p:sldId id="272" r:id="rId21"/>
+    <p:sldId id="283" r:id="rId32"/>
+    <p:sldId id="284" r:id="rId33"/>
     <p:sldId id="273" r:id="rId22"/>
+    <p:sldId id="285" r:id="rId34"/>
+    <p:sldId id="286" r:id="rId35"/>
     <p:sldId id="274" r:id="rId23"/>
     <p:sldId id="275" r:id="rId24"/>
     <p:sldId id="276" r:id="rId25"/>
@@ -8842,7 +8850,7 @@
                   <a:schemeClr val="dk1"/>
                 </a:solidFill>
               </a:rPr>
-              <a:t>Clustering in γ-space reveals substructure in 3 of 8 pancreatic and 6 of 11 hippocampal cell types.</a:t>
+              <a:t>Clustering in γ-space reveals substructure in 5 of 8 pancreatic and 6 of 11 hippocampal cell types.</a:t>
             </a:r>
             <a:endParaRPr sz="2000">
               <a:solidFill>
@@ -8901,7 +8909,7 @@
                   <a:schemeClr val="dk1"/>
                 </a:solidFill>
               </a:rPr>
-              <a:t>Pancreatic Epsilon cells: silhouette 0.215 in γ-space vs −0.011 in expression — one blob by expression, cleanly split by degradation.</a:t>
+              <a:t>Pancreatic Epsilon cells: silhouette 0.276 in γ-space vs −0.042 in expression — one blob by expression, cleanly split by degradation.</a:t>
             </a:r>
             <a:endParaRPr sz="2000">
               <a:solidFill>
@@ -9466,7 +9474,7 @@
                 <a:cs typeface="Arial"/>
                 <a:sym typeface="Arial"/>
               </a:rPr>
-              <a:t> (cosine ≈ 0.04): the two axes carry independent information.</a:t>
+              <a:t> (cosine ≈ −0.06): the two axes carry independent information.</a:t>
             </a:r>
             <a:endParaRPr b="0" i="0" sz="2200" u="none" cap="none" strike="noStrike">
               <a:solidFill>
@@ -9589,7 +9597,7 @@
                 <a:cs typeface="Arial"/>
                 <a:sym typeface="Arial"/>
               </a:rPr>
-              <a:t>54% of pancreas (p&lt;10⁻⁵⁷), 78% of dentate gyrus, 61% of A549 transition genes.</a:t>
+              <a:t>63% of pancreas (p=5.3×10⁻⁶), 78% of dentate gyrus, 61% of A549 transition genes.</a:t>
             </a:r>
             <a:endParaRPr b="0" i="0" sz="2200" u="none" cap="none" strike="noStrike">
               <a:solidFill>
@@ -9840,7 +9848,7 @@
                   <a:schemeClr val="dk1"/>
                 </a:solidFill>
               </a:rPr>
-              <a:t>Uncorrected inference is 99.4% destabilising (depth confound); correction drops 11,847 spurious edges → balanced 53/47.</a:t>
+              <a:t>Uncorrected inference is 98.9% destabilising (depth confound); correction drops 11,847 spurious edges → balanced 53/47.</a:t>
             </a:r>
             <a:endParaRPr i="0" sz="1700" u="none" cap="none" strike="noStrike">
               <a:solidFill>
@@ -15978,6 +15986,510 @@
 </p:sld>
 </file>
 
+<file path=ppt/slides/slide24.xml><?xml version="1.0" encoding="utf-8"?>
+<p:sld xmlns:a="http://schemas.openxmlformats.org/drawingml/2006/main" xmlns:p="http://schemas.openxmlformats.org/presentationml/2006/main" xmlns:r="http://schemas.openxmlformats.org/officeDocument/2006/relationships">
+  <p:cSld>
+    <p:bg>
+      <p:bgPr>
+        <a:solidFill>
+          <a:srgbClr val="FFFFFF"/>
+        </a:solidFill>
+        <a:effectLst/>
+      </p:bgPr>
+    </p:bg>
+    <p:spTree>
+      <p:nvGrpSpPr>
+        <p:cNvPr id="1" name=""/>
+        <p:cNvGrpSpPr/>
+        <p:nvPr/>
+      </p:nvGrpSpPr>
+      <p:grpSpPr/>
+      <p:pic>
+        <p:nvPicPr>
+          <p:cNvPr id="2" name="Picture 1" descr="fig_invisible_states_pancreas.png"/>
+          <p:cNvPicPr>
+            <a:picLocks noChangeAspect="1"/>
+          </p:cNvPicPr>
+          <p:nvPr/>
+        </p:nvPicPr>
+        <p:blipFill>
+          <a:blip r:embed="rId2"/>
+          <a:stretch>
+            <a:fillRect/>
+          </a:stretch>
+        </p:blipFill>
+        <p:spPr>
+          <a:xfrm>
+            <a:off x="914400" y="205740"/>
+            <a:ext cx="10363200" cy="5932170"/>
+          </a:xfrm>
+          <a:prstGeom prst="rect">
+            <a:avLst/>
+          </a:prstGeom>
+        </p:spPr>
+      </p:pic>
+      <p:sp>
+        <p:nvSpPr>
+          <p:cNvPr id="3" name="TextBox 2"/>
+          <p:cNvSpPr txBox="1"/>
+          <p:nvPr/>
+        </p:nvSpPr>
+        <p:spPr>
+          <a:xfrm>
+            <a:off x="609600" y="6206490"/>
+            <a:ext cx="10972800" cy="548640"/>
+          </a:xfrm>
+          <a:prstGeom prst="rect">
+            <a:avLst/>
+          </a:prstGeom>
+          <a:noFill/>
+        </p:spPr>
+        <p:txBody>
+          <a:bodyPr wrap="square">
+            <a:spAutoFit/>
+          </a:bodyPr>
+          <a:lstStyle/>
+          <a:p>
+            <a:pPr algn="ctr"/>
+            <a:r>
+              <a:rPr sz="1300">
+                <a:solidFill>
+                  <a:srgbClr val="444444"/>
+                </a:solidFill>
+              </a:rPr>
+              <a:t>Silhouette of γ-space labels in both spaces. 5/8 pancreatic cell types show stronger γ-space than expression-space substructure.</a:t>
+            </a:r>
+          </a:p>
+        </p:txBody>
+      </p:sp>
+    </p:spTree>
+  </p:cSld>
+  <p:clrMapOvr>
+    <a:masterClrMapping/>
+  </p:clrMapOvr>
+</p:sld>
+</file>
+
+<file path=ppt/slides/slide25.xml><?xml version="1.0" encoding="utf-8"?>
+<p:sld xmlns:a="http://schemas.openxmlformats.org/drawingml/2006/main" xmlns:p="http://schemas.openxmlformats.org/presentationml/2006/main" xmlns:r="http://schemas.openxmlformats.org/officeDocument/2006/relationships">
+  <p:cSld>
+    <p:bg>
+      <p:bgPr>
+        <a:solidFill>
+          <a:srgbClr val="FFFFFF"/>
+        </a:solidFill>
+        <a:effectLst/>
+      </p:bgPr>
+    </p:bg>
+    <p:spTree>
+      <p:nvGrpSpPr>
+        <p:cNvPr id="1" name=""/>
+        <p:cNvGrpSpPr/>
+        <p:nvPr/>
+      </p:nvGrpSpPr>
+      <p:grpSpPr/>
+      <p:pic>
+        <p:nvPicPr>
+          <p:cNvPr id="2" name="Picture 1" descr="fig_invisible_states_dentate.png"/>
+          <p:cNvPicPr>
+            <a:picLocks noChangeAspect="1"/>
+          </p:cNvPicPr>
+          <p:nvPr/>
+        </p:nvPicPr>
+        <p:blipFill>
+          <a:blip r:embed="rId2"/>
+          <a:stretch>
+            <a:fillRect/>
+          </a:stretch>
+        </p:blipFill>
+        <p:spPr>
+          <a:xfrm>
+            <a:off x="914400" y="205740"/>
+            <a:ext cx="10363200" cy="5932170"/>
+          </a:xfrm>
+          <a:prstGeom prst="rect">
+            <a:avLst/>
+          </a:prstGeom>
+        </p:spPr>
+      </p:pic>
+      <p:sp>
+        <p:nvSpPr>
+          <p:cNvPr id="3" name="TextBox 2"/>
+          <p:cNvSpPr txBox="1"/>
+          <p:nvPr/>
+        </p:nvSpPr>
+        <p:spPr>
+          <a:xfrm>
+            <a:off x="609600" y="6206490"/>
+            <a:ext cx="10972800" cy="548640"/>
+          </a:xfrm>
+          <a:prstGeom prst="rect">
+            <a:avLst/>
+          </a:prstGeom>
+          <a:noFill/>
+        </p:spPr>
+        <p:txBody>
+          <a:bodyPr wrap="square">
+            <a:spAutoFit/>
+          </a:bodyPr>
+          <a:lstStyle/>
+          <a:p>
+            <a:pPr algn="ctr"/>
+            <a:r>
+              <a:rPr sz="1300">
+                <a:solidFill>
+                  <a:srgbClr val="444444"/>
+                </a:solidFill>
+              </a:rPr>
+              <a:t>6/11 hippocampal cell types show γ-space substructure invisible or reduced in expression space.</a:t>
+            </a:r>
+          </a:p>
+        </p:txBody>
+      </p:sp>
+    </p:spTree>
+  </p:cSld>
+  <p:clrMapOvr>
+    <a:masterClrMapping/>
+  </p:clrMapOvr>
+</p:sld>
+</file>
+
+<file path=ppt/slides/slide26.xml><?xml version="1.0" encoding="utf-8"?>
+<p:sld xmlns:a="http://schemas.openxmlformats.org/drawingml/2006/main" xmlns:p="http://schemas.openxmlformats.org/presentationml/2006/main" xmlns:r="http://schemas.openxmlformats.org/officeDocument/2006/relationships">
+  <p:cSld>
+    <p:bg>
+      <p:bgPr>
+        <a:solidFill>
+          <a:srgbClr val="FFFFFF"/>
+        </a:solidFill>
+        <a:effectLst/>
+      </p:bgPr>
+    </p:bg>
+    <p:spTree>
+      <p:nvGrpSpPr>
+        <p:cNvPr id="1" name=""/>
+        <p:cNvGrpSpPr/>
+        <p:nvPr/>
+      </p:nvGrpSpPr>
+      <p:grpSpPr/>
+      <p:pic>
+        <p:nvPicPr>
+          <p:cNvPr id="2" name="Picture 1" descr="fig_invisible_epsilon.png"/>
+          <p:cNvPicPr>
+            <a:picLocks noChangeAspect="1"/>
+          </p:cNvPicPr>
+          <p:nvPr/>
+        </p:nvPicPr>
+        <p:blipFill>
+          <a:blip r:embed="rId2"/>
+          <a:stretch>
+            <a:fillRect/>
+          </a:stretch>
+        </p:blipFill>
+        <p:spPr>
+          <a:xfrm>
+            <a:off x="914400" y="205740"/>
+            <a:ext cx="10363200" cy="5932170"/>
+          </a:xfrm>
+          <a:prstGeom prst="rect">
+            <a:avLst/>
+          </a:prstGeom>
+        </p:spPr>
+      </p:pic>
+      <p:sp>
+        <p:nvSpPr>
+          <p:cNvPr id="3" name="TextBox 2"/>
+          <p:cNvSpPr txBox="1"/>
+          <p:nvPr/>
+        </p:nvSpPr>
+        <p:spPr>
+          <a:xfrm>
+            <a:off x="609600" y="6206490"/>
+            <a:ext cx="10972800" cy="548640"/>
+          </a:xfrm>
+          <a:prstGeom prst="rect">
+            <a:avLst/>
+          </a:prstGeom>
+          <a:noFill/>
+        </p:spPr>
+        <p:txBody>
+          <a:bodyPr wrap="square">
+            <a:spAutoFit/>
+          </a:bodyPr>
+          <a:lstStyle/>
+          <a:p>
+            <a:pPr algn="ctr"/>
+            <a:r>
+              <a:rPr sz="1300">
+                <a:solidFill>
+                  <a:srgbClr val="444444"/>
+                </a:solidFill>
+              </a:rPr>
+              <a:t>Epsilon cells (n=142): one blob in expression (silhouette −0.042), cleanly split in γ-space (silhouette 0.276).</a:t>
+            </a:r>
+          </a:p>
+        </p:txBody>
+      </p:sp>
+    </p:spTree>
+  </p:cSld>
+  <p:clrMapOvr>
+    <a:masterClrMapping/>
+  </p:clrMapOvr>
+</p:sld>
+</file>
+
+<file path=ppt/slides/slide27.xml><?xml version="1.0" encoding="utf-8"?>
+<p:sld xmlns:a="http://schemas.openxmlformats.org/drawingml/2006/main" xmlns:p="http://schemas.openxmlformats.org/presentationml/2006/main" xmlns:r="http://schemas.openxmlformats.org/officeDocument/2006/relationships">
+  <p:cSld>
+    <p:bg>
+      <p:bgPr>
+        <a:solidFill>
+          <a:srgbClr val="FFFFFF"/>
+        </a:solidFill>
+        <a:effectLst/>
+      </p:bgPr>
+    </p:bg>
+    <p:spTree>
+      <p:nvGrpSpPr>
+        <p:cNvPr id="1" name=""/>
+        <p:cNvGrpSpPr/>
+        <p:nvPr/>
+      </p:nvGrpSpPr>
+      <p:grpSpPr/>
+      <p:pic>
+        <p:nvPicPr>
+          <p:cNvPr id="2" name="Picture 1" descr="fig_permutation_control.png"/>
+          <p:cNvPicPr>
+            <a:picLocks noChangeAspect="1"/>
+          </p:cNvPicPr>
+          <p:nvPr/>
+        </p:nvPicPr>
+        <p:blipFill>
+          <a:blip r:embed="rId2"/>
+          <a:stretch>
+            <a:fillRect/>
+          </a:stretch>
+        </p:blipFill>
+        <p:spPr>
+          <a:xfrm>
+            <a:off x="914400" y="205740"/>
+            <a:ext cx="10363200" cy="5932170"/>
+          </a:xfrm>
+          <a:prstGeom prst="rect">
+            <a:avLst/>
+          </a:prstGeom>
+        </p:spPr>
+      </p:pic>
+      <p:sp>
+        <p:nvSpPr>
+          <p:cNvPr id="3" name="TextBox 2"/>
+          <p:cNvSpPr txBox="1"/>
+          <p:nvPr/>
+        </p:nvSpPr>
+        <p:spPr>
+          <a:xfrm>
+            <a:off x="609600" y="6206490"/>
+            <a:ext cx="10972800" cy="548640"/>
+          </a:xfrm>
+          <a:prstGeom prst="rect">
+            <a:avLst/>
+          </a:prstGeom>
+          <a:noFill/>
+        </p:spPr>
+        <p:txBody>
+          <a:bodyPr wrap="square">
+            <a:spAutoFit/>
+          </a:bodyPr>
+          <a:lstStyle/>
+          <a:p>
+            <a:pPr algn="ctr"/>
+            <a:r>
+              <a:rPr sz="1300">
+                <a:solidFill>
+                  <a:srgbClr val="444444"/>
+                </a:solidFill>
+              </a:rPr>
+              <a:t>Permutation control: shuffling u/s pairs within each gene before estimation yields ARI ≈ 0, ruling out smoothing artefacts.</a:t>
+            </a:r>
+          </a:p>
+        </p:txBody>
+      </p:sp>
+    </p:spTree>
+  </p:cSld>
+  <p:clrMapOvr>
+    <a:masterClrMapping/>
+  </p:clrMapOvr>
+</p:sld>
+</file>
+
+<file path=ppt/slides/slide28.xml><?xml version="1.0" encoding="utf-8"?>
+<p:sld xmlns:a="http://schemas.openxmlformats.org/drawingml/2006/main" xmlns:p="http://schemas.openxmlformats.org/presentationml/2006/main" xmlns:r="http://schemas.openxmlformats.org/officeDocument/2006/relationships">
+  <p:cSld>
+    <p:bg>
+      <p:bgPr>
+        <a:solidFill>
+          <a:srgbClr val="FFFFFF"/>
+        </a:solidFill>
+        <a:effectLst/>
+      </p:bgPr>
+    </p:bg>
+    <p:spTree>
+      <p:nvGrpSpPr>
+        <p:cNvPr id="1" name=""/>
+        <p:cNvGrpSpPr/>
+        <p:nvPr/>
+      </p:nvGrpSpPr>
+      <p:grpSpPr/>
+      <p:pic>
+        <p:nvPicPr>
+          <p:cNvPr id="2" name="Picture 1" descr="fig_gamma_leads_expression.png"/>
+          <p:cNvPicPr>
+            <a:picLocks noChangeAspect="1"/>
+          </p:cNvPicPr>
+          <p:nvPr/>
+        </p:nvPicPr>
+        <p:blipFill>
+          <a:blip r:embed="rId2"/>
+          <a:stretch>
+            <a:fillRect/>
+          </a:stretch>
+        </p:blipFill>
+        <p:spPr>
+          <a:xfrm>
+            <a:off x="914400" y="205740"/>
+            <a:ext cx="10363200" cy="5932170"/>
+          </a:xfrm>
+          <a:prstGeom prst="rect">
+            <a:avLst/>
+          </a:prstGeom>
+        </p:spPr>
+      </p:pic>
+      <p:sp>
+        <p:nvSpPr>
+          <p:cNvPr id="3" name="TextBox 2"/>
+          <p:cNvSpPr txBox="1"/>
+          <p:nvPr/>
+        </p:nvSpPr>
+        <p:spPr>
+          <a:xfrm>
+            <a:off x="609600" y="6206490"/>
+            <a:ext cx="10972800" cy="548640"/>
+          </a:xfrm>
+          <a:prstGeom prst="rect">
+            <a:avLst/>
+          </a:prstGeom>
+          <a:noFill/>
+        </p:spPr>
+        <p:txBody>
+          <a:bodyPr wrap="square">
+            <a:spAutoFit/>
+          </a:bodyPr>
+          <a:lstStyle/>
+          <a:p>
+            <a:pPr algn="ctr"/>
+            <a:r>
+              <a:rPr sz="1300">
+                <a:solidFill>
+                  <a:srgbClr val="444444"/>
+                </a:solidFill>
+              </a:rPr>
+              <a:t>γ leads expression at fate transitions: 63% of pancreatic genes (p=5.3×10⁻⁶), 78% of dentate gyrus genes (p=9.9×10⁻¹³).</a:t>
+            </a:r>
+          </a:p>
+        </p:txBody>
+      </p:sp>
+    </p:spTree>
+  </p:cSld>
+  <p:clrMapOvr>
+    <a:masterClrMapping/>
+  </p:clrMapOvr>
+</p:sld>
+</file>
+
+<file path=ppt/slides/slide29.xml><?xml version="1.0" encoding="utf-8"?>
+<p:sld xmlns:a="http://schemas.openxmlformats.org/drawingml/2006/main" xmlns:p="http://schemas.openxmlformats.org/presentationml/2006/main" xmlns:r="http://schemas.openxmlformats.org/officeDocument/2006/relationships">
+  <p:cSld>
+    <p:bg>
+      <p:bgPr>
+        <a:solidFill>
+          <a:srgbClr val="FFFFFF"/>
+        </a:solidFill>
+        <a:effectLst/>
+      </p:bgPr>
+    </p:bg>
+    <p:spTree>
+      <p:nvGrpSpPr>
+        <p:cNvPr id="1" name=""/>
+        <p:cNvGrpSpPr/>
+        <p:nvPr/>
+      </p:nvGrpSpPr>
+      <p:grpSpPr/>
+      <p:pic>
+        <p:nvPicPr>
+          <p:cNvPr id="2" name="Picture 1" descr="fig_pt_velocity_orthogonality.png"/>
+          <p:cNvPicPr>
+            <a:picLocks noChangeAspect="1"/>
+          </p:cNvPicPr>
+          <p:nvPr/>
+        </p:nvPicPr>
+        <p:blipFill>
+          <a:blip r:embed="rId2"/>
+          <a:stretch>
+            <a:fillRect/>
+          </a:stretch>
+        </p:blipFill>
+        <p:spPr>
+          <a:xfrm>
+            <a:off x="914400" y="205740"/>
+            <a:ext cx="10363200" cy="5932170"/>
+          </a:xfrm>
+          <a:prstGeom prst="rect">
+            <a:avLst/>
+          </a:prstGeom>
+        </p:spPr>
+      </p:pic>
+      <p:sp>
+        <p:nvSpPr>
+          <p:cNvPr id="3" name="TextBox 2"/>
+          <p:cNvSpPr txBox="1"/>
+          <p:nvPr/>
+        </p:nvSpPr>
+        <p:spPr>
+          <a:xfrm>
+            <a:off x="609600" y="6206490"/>
+            <a:ext cx="10972800" cy="548640"/>
+          </a:xfrm>
+          <a:prstGeom prst="rect">
+            <a:avLst/>
+          </a:prstGeom>
+          <a:noFill/>
+        </p:spPr>
+        <p:txBody>
+          <a:bodyPr wrap="square">
+            <a:spAutoFit/>
+          </a:bodyPr>
+          <a:lstStyle/>
+          <a:p>
+            <a:pPr algn="ctr"/>
+            <a:r>
+              <a:rPr sz="1300">
+                <a:solidFill>
+                  <a:srgbClr val="444444"/>
+                </a:solidFill>
+              </a:rPr>
+              <a:t>PT velocity approximately orthogonal to RNA velocity (mean cosine = −0.056), confirming independent information axes.</a:t>
+            </a:r>
+          </a:p>
+        </p:txBody>
+      </p:sp>
+    </p:spTree>
+  </p:cSld>
+  <p:clrMapOvr>
+    <a:masterClrMapping/>
+  </p:clrMapOvr>
+</p:sld>
+</file>
+
 <file path=ppt/slides/slide3.xml><?xml version="1.0" encoding="utf-8"?>
 <p:sld xmlns:a="http://schemas.openxmlformats.org/drawingml/2006/main" xmlns:r="http://schemas.openxmlformats.org/officeDocument/2006/relationships" xmlns:mc="http://schemas.openxmlformats.org/markup-compatibility/2006" xmlns:mv="urn:schemas-microsoft-com:mac:vml" xmlns:p="http://schemas.openxmlformats.org/presentationml/2006/main" xmlns:c="http://schemas.openxmlformats.org/drawingml/2006/chart" xmlns:dgm="http://schemas.openxmlformats.org/drawingml/2006/diagram" xmlns:o="urn:schemas-microsoft-com:office:office" xmlns:v="urn:schemas-microsoft-com:vml" xmlns:pvml="urn:schemas-microsoft-com:office:powerpoint" xmlns:com="http://schemas.openxmlformats.org/drawingml/2006/compatibility" xmlns:p14="http://schemas.microsoft.com/office/powerpoint/2010/main" xmlns:p15="http://schemas.microsoft.com/office/powerpoint/2012/main" xmlns:ahyp="http://schemas.microsoft.com/office/drawing/2018/hyperlinkcolor">
   <p:cSld>
@@ -16112,6 +16624,174 @@
           </a:ln>
         </p:spPr>
       </p:pic>
+    </p:spTree>
+  </p:cSld>
+  <p:clrMapOvr>
+    <a:masterClrMapping/>
+  </p:clrMapOvr>
+</p:sld>
+</file>
+
+<file path=ppt/slides/slide30.xml><?xml version="1.0" encoding="utf-8"?>
+<p:sld xmlns:a="http://schemas.openxmlformats.org/drawingml/2006/main" xmlns:p="http://schemas.openxmlformats.org/presentationml/2006/main" xmlns:r="http://schemas.openxmlformats.org/officeDocument/2006/relationships">
+  <p:cSld>
+    <p:bg>
+      <p:bgPr>
+        <a:solidFill>
+          <a:srgbClr val="FFFFFF"/>
+        </a:solidFill>
+        <a:effectLst/>
+      </p:bgPr>
+    </p:bg>
+    <p:spTree>
+      <p:nvGrpSpPr>
+        <p:cNvPr id="1" name=""/>
+        <p:cNvGrpSpPr/>
+        <p:nvPr/>
+      </p:nvGrpSpPr>
+      <p:grpSpPr/>
+      <p:pic>
+        <p:nvPicPr>
+          <p:cNvPr id="2" name="Picture 1" descr="fig_library_size_correction.png"/>
+          <p:cNvPicPr>
+            <a:picLocks noChangeAspect="1"/>
+          </p:cNvPicPr>
+          <p:nvPr/>
+        </p:nvPicPr>
+        <p:blipFill>
+          <a:blip r:embed="rId2"/>
+          <a:stretch>
+            <a:fillRect/>
+          </a:stretch>
+        </p:blipFill>
+        <p:spPr>
+          <a:xfrm>
+            <a:off x="914400" y="205740"/>
+            <a:ext cx="10363200" cy="5932170"/>
+          </a:xfrm>
+          <a:prstGeom prst="rect">
+            <a:avLst/>
+          </a:prstGeom>
+        </p:spPr>
+      </p:pic>
+      <p:sp>
+        <p:nvSpPr>
+          <p:cNvPr id="3" name="TextBox 2"/>
+          <p:cNvSpPr txBox="1"/>
+          <p:nvPr/>
+        </p:nvSpPr>
+        <p:spPr>
+          <a:xfrm>
+            <a:off x="609600" y="6206490"/>
+            <a:ext cx="10972800" cy="548640"/>
+          </a:xfrm>
+          <a:prstGeom prst="rect">
+            <a:avLst/>
+          </a:prstGeom>
+          <a:noFill/>
+        </p:spPr>
+        <p:txBody>
+          <a:bodyPr wrap="square">
+            <a:spAutoFit/>
+          </a:bodyPr>
+          <a:lstStyle/>
+          <a:p>
+            <a:pPr algn="ctr"/>
+            <a:r>
+              <a:rPr sz="1300">
+                <a:solidFill>
+                  <a:srgbClr val="444444"/>
+                </a:solidFill>
+              </a:rPr>
+              <a:t>Library-size correction removes depth confound: 98.9% → 33.7% destabilising in neuroblastoma, revealing 66.3% stabilising landscape.</a:t>
+            </a:r>
+          </a:p>
+        </p:txBody>
+      </p:sp>
+    </p:spTree>
+  </p:cSld>
+  <p:clrMapOvr>
+    <a:masterClrMapping/>
+  </p:clrMapOvr>
+</p:sld>
+</file>
+
+<file path=ppt/slides/slide31.xml><?xml version="1.0" encoding="utf-8"?>
+<p:sld xmlns:a="http://schemas.openxmlformats.org/drawingml/2006/main" xmlns:p="http://schemas.openxmlformats.org/presentationml/2006/main" xmlns:r="http://schemas.openxmlformats.org/officeDocument/2006/relationships">
+  <p:cSld>
+    <p:bg>
+      <p:bgPr>
+        <a:solidFill>
+          <a:srgbClr val="FFFFFF"/>
+        </a:solidFill>
+        <a:effectLst/>
+      </p:bgPr>
+    </p:bg>
+    <p:spTree>
+      <p:nvGrpSpPr>
+        <p:cNvPr id="1" name=""/>
+        <p:cNvGrpSpPr/>
+        <p:nvPr/>
+      </p:nvGrpSpPr>
+      <p:grpSpPr/>
+      <p:pic>
+        <p:nvPicPr>
+          <p:cNvPr id="2" name="Picture 1" descr="fig_depmap_essentials.png"/>
+          <p:cNvPicPr>
+            <a:picLocks noChangeAspect="1"/>
+          </p:cNvPicPr>
+          <p:nvPr/>
+        </p:nvPicPr>
+        <p:blipFill>
+          <a:blip r:embed="rId2"/>
+          <a:stretch>
+            <a:fillRect/>
+          </a:stretch>
+        </p:blipFill>
+        <p:spPr>
+          <a:xfrm>
+            <a:off x="914400" y="205740"/>
+            <a:ext cx="10363200" cy="5932170"/>
+          </a:xfrm>
+          <a:prstGeom prst="rect">
+            <a:avLst/>
+          </a:prstGeom>
+        </p:spPr>
+      </p:pic>
+      <p:sp>
+        <p:nvSpPr>
+          <p:cNvPr id="3" name="TextBox 2"/>
+          <p:cNvSpPr txBox="1"/>
+          <p:nvPr/>
+        </p:nvSpPr>
+        <p:spPr>
+          <a:xfrm>
+            <a:off x="609600" y="6206490"/>
+            <a:ext cx="10972800" cy="548640"/>
+          </a:xfrm>
+          <a:prstGeom prst="rect">
+            <a:avLst/>
+          </a:prstGeom>
+          <a:noFill/>
+        </p:spPr>
+        <p:txBody>
+          <a:bodyPr wrap="square">
+            <a:spAutoFit/>
+          </a:bodyPr>
+          <a:lstStyle/>
+          <a:p>
+            <a:pPr algn="ctr"/>
+            <a:r>
+              <a:rPr sz="1300">
+                <a:solidFill>
+                  <a:srgbClr val="444444"/>
+                </a:solidFill>
+              </a:rPr>
+              <a:t>Hub RBPs identified by scPTR are significantly more essential in DepMap CRISPR screens (p=6.4×10⁻⁵).</a:t>
+            </a:r>
+          </a:p>
+        </p:txBody>
+      </p:sp>
     </p:spTree>
   </p:cSld>
   <p:clrMapOvr>

--- a/presentations/scPTR talk.pptx
+++ b/presentations/scPTR talk.pptx
@@ -5267,1070 +5267,7 @@
 </p:sld>
 </file>
 
-<file path=ppt/slides/slide11.xml><?xml version="1.0" encoding="utf-8"?>
-<p:sld xmlns:a="http://schemas.openxmlformats.org/drawingml/2006/main" xmlns:r="http://schemas.openxmlformats.org/officeDocument/2006/relationships" xmlns:mc="http://schemas.openxmlformats.org/markup-compatibility/2006" xmlns:mv="urn:schemas-microsoft-com:mac:vml" xmlns:p="http://schemas.openxmlformats.org/presentationml/2006/main" xmlns:c="http://schemas.openxmlformats.org/drawingml/2006/chart" xmlns:dgm="http://schemas.openxmlformats.org/drawingml/2006/diagram" xmlns:o="urn:schemas-microsoft-com:office:office" xmlns:v="urn:schemas-microsoft-com:vml" xmlns:pvml="urn:schemas-microsoft-com:office:powerpoint" xmlns:com="http://schemas.openxmlformats.org/drawingml/2006/compatibility" xmlns:p14="http://schemas.microsoft.com/office/powerpoint/2010/main" xmlns:p15="http://schemas.microsoft.com/office/powerpoint/2012/main" xmlns:ahyp="http://schemas.microsoft.com/office/drawing/2018/hyperlinkcolor">
-  <p:cSld>
-    <p:bg>
-      <p:bgPr>
-        <a:solidFill>
-          <a:srgbClr val="FFFFFF"/>
-        </a:solidFill>
-      </p:bgPr>
-    </p:bg>
-    <p:spTree>
-      <p:nvGrpSpPr>
-        <p:cNvPr id="158" name="Shape 158"/>
-        <p:cNvGrpSpPr/>
-        <p:nvPr/>
-      </p:nvGrpSpPr>
-      <p:grpSpPr>
-        <a:xfrm>
-          <a:off x="0" y="0"/>
-          <a:ext cx="0" cy="0"/>
-          <a:chOff x="0" y="0"/>
-          <a:chExt cx="0" cy="0"/>
-        </a:xfrm>
-      </p:grpSpPr>
-      <p:sp>
-        <p:nvSpPr>
-          <p:cNvPr id="159" name="Google Shape;159;p13"/>
-          <p:cNvSpPr/>
-          <p:nvPr/>
-        </p:nvSpPr>
-        <p:spPr>
-          <a:xfrm>
-            <a:off x="548640" y="457200"/>
-            <a:ext cx="11064240" cy="868680"/>
-          </a:xfrm>
-          <a:prstGeom prst="rect">
-            <a:avLst/>
-          </a:prstGeom>
-          <a:noFill/>
-          <a:ln>
-            <a:noFill/>
-          </a:ln>
-        </p:spPr>
-        <p:txBody>
-          <a:bodyPr anchorCtr="0" anchor="t" bIns="0" lIns="0" spcFirstLastPara="1" rIns="0" wrap="square" tIns="0">
-            <a:noAutofit/>
-          </a:bodyPr>
-          <a:lstStyle/>
-          <a:p>
-            <a:pPr indent="0" lvl="0" marL="0" marR="0" rtl="0" algn="l">
-              <a:spcBef>
-                <a:spcPts val="0"/>
-              </a:spcBef>
-              <a:spcAft>
-                <a:spcPts val="0"/>
-              </a:spcAft>
-              <a:buClr>
-                <a:srgbClr val="111111"/>
-              </a:buClr>
-              <a:buSzPts val="3000"/>
-              <a:buFont typeface="Arial"/>
-              <a:buNone/>
-            </a:pPr>
-            <a:r>
-              <a:rPr b="1" i="0" lang="en-US" sz="3000" u="none" cap="none" strike="noStrike">
-                <a:solidFill>
-                  <a:srgbClr val="111111"/>
-                </a:solidFill>
-                <a:latin typeface="Arial"/>
-                <a:ea typeface="Arial"/>
-                <a:cs typeface="Arial"/>
-                <a:sym typeface="Arial"/>
-              </a:rPr>
-              <a:t>γ recovers published mRNA half-lives</a:t>
-            </a:r>
-            <a:endParaRPr b="0" i="0" sz="3000" u="none" cap="none" strike="noStrike">
-              <a:solidFill>
-                <a:schemeClr val="dk1"/>
-              </a:solidFill>
-              <a:latin typeface="Calibri"/>
-              <a:ea typeface="Calibri"/>
-              <a:cs typeface="Calibri"/>
-              <a:sym typeface="Calibri"/>
-            </a:endParaRPr>
-          </a:p>
-        </p:txBody>
-      </p:sp>
-      <p:sp>
-        <p:nvSpPr>
-          <p:cNvPr id="160" name="Google Shape;160;p13"/>
-          <p:cNvSpPr/>
-          <p:nvPr/>
-        </p:nvSpPr>
-        <p:spPr>
-          <a:xfrm>
-            <a:off x="835025" y="1719075"/>
-            <a:ext cx="5446800" cy="3922800"/>
-          </a:xfrm>
-          <a:prstGeom prst="roundRect">
-            <a:avLst>
-              <a:gd fmla="val 1865" name="adj"/>
-            </a:avLst>
-          </a:prstGeom>
-          <a:solidFill>
-            <a:srgbClr val="FFFFFF"/>
-          </a:solidFill>
-          <a:ln cap="flat" cmpd="sng" w="12700">
-            <a:solidFill>
-              <a:srgbClr val="BBBBBB"/>
-            </a:solidFill>
-            <a:prstDash val="solid"/>
-            <a:round/>
-            <a:headEnd len="sm" w="sm" type="none"/>
-            <a:tailEnd len="sm" w="sm" type="none"/>
-          </a:ln>
-          <a:effectLst>
-            <a:outerShdw blurRad="88900" rotWithShape="0" algn="bl" dir="5400000" dist="25400">
-              <a:srgbClr val="000000">
-                <a:alpha val="18039"/>
-              </a:srgbClr>
-            </a:outerShdw>
-          </a:effectLst>
-        </p:spPr>
-        <p:txBody>
-          <a:bodyPr anchorCtr="0" anchor="ctr" bIns="91425" lIns="91425" spcFirstLastPara="1" rIns="91425" wrap="square" tIns="91425">
-            <a:noAutofit/>
-          </a:bodyPr>
-          <a:lstStyle/>
-          <a:p>
-            <a:pPr indent="0" lvl="0" marL="0" rtl="0" algn="l">
-              <a:spcBef>
-                <a:spcPts val="0"/>
-              </a:spcBef>
-              <a:spcAft>
-                <a:spcPts val="0"/>
-              </a:spcAft>
-              <a:buNone/>
-            </a:pPr>
-            <a:r>
-              <a:t/>
-            </a:r>
-            <a:endParaRPr/>
-          </a:p>
-        </p:txBody>
-      </p:sp>
-      <p:pic>
-        <p:nvPicPr>
-          <p:cNvPr descr="figs/f2A.png" id="161" name="Google Shape;161;p13"/>
-          <p:cNvPicPr preferRelativeResize="0"/>
-          <p:nvPr/>
-        </p:nvPicPr>
-        <p:blipFill rotWithShape="1">
-          <a:blip r:embed="rId3">
-            <a:alphaModFix/>
-          </a:blip>
-          <a:srcRect b="0" l="0" r="0" t="0"/>
-          <a:stretch/>
-        </p:blipFill>
-        <p:spPr>
-          <a:xfrm>
-            <a:off x="835025" y="1828800"/>
-            <a:ext cx="5337175" cy="3703325"/>
-          </a:xfrm>
-          <a:prstGeom prst="rect">
-            <a:avLst/>
-          </a:prstGeom>
-          <a:noFill/>
-          <a:ln>
-            <a:noFill/>
-          </a:ln>
-        </p:spPr>
-      </p:pic>
-      <p:sp>
-        <p:nvSpPr>
-          <p:cNvPr id="162" name="Google Shape;162;p13"/>
-          <p:cNvSpPr/>
-          <p:nvPr/>
-        </p:nvSpPr>
-        <p:spPr>
-          <a:xfrm>
-            <a:off x="6583680" y="1783080"/>
-            <a:ext cx="4937760" cy="1280160"/>
-          </a:xfrm>
-          <a:prstGeom prst="rect">
-            <a:avLst/>
-          </a:prstGeom>
-          <a:noFill/>
-          <a:ln>
-            <a:noFill/>
-          </a:ln>
-        </p:spPr>
-        <p:txBody>
-          <a:bodyPr anchorCtr="0" anchor="t" bIns="0" lIns="0" spcFirstLastPara="1" rIns="0" wrap="square" tIns="0">
-            <a:noAutofit/>
-          </a:bodyPr>
-          <a:lstStyle/>
-          <a:p>
-            <a:pPr indent="0" lvl="0" marL="0" marR="0" rtl="0" algn="l">
-              <a:spcBef>
-                <a:spcPts val="0"/>
-              </a:spcBef>
-              <a:spcAft>
-                <a:spcPts val="0"/>
-              </a:spcAft>
-              <a:buClr>
-                <a:srgbClr val="000000"/>
-              </a:buClr>
-              <a:buSzPts val="5200"/>
-              <a:buFont typeface="Arial"/>
-              <a:buNone/>
-            </a:pPr>
-            <a:r>
-              <a:rPr b="1" i="0" lang="en-US" sz="5200" u="none" cap="none" strike="noStrike">
-                <a:solidFill>
-                  <a:srgbClr val="000000"/>
-                </a:solidFill>
-                <a:latin typeface="Arial"/>
-                <a:ea typeface="Arial"/>
-                <a:cs typeface="Arial"/>
-                <a:sym typeface="Arial"/>
-              </a:rPr>
-              <a:t>ρ = −0.81</a:t>
-            </a:r>
-            <a:endParaRPr b="0" i="0" sz="5200" u="none" cap="none" strike="noStrike">
-              <a:solidFill>
-                <a:schemeClr val="dk1"/>
-              </a:solidFill>
-              <a:latin typeface="Calibri"/>
-              <a:ea typeface="Calibri"/>
-              <a:cs typeface="Calibri"/>
-              <a:sym typeface="Calibri"/>
-            </a:endParaRPr>
-          </a:p>
-          <a:p>
-            <a:pPr indent="0" lvl="0" marL="0" marR="0" rtl="0" algn="l">
-              <a:spcBef>
-                <a:spcPts val="0"/>
-              </a:spcBef>
-              <a:spcAft>
-                <a:spcPts val="0"/>
-              </a:spcAft>
-              <a:buClr>
-                <a:srgbClr val="6A6A6A"/>
-              </a:buClr>
-              <a:buSzPts val="1400"/>
-              <a:buFont typeface="Arial"/>
-              <a:buNone/>
-            </a:pPr>
-            <a:r>
-              <a:t/>
-            </a:r>
-            <a:endParaRPr b="0" i="0" sz="5200" u="none" cap="none" strike="noStrike">
-              <a:solidFill>
-                <a:schemeClr val="dk1"/>
-              </a:solidFill>
-              <a:latin typeface="Calibri"/>
-              <a:ea typeface="Calibri"/>
-              <a:cs typeface="Calibri"/>
-              <a:sym typeface="Calibri"/>
-            </a:endParaRPr>
-          </a:p>
-        </p:txBody>
-      </p:sp>
-      <p:sp>
-        <p:nvSpPr>
-          <p:cNvPr id="163" name="Google Shape;163;p13"/>
-          <p:cNvSpPr/>
-          <p:nvPr/>
-        </p:nvSpPr>
-        <p:spPr>
-          <a:xfrm>
-            <a:off x="6583680" y="3291840"/>
-            <a:ext cx="4983480" cy="512064"/>
-          </a:xfrm>
-          <a:prstGeom prst="roundRect">
-            <a:avLst>
-              <a:gd fmla="val 10714" name="adj"/>
-            </a:avLst>
-          </a:prstGeom>
-          <a:solidFill>
-            <a:srgbClr val="000000"/>
-          </a:solidFill>
-          <a:ln cap="flat" cmpd="sng" w="12700">
-            <a:solidFill>
-              <a:srgbClr val="BBBBBB"/>
-            </a:solidFill>
-            <a:prstDash val="solid"/>
-            <a:round/>
-            <a:headEnd len="sm" w="sm" type="none"/>
-            <a:tailEnd len="sm" w="sm" type="none"/>
-          </a:ln>
-        </p:spPr>
-        <p:txBody>
-          <a:bodyPr anchorCtr="0" anchor="ctr" bIns="91425" lIns="91425" spcFirstLastPara="1" rIns="91425" wrap="square" tIns="91425">
-            <a:noAutofit/>
-          </a:bodyPr>
-          <a:lstStyle/>
-          <a:p>
-            <a:pPr indent="0" lvl="0" marL="0" rtl="0" algn="l">
-              <a:spcBef>
-                <a:spcPts val="0"/>
-              </a:spcBef>
-              <a:spcAft>
-                <a:spcPts val="0"/>
-              </a:spcAft>
-              <a:buNone/>
-            </a:pPr>
-            <a:r>
-              <a:t/>
-            </a:r>
-            <a:endParaRPr/>
-          </a:p>
-        </p:txBody>
-      </p:sp>
-      <p:sp>
-        <p:nvSpPr>
-          <p:cNvPr id="164" name="Google Shape;164;p13"/>
-          <p:cNvSpPr/>
-          <p:nvPr/>
-        </p:nvSpPr>
-        <p:spPr>
-          <a:xfrm>
-            <a:off x="6766560" y="3291840"/>
-            <a:ext cx="3383280" cy="512064"/>
-          </a:xfrm>
-          <a:prstGeom prst="rect">
-            <a:avLst/>
-          </a:prstGeom>
-          <a:noFill/>
-          <a:ln>
-            <a:noFill/>
-          </a:ln>
-        </p:spPr>
-        <p:txBody>
-          <a:bodyPr anchorCtr="0" anchor="ctr" bIns="0" lIns="0" spcFirstLastPara="1" rIns="0" wrap="square" tIns="0">
-            <a:noAutofit/>
-          </a:bodyPr>
-          <a:lstStyle/>
-          <a:p>
-            <a:pPr indent="0" lvl="0" marL="0" marR="0" rtl="0" algn="l">
-              <a:spcBef>
-                <a:spcPts val="0"/>
-              </a:spcBef>
-              <a:spcAft>
-                <a:spcPts val="0"/>
-              </a:spcAft>
-              <a:buClr>
-                <a:srgbClr val="FFFFFF"/>
-              </a:buClr>
-              <a:buSzPts val="1500"/>
-              <a:buFont typeface="Arial"/>
-              <a:buNone/>
-            </a:pPr>
-            <a:r>
-              <a:rPr b="1" i="0" lang="en-US" sz="1500" u="none" cap="none" strike="noStrike">
-                <a:solidFill>
-                  <a:srgbClr val="FFFFFF"/>
-                </a:solidFill>
-                <a:latin typeface="Arial"/>
-                <a:ea typeface="Arial"/>
-                <a:cs typeface="Arial"/>
-                <a:sym typeface="Arial"/>
-              </a:rPr>
-              <a:t>scPTR (analytic)</a:t>
-            </a:r>
-            <a:endParaRPr b="0" i="0" sz="1500" u="none" cap="none" strike="noStrike">
-              <a:solidFill>
-                <a:schemeClr val="dk1"/>
-              </a:solidFill>
-              <a:latin typeface="Calibri"/>
-              <a:ea typeface="Calibri"/>
-              <a:cs typeface="Calibri"/>
-              <a:sym typeface="Calibri"/>
-            </a:endParaRPr>
-          </a:p>
-        </p:txBody>
-      </p:sp>
-      <p:sp>
-        <p:nvSpPr>
-          <p:cNvPr id="165" name="Google Shape;165;p13"/>
-          <p:cNvSpPr/>
-          <p:nvPr/>
-        </p:nvSpPr>
-        <p:spPr>
-          <a:xfrm>
-            <a:off x="10149840" y="3291840"/>
-            <a:ext cx="1234440" cy="512064"/>
-          </a:xfrm>
-          <a:prstGeom prst="rect">
-            <a:avLst/>
-          </a:prstGeom>
-          <a:noFill/>
-          <a:ln>
-            <a:noFill/>
-          </a:ln>
-        </p:spPr>
-        <p:txBody>
-          <a:bodyPr anchorCtr="0" anchor="ctr" bIns="0" lIns="0" spcFirstLastPara="1" rIns="0" wrap="square" tIns="0">
-            <a:noAutofit/>
-          </a:bodyPr>
-          <a:lstStyle/>
-          <a:p>
-            <a:pPr indent="0" lvl="0" marL="0" marR="0" rtl="0" algn="r">
-              <a:spcBef>
-                <a:spcPts val="0"/>
-              </a:spcBef>
-              <a:spcAft>
-                <a:spcPts val="0"/>
-              </a:spcAft>
-              <a:buClr>
-                <a:srgbClr val="FFFFFF"/>
-              </a:buClr>
-              <a:buSzPts val="1600"/>
-              <a:buFont typeface="Arial"/>
-              <a:buNone/>
-            </a:pPr>
-            <a:r>
-              <a:rPr b="1" i="0" lang="en-US" sz="1600" u="none" cap="none" strike="noStrike">
-                <a:solidFill>
-                  <a:srgbClr val="FFFFFF"/>
-                </a:solidFill>
-                <a:latin typeface="Arial"/>
-                <a:ea typeface="Arial"/>
-                <a:cs typeface="Arial"/>
-                <a:sym typeface="Arial"/>
-              </a:rPr>
-              <a:t>−0.81</a:t>
-            </a:r>
-            <a:endParaRPr b="0" i="0" sz="1600" u="none" cap="none" strike="noStrike">
-              <a:solidFill>
-                <a:schemeClr val="dk1"/>
-              </a:solidFill>
-              <a:latin typeface="Calibri"/>
-              <a:ea typeface="Calibri"/>
-              <a:cs typeface="Calibri"/>
-              <a:sym typeface="Calibri"/>
-            </a:endParaRPr>
-          </a:p>
-        </p:txBody>
-      </p:sp>
-      <p:sp>
-        <p:nvSpPr>
-          <p:cNvPr id="166" name="Google Shape;166;p13"/>
-          <p:cNvSpPr/>
-          <p:nvPr/>
-        </p:nvSpPr>
-        <p:spPr>
-          <a:xfrm>
-            <a:off x="6583680" y="3895344"/>
-            <a:ext cx="4983480" cy="512064"/>
-          </a:xfrm>
-          <a:prstGeom prst="roundRect">
-            <a:avLst>
-              <a:gd fmla="val 10714" name="adj"/>
-            </a:avLst>
-          </a:prstGeom>
-          <a:solidFill>
-            <a:srgbClr val="F2F2F2"/>
-          </a:solidFill>
-          <a:ln cap="flat" cmpd="sng" w="12700">
-            <a:solidFill>
-              <a:srgbClr val="BBBBBB"/>
-            </a:solidFill>
-            <a:prstDash val="solid"/>
-            <a:round/>
-            <a:headEnd len="sm" w="sm" type="none"/>
-            <a:tailEnd len="sm" w="sm" type="none"/>
-          </a:ln>
-        </p:spPr>
-        <p:txBody>
-          <a:bodyPr anchorCtr="0" anchor="ctr" bIns="91425" lIns="91425" spcFirstLastPara="1" rIns="91425" wrap="square" tIns="91425">
-            <a:noAutofit/>
-          </a:bodyPr>
-          <a:lstStyle/>
-          <a:p>
-            <a:pPr indent="0" lvl="0" marL="0" rtl="0" algn="l">
-              <a:spcBef>
-                <a:spcPts val="0"/>
-              </a:spcBef>
-              <a:spcAft>
-                <a:spcPts val="0"/>
-              </a:spcAft>
-              <a:buNone/>
-            </a:pPr>
-            <a:r>
-              <a:t/>
-            </a:r>
-            <a:endParaRPr/>
-          </a:p>
-        </p:txBody>
-      </p:sp>
-      <p:sp>
-        <p:nvSpPr>
-          <p:cNvPr id="167" name="Google Shape;167;p13"/>
-          <p:cNvSpPr/>
-          <p:nvPr/>
-        </p:nvSpPr>
-        <p:spPr>
-          <a:xfrm>
-            <a:off x="6766560" y="3895344"/>
-            <a:ext cx="3383280" cy="512064"/>
-          </a:xfrm>
-          <a:prstGeom prst="rect">
-            <a:avLst/>
-          </a:prstGeom>
-          <a:noFill/>
-          <a:ln>
-            <a:noFill/>
-          </a:ln>
-        </p:spPr>
-        <p:txBody>
-          <a:bodyPr anchorCtr="0" anchor="ctr" bIns="0" lIns="0" spcFirstLastPara="1" rIns="0" wrap="square" tIns="0">
-            <a:noAutofit/>
-          </a:bodyPr>
-          <a:lstStyle/>
-          <a:p>
-            <a:pPr indent="0" lvl="0" marL="0" marR="0" rtl="0" algn="l">
-              <a:spcBef>
-                <a:spcPts val="0"/>
-              </a:spcBef>
-              <a:spcAft>
-                <a:spcPts val="0"/>
-              </a:spcAft>
-              <a:buClr>
-                <a:srgbClr val="111111"/>
-              </a:buClr>
-              <a:buSzPts val="1500"/>
-              <a:buFont typeface="Arial"/>
-              <a:buNone/>
-            </a:pPr>
-            <a:r>
-              <a:rPr b="0" i="0" lang="en-US" sz="1500" u="none" cap="none" strike="noStrike">
-                <a:solidFill>
-                  <a:srgbClr val="111111"/>
-                </a:solidFill>
-                <a:latin typeface="Arial"/>
-                <a:ea typeface="Arial"/>
-                <a:cs typeface="Arial"/>
-                <a:sym typeface="Arial"/>
-              </a:rPr>
-              <a:t>UniTVelo</a:t>
-            </a:r>
-            <a:endParaRPr b="0" i="0" sz="1500" u="none" cap="none" strike="noStrike">
-              <a:solidFill>
-                <a:schemeClr val="dk1"/>
-              </a:solidFill>
-              <a:latin typeface="Calibri"/>
-              <a:ea typeface="Calibri"/>
-              <a:cs typeface="Calibri"/>
-              <a:sym typeface="Calibri"/>
-            </a:endParaRPr>
-          </a:p>
-        </p:txBody>
-      </p:sp>
-      <p:sp>
-        <p:nvSpPr>
-          <p:cNvPr id="168" name="Google Shape;168;p13"/>
-          <p:cNvSpPr/>
-          <p:nvPr/>
-        </p:nvSpPr>
-        <p:spPr>
-          <a:xfrm>
-            <a:off x="10149840" y="3895344"/>
-            <a:ext cx="1234440" cy="512064"/>
-          </a:xfrm>
-          <a:prstGeom prst="rect">
-            <a:avLst/>
-          </a:prstGeom>
-          <a:noFill/>
-          <a:ln>
-            <a:noFill/>
-          </a:ln>
-        </p:spPr>
-        <p:txBody>
-          <a:bodyPr anchorCtr="0" anchor="ctr" bIns="0" lIns="0" spcFirstLastPara="1" rIns="0" wrap="square" tIns="0">
-            <a:noAutofit/>
-          </a:bodyPr>
-          <a:lstStyle/>
-          <a:p>
-            <a:pPr indent="0" lvl="0" marL="0" marR="0" rtl="0" algn="r">
-              <a:spcBef>
-                <a:spcPts val="0"/>
-              </a:spcBef>
-              <a:spcAft>
-                <a:spcPts val="0"/>
-              </a:spcAft>
-              <a:buClr>
-                <a:srgbClr val="111111"/>
-              </a:buClr>
-              <a:buSzPts val="1600"/>
-              <a:buFont typeface="Arial"/>
-              <a:buNone/>
-            </a:pPr>
-            <a:r>
-              <a:rPr b="1" i="0" lang="en-US" sz="1600" u="none" cap="none" strike="noStrike">
-                <a:solidFill>
-                  <a:srgbClr val="111111"/>
-                </a:solidFill>
-                <a:latin typeface="Arial"/>
-                <a:ea typeface="Arial"/>
-                <a:cs typeface="Arial"/>
-                <a:sym typeface="Arial"/>
-              </a:rPr>
-              <a:t>−0.33</a:t>
-            </a:r>
-            <a:endParaRPr b="0" i="0" sz="1600" u="none" cap="none" strike="noStrike">
-              <a:solidFill>
-                <a:schemeClr val="dk1"/>
-              </a:solidFill>
-              <a:latin typeface="Calibri"/>
-              <a:ea typeface="Calibri"/>
-              <a:cs typeface="Calibri"/>
-              <a:sym typeface="Calibri"/>
-            </a:endParaRPr>
-          </a:p>
-        </p:txBody>
-      </p:sp>
-      <p:sp>
-        <p:nvSpPr>
-          <p:cNvPr id="169" name="Google Shape;169;p13"/>
-          <p:cNvSpPr/>
-          <p:nvPr/>
-        </p:nvSpPr>
-        <p:spPr>
-          <a:xfrm>
-            <a:off x="6583680" y="4498848"/>
-            <a:ext cx="4983480" cy="512064"/>
-          </a:xfrm>
-          <a:prstGeom prst="roundRect">
-            <a:avLst>
-              <a:gd fmla="val 10714" name="adj"/>
-            </a:avLst>
-          </a:prstGeom>
-          <a:solidFill>
-            <a:srgbClr val="F2F2F2"/>
-          </a:solidFill>
-          <a:ln cap="flat" cmpd="sng" w="12700">
-            <a:solidFill>
-              <a:srgbClr val="BBBBBB"/>
-            </a:solidFill>
-            <a:prstDash val="solid"/>
-            <a:round/>
-            <a:headEnd len="sm" w="sm" type="none"/>
-            <a:tailEnd len="sm" w="sm" type="none"/>
-          </a:ln>
-        </p:spPr>
-        <p:txBody>
-          <a:bodyPr anchorCtr="0" anchor="ctr" bIns="91425" lIns="91425" spcFirstLastPara="1" rIns="91425" wrap="square" tIns="91425">
-            <a:noAutofit/>
-          </a:bodyPr>
-          <a:lstStyle/>
-          <a:p>
-            <a:pPr indent="0" lvl="0" marL="0" rtl="0" algn="l">
-              <a:spcBef>
-                <a:spcPts val="0"/>
-              </a:spcBef>
-              <a:spcAft>
-                <a:spcPts val="0"/>
-              </a:spcAft>
-              <a:buNone/>
-            </a:pPr>
-            <a:r>
-              <a:t/>
-            </a:r>
-            <a:endParaRPr/>
-          </a:p>
-        </p:txBody>
-      </p:sp>
-      <p:sp>
-        <p:nvSpPr>
-          <p:cNvPr id="170" name="Google Shape;170;p13"/>
-          <p:cNvSpPr/>
-          <p:nvPr/>
-        </p:nvSpPr>
-        <p:spPr>
-          <a:xfrm>
-            <a:off x="6766560" y="4498848"/>
-            <a:ext cx="3383280" cy="512064"/>
-          </a:xfrm>
-          <a:prstGeom prst="rect">
-            <a:avLst/>
-          </a:prstGeom>
-          <a:noFill/>
-          <a:ln>
-            <a:noFill/>
-          </a:ln>
-        </p:spPr>
-        <p:txBody>
-          <a:bodyPr anchorCtr="0" anchor="ctr" bIns="0" lIns="0" spcFirstLastPara="1" rIns="0" wrap="square" tIns="0">
-            <a:noAutofit/>
-          </a:bodyPr>
-          <a:lstStyle/>
-          <a:p>
-            <a:pPr indent="0" lvl="0" marL="0" marR="0" rtl="0" algn="l">
-              <a:spcBef>
-                <a:spcPts val="0"/>
-              </a:spcBef>
-              <a:spcAft>
-                <a:spcPts val="0"/>
-              </a:spcAft>
-              <a:buClr>
-                <a:srgbClr val="111111"/>
-              </a:buClr>
-              <a:buSzPts val="1500"/>
-              <a:buFont typeface="Arial"/>
-              <a:buNone/>
-            </a:pPr>
-            <a:r>
-              <a:rPr b="0" i="0" lang="en-US" sz="1500" u="none" cap="none" strike="noStrike">
-                <a:solidFill>
-                  <a:srgbClr val="111111"/>
-                </a:solidFill>
-                <a:latin typeface="Arial"/>
-                <a:ea typeface="Arial"/>
-                <a:cs typeface="Arial"/>
-                <a:sym typeface="Arial"/>
-              </a:rPr>
-              <a:t>scVelo (steady-state)</a:t>
-            </a:r>
-            <a:endParaRPr b="0" i="0" sz="1500" u="none" cap="none" strike="noStrike">
-              <a:solidFill>
-                <a:schemeClr val="dk1"/>
-              </a:solidFill>
-              <a:latin typeface="Calibri"/>
-              <a:ea typeface="Calibri"/>
-              <a:cs typeface="Calibri"/>
-              <a:sym typeface="Calibri"/>
-            </a:endParaRPr>
-          </a:p>
-        </p:txBody>
-      </p:sp>
-      <p:sp>
-        <p:nvSpPr>
-          <p:cNvPr id="171" name="Google Shape;171;p13"/>
-          <p:cNvSpPr/>
-          <p:nvPr/>
-        </p:nvSpPr>
-        <p:spPr>
-          <a:xfrm>
-            <a:off x="10149840" y="4498848"/>
-            <a:ext cx="1234440" cy="512064"/>
-          </a:xfrm>
-          <a:prstGeom prst="rect">
-            <a:avLst/>
-          </a:prstGeom>
-          <a:noFill/>
-          <a:ln>
-            <a:noFill/>
-          </a:ln>
-        </p:spPr>
-        <p:txBody>
-          <a:bodyPr anchorCtr="0" anchor="ctr" bIns="0" lIns="0" spcFirstLastPara="1" rIns="0" wrap="square" tIns="0">
-            <a:noAutofit/>
-          </a:bodyPr>
-          <a:lstStyle/>
-          <a:p>
-            <a:pPr indent="0" lvl="0" marL="0" marR="0" rtl="0" algn="r">
-              <a:spcBef>
-                <a:spcPts val="0"/>
-              </a:spcBef>
-              <a:spcAft>
-                <a:spcPts val="0"/>
-              </a:spcAft>
-              <a:buClr>
-                <a:srgbClr val="111111"/>
-              </a:buClr>
-              <a:buSzPts val="1600"/>
-              <a:buFont typeface="Arial"/>
-              <a:buNone/>
-            </a:pPr>
-            <a:r>
-              <a:rPr b="1" i="0" lang="en-US" sz="1600" u="none" cap="none" strike="noStrike">
-                <a:solidFill>
-                  <a:srgbClr val="111111"/>
-                </a:solidFill>
-                <a:latin typeface="Arial"/>
-                <a:ea typeface="Arial"/>
-                <a:cs typeface="Arial"/>
-                <a:sym typeface="Arial"/>
-              </a:rPr>
-              <a:t>−0.37</a:t>
-            </a:r>
-            <a:endParaRPr b="0" i="0" sz="1600" u="none" cap="none" strike="noStrike">
-              <a:solidFill>
-                <a:schemeClr val="dk1"/>
-              </a:solidFill>
-              <a:latin typeface="Calibri"/>
-              <a:ea typeface="Calibri"/>
-              <a:cs typeface="Calibri"/>
-              <a:sym typeface="Calibri"/>
-            </a:endParaRPr>
-          </a:p>
-        </p:txBody>
-      </p:sp>
-      <p:sp>
-        <p:nvSpPr>
-          <p:cNvPr id="172" name="Google Shape;172;p13"/>
-          <p:cNvSpPr/>
-          <p:nvPr/>
-        </p:nvSpPr>
-        <p:spPr>
-          <a:xfrm>
-            <a:off x="6583680" y="5102352"/>
-            <a:ext cx="4983480" cy="512064"/>
-          </a:xfrm>
-          <a:prstGeom prst="roundRect">
-            <a:avLst>
-              <a:gd fmla="val 10714" name="adj"/>
-            </a:avLst>
-          </a:prstGeom>
-          <a:solidFill>
-            <a:srgbClr val="F2F2F2"/>
-          </a:solidFill>
-          <a:ln cap="flat" cmpd="sng" w="12700">
-            <a:solidFill>
-              <a:srgbClr val="BBBBBB"/>
-            </a:solidFill>
-            <a:prstDash val="solid"/>
-            <a:round/>
-            <a:headEnd len="sm" w="sm" type="none"/>
-            <a:tailEnd len="sm" w="sm" type="none"/>
-          </a:ln>
-        </p:spPr>
-        <p:txBody>
-          <a:bodyPr anchorCtr="0" anchor="ctr" bIns="91425" lIns="91425" spcFirstLastPara="1" rIns="91425" wrap="square" tIns="91425">
-            <a:noAutofit/>
-          </a:bodyPr>
-          <a:lstStyle/>
-          <a:p>
-            <a:pPr indent="0" lvl="0" marL="0" rtl="0" algn="l">
-              <a:spcBef>
-                <a:spcPts val="0"/>
-              </a:spcBef>
-              <a:spcAft>
-                <a:spcPts val="0"/>
-              </a:spcAft>
-              <a:buNone/>
-            </a:pPr>
-            <a:r>
-              <a:t/>
-            </a:r>
-            <a:endParaRPr/>
-          </a:p>
-        </p:txBody>
-      </p:sp>
-      <p:sp>
-        <p:nvSpPr>
-          <p:cNvPr id="173" name="Google Shape;173;p13"/>
-          <p:cNvSpPr/>
-          <p:nvPr/>
-        </p:nvSpPr>
-        <p:spPr>
-          <a:xfrm>
-            <a:off x="6766560" y="5102352"/>
-            <a:ext cx="3383280" cy="512064"/>
-          </a:xfrm>
-          <a:prstGeom prst="rect">
-            <a:avLst/>
-          </a:prstGeom>
-          <a:noFill/>
-          <a:ln>
-            <a:noFill/>
-          </a:ln>
-        </p:spPr>
-        <p:txBody>
-          <a:bodyPr anchorCtr="0" anchor="ctr" bIns="0" lIns="0" spcFirstLastPara="1" rIns="0" wrap="square" tIns="0">
-            <a:noAutofit/>
-          </a:bodyPr>
-          <a:lstStyle/>
-          <a:p>
-            <a:pPr indent="0" lvl="0" marL="0" marR="0" rtl="0" algn="l">
-              <a:spcBef>
-                <a:spcPts val="0"/>
-              </a:spcBef>
-              <a:spcAft>
-                <a:spcPts val="0"/>
-              </a:spcAft>
-              <a:buClr>
-                <a:srgbClr val="111111"/>
-              </a:buClr>
-              <a:buSzPts val="1500"/>
-              <a:buFont typeface="Arial"/>
-              <a:buNone/>
-            </a:pPr>
-            <a:r>
-              <a:rPr b="0" i="0" lang="en-US" sz="1500" u="none" cap="none" strike="noStrike">
-                <a:solidFill>
-                  <a:srgbClr val="111111"/>
-                </a:solidFill>
-                <a:latin typeface="Arial"/>
-                <a:ea typeface="Arial"/>
-                <a:cs typeface="Arial"/>
-                <a:sym typeface="Arial"/>
-              </a:rPr>
-              <a:t>velVI</a:t>
-            </a:r>
-            <a:endParaRPr b="0" i="0" sz="1500" u="none" cap="none" strike="noStrike">
-              <a:solidFill>
-                <a:schemeClr val="dk1"/>
-              </a:solidFill>
-              <a:latin typeface="Calibri"/>
-              <a:ea typeface="Calibri"/>
-              <a:cs typeface="Calibri"/>
-              <a:sym typeface="Calibri"/>
-            </a:endParaRPr>
-          </a:p>
-        </p:txBody>
-      </p:sp>
-      <p:sp>
-        <p:nvSpPr>
-          <p:cNvPr id="174" name="Google Shape;174;p13"/>
-          <p:cNvSpPr/>
-          <p:nvPr/>
-        </p:nvSpPr>
-        <p:spPr>
-          <a:xfrm>
-            <a:off x="10149840" y="5102352"/>
-            <a:ext cx="1234440" cy="512064"/>
-          </a:xfrm>
-          <a:prstGeom prst="rect">
-            <a:avLst/>
-          </a:prstGeom>
-          <a:noFill/>
-          <a:ln>
-            <a:noFill/>
-          </a:ln>
-        </p:spPr>
-        <p:txBody>
-          <a:bodyPr anchorCtr="0" anchor="ctr" bIns="0" lIns="0" spcFirstLastPara="1" rIns="0" wrap="square" tIns="0">
-            <a:noAutofit/>
-          </a:bodyPr>
-          <a:lstStyle/>
-          <a:p>
-            <a:pPr indent="0" lvl="0" marL="0" marR="0" rtl="0" algn="r">
-              <a:spcBef>
-                <a:spcPts val="0"/>
-              </a:spcBef>
-              <a:spcAft>
-                <a:spcPts val="0"/>
-              </a:spcAft>
-              <a:buClr>
-                <a:srgbClr val="111111"/>
-              </a:buClr>
-              <a:buSzPts val="1600"/>
-              <a:buFont typeface="Arial"/>
-              <a:buNone/>
-            </a:pPr>
-            <a:r>
-              <a:rPr b="1" i="0" lang="en-US" sz="1600" u="none" cap="none" strike="noStrike">
-                <a:solidFill>
-                  <a:srgbClr val="111111"/>
-                </a:solidFill>
-                <a:latin typeface="Arial"/>
-                <a:ea typeface="Arial"/>
-                <a:cs typeface="Arial"/>
-                <a:sym typeface="Arial"/>
-              </a:rPr>
-              <a:t>−0.28</a:t>
-            </a:r>
-            <a:endParaRPr b="0" i="0" sz="1600" u="none" cap="none" strike="noStrike">
-              <a:solidFill>
-                <a:schemeClr val="dk1"/>
-              </a:solidFill>
-              <a:latin typeface="Calibri"/>
-              <a:ea typeface="Calibri"/>
-              <a:cs typeface="Calibri"/>
-              <a:sym typeface="Calibri"/>
-            </a:endParaRPr>
-          </a:p>
-        </p:txBody>
-      </p:sp>
-      <p:sp>
-        <p:nvSpPr>
-          <p:cNvPr id="175" name="Google Shape;175;p13"/>
-          <p:cNvSpPr txBox="1"/>
-          <p:nvPr/>
-        </p:nvSpPr>
-        <p:spPr>
-          <a:xfrm>
-            <a:off x="6583675" y="2604575"/>
-            <a:ext cx="4937700" cy="400200"/>
-          </a:xfrm>
-          <a:prstGeom prst="rect">
-            <a:avLst/>
-          </a:prstGeom>
-          <a:noFill/>
-          <a:ln>
-            <a:noFill/>
-          </a:ln>
-        </p:spPr>
-        <p:txBody>
-          <a:bodyPr anchorCtr="0" anchor="t" bIns="91425" lIns="91425" spcFirstLastPara="1" rIns="91425" wrap="square" tIns="91425">
-            <a:spAutoFit/>
-          </a:bodyPr>
-          <a:lstStyle/>
-          <a:p>
-            <a:pPr indent="0" lvl="0" marL="0" rtl="0" algn="l">
-              <a:spcBef>
-                <a:spcPts val="0"/>
-              </a:spcBef>
-              <a:spcAft>
-                <a:spcPts val="0"/>
-              </a:spcAft>
-              <a:buNone/>
-            </a:pPr>
-            <a:r>
-              <a:rPr lang="en-US"/>
-              <a:t>scPTR on sci-fate 4sU labelling (cleanest ground truth) </a:t>
-            </a:r>
-            <a:endParaRPr/>
-          </a:p>
-        </p:txBody>
-      </p:sp>
-      <p:sp>
-        <p:nvSpPr>
-          <p:cNvPr id="176" name="Google Shape;176;p13"/>
-          <p:cNvSpPr txBox="1"/>
-          <p:nvPr/>
-        </p:nvSpPr>
-        <p:spPr>
-          <a:xfrm>
-            <a:off x="6583675" y="2891650"/>
-            <a:ext cx="3000000" cy="400200"/>
-          </a:xfrm>
-          <a:prstGeom prst="rect">
-            <a:avLst/>
-          </a:prstGeom>
-          <a:noFill/>
-          <a:ln>
-            <a:noFill/>
-          </a:ln>
-        </p:spPr>
-        <p:txBody>
-          <a:bodyPr anchorCtr="0" anchor="t" bIns="91425" lIns="91425" spcFirstLastPara="1" rIns="91425" wrap="square" tIns="91425">
-            <a:spAutoFit/>
-          </a:bodyPr>
-          <a:lstStyle/>
-          <a:p>
-            <a:pPr indent="0" lvl="0" marL="0" rtl="0" algn="l">
-              <a:spcBef>
-                <a:spcPts val="0"/>
-              </a:spcBef>
-              <a:spcAft>
-                <a:spcPts val="0"/>
-              </a:spcAft>
-              <a:buNone/>
-            </a:pPr>
-            <a:r>
-              <a:rPr lang="en-US"/>
-              <a:t>Spearman ρ — sci-fate 4sU </a:t>
-            </a:r>
-            <a:endParaRPr/>
-          </a:p>
-        </p:txBody>
-      </p:sp>
-    </p:spTree>
-  </p:cSld>
-  <p:clrMapOvr>
-    <a:masterClrMapping/>
-  </p:clrMapOvr>
-</p:sld>
-</file>
-
-<file path=ppt/slides/slide12.xml><?xml version="1.0" encoding="utf-8"?>
+<file path=ppt/slides/slide10.xml><?xml version="1.0" encoding="utf-8"?>
 <p:sld xmlns:a="http://schemas.openxmlformats.org/drawingml/2006/main" xmlns:r="http://schemas.openxmlformats.org/officeDocument/2006/relationships" xmlns:mc="http://schemas.openxmlformats.org/markup-compatibility/2006" xmlns:mv="urn:schemas-microsoft-com:mac:vml" xmlns:p="http://schemas.openxmlformats.org/presentationml/2006/main" xmlns:c="http://schemas.openxmlformats.org/drawingml/2006/chart" xmlns:dgm="http://schemas.openxmlformats.org/drawingml/2006/diagram" xmlns:o="urn:schemas-microsoft-com:office:office" xmlns:v="urn:schemas-microsoft-com:vml" xmlns:pvml="urn:schemas-microsoft-com:office:powerpoint" xmlns:com="http://schemas.openxmlformats.org/drawingml/2006/compatibility" xmlns:p14="http://schemas.microsoft.com/office/powerpoint/2010/main" xmlns:p15="http://schemas.microsoft.com/office/powerpoint/2012/main" xmlns:ahyp="http://schemas.microsoft.com/office/drawing/2018/hyperlinkcolor">
   <p:cSld>
     <p:bg>
@@ -6838,7 +5775,7 @@
 </p:sld>
 </file>
 
-<file path=ppt/slides/slide13.xml><?xml version="1.0" encoding="utf-8"?>
+<file path=ppt/slides/slide11.xml><?xml version="1.0" encoding="utf-8"?>
 <p:sld xmlns:a="http://schemas.openxmlformats.org/drawingml/2006/main" xmlns:r="http://schemas.openxmlformats.org/officeDocument/2006/relationships" xmlns:mc="http://schemas.openxmlformats.org/markup-compatibility/2006" xmlns:mv="urn:schemas-microsoft-com:mac:vml" xmlns:p="http://schemas.openxmlformats.org/presentationml/2006/main" xmlns:c="http://schemas.openxmlformats.org/drawingml/2006/chart" xmlns:dgm="http://schemas.openxmlformats.org/drawingml/2006/diagram" xmlns:o="urn:schemas-microsoft-com:office:office" xmlns:v="urn:schemas-microsoft-com:vml" xmlns:pvml="urn:schemas-microsoft-com:office:powerpoint" xmlns:com="http://schemas.openxmlformats.org/drawingml/2006/compatibility" xmlns:p14="http://schemas.microsoft.com/office/powerpoint/2010/main" xmlns:p15="http://schemas.microsoft.com/office/powerpoint/2012/main" xmlns:ahyp="http://schemas.microsoft.com/office/drawing/2018/hyperlinkcolor">
   <p:cSld>
     <p:bg>
@@ -7019,7 +5956,7 @@
 </p:sld>
 </file>
 
-<file path=ppt/slides/slide14.xml><?xml version="1.0" encoding="utf-8"?>
+<file path=ppt/slides/slide12.xml><?xml version="1.0" encoding="utf-8"?>
 <p:sld xmlns:a="http://schemas.openxmlformats.org/drawingml/2006/main" xmlns:r="http://schemas.openxmlformats.org/officeDocument/2006/relationships" xmlns:mc="http://schemas.openxmlformats.org/markup-compatibility/2006" xmlns:mv="urn:schemas-microsoft-com:mac:vml" xmlns:p="http://schemas.openxmlformats.org/presentationml/2006/main" xmlns:c="http://schemas.openxmlformats.org/drawingml/2006/chart" xmlns:dgm="http://schemas.openxmlformats.org/drawingml/2006/diagram" xmlns:o="urn:schemas-microsoft-com:office:office" xmlns:v="urn:schemas-microsoft-com:vml" xmlns:pvml="urn:schemas-microsoft-com:office:powerpoint" xmlns:com="http://schemas.openxmlformats.org/drawingml/2006/compatibility" xmlns:p14="http://schemas.microsoft.com/office/powerpoint/2010/main" xmlns:p15="http://schemas.microsoft.com/office/powerpoint/2012/main" xmlns:ahyp="http://schemas.microsoft.com/office/drawing/2018/hyperlinkcolor">
   <p:cSld>
     <p:bg>
@@ -7348,6 +6285,232 @@
           </a:p>
         </p:txBody>
       </p:sp>
+    </p:spTree>
+  </p:cSld>
+  <p:clrMapOvr>
+    <a:masterClrMapping/>
+  </p:clrMapOvr>
+</p:sld>
+</file>
+
+<file path=ppt/slides/slide13.xml><?xml version="1.0" encoding="utf-8"?>
+<p:sld xmlns:a="http://schemas.openxmlformats.org/drawingml/2006/main" xmlns:p="http://schemas.openxmlformats.org/presentationml/2006/main" xmlns:r="http://schemas.openxmlformats.org/officeDocument/2006/relationships">
+  <p:cSld>
+    <p:bg>
+      <p:bgPr>
+        <a:solidFill>
+          <a:srgbClr val="FFFFFF"/>
+        </a:solidFill>
+        <a:effectLst/>
+      </p:bgPr>
+    </p:bg>
+    <p:spTree>
+      <p:nvGrpSpPr>
+        <p:cNvPr id="1" name=""/>
+        <p:cNvGrpSpPr/>
+        <p:nvPr/>
+      </p:nvGrpSpPr>
+      <p:grpSpPr/>
+      <p:sp>
+        <p:nvSpPr>
+          <p:cNvPr id="3" name="TextBox 2"/>
+          <p:cNvSpPr txBox="1"/>
+          <p:nvPr/>
+        </p:nvSpPr>
+        <p:spPr>
+          <a:xfrm>
+            <a:off x="609600" y="6206490"/>
+            <a:ext cx="10972800" cy="548640"/>
+          </a:xfrm>
+          <a:prstGeom prst="rect">
+            <a:avLst/>
+          </a:prstGeom>
+          <a:noFill/>
+        </p:spPr>
+        <p:txBody>
+          <a:bodyPr wrap="square">
+            <a:spAutoFit/>
+          </a:bodyPr>
+          <a:lstStyle/>
+          <a:p>
+            <a:pPr algn="ctr"/>
+            <a:r>
+              <a:rPr sz="1300">
+                <a:solidFill>
+                  <a:srgbClr val="444444"/>
+                </a:solidFill>
+              </a:rPr>
+              <a:t>Silhouette of γ-space labels in both spaces. 5/8 pancreatic cell types show stronger γ-space than expression-space substructure.</a:t>
+            </a:r>
+          </a:p>
+        </p:txBody>
+      </p:sp>
+      <p:sp>
+        <p:nvSpPr>
+          <p:cNvPr id="4" name="FigBg_4"/>
+          <p:cNvSpPr>
+            <a:spLocks noGrp="1"/>
+          </p:cNvSpPr>
+          <p:nvPr/>
+        </p:nvSpPr>
+        <p:spPr>
+          <a:xfrm>
+            <a:off x="365760" y="1289505"/>
+            <a:ext cx="11460480" cy="4416149"/>
+          </a:xfrm>
+          <a:prstGeom prst="roundRect">
+            <a:avLst/>
+          </a:prstGeom>
+          <a:solidFill>
+            <a:srgbClr val="FFFFFF"/>
+          </a:solidFill>
+          <a:ln w="0">
+            <a:noFill/>
+          </a:ln>
+        </p:spPr>
+        <p:txBody>
+          <a:bodyPr/>
+          <a:lstStyle/>
+          <a:p/>
+        </p:txBody>
+      </p:sp>
+      <p:pic>
+        <p:nvPicPr>
+          <p:cNvPr id="5" name="Picture 4" descr="image.png"/>
+          <p:cNvPicPr>
+            <a:picLocks noChangeAspect="1"/>
+          </p:cNvPicPr>
+          <p:nvPr/>
+        </p:nvPicPr>
+        <p:blipFill>
+          <a:blip r:embed="rId2"/>
+          <a:stretch>
+            <a:fillRect/>
+          </a:stretch>
+        </p:blipFill>
+        <p:spPr>
+          <a:xfrm>
+            <a:off x="502920" y="1426665"/>
+            <a:ext cx="11186160" cy="4141829"/>
+          </a:xfrm>
+          <a:prstGeom prst="rect">
+            <a:avLst/>
+          </a:prstGeom>
+        </p:spPr>
+      </p:pic>
+    </p:spTree>
+  </p:cSld>
+  <p:clrMapOvr>
+    <a:masterClrMapping/>
+  </p:clrMapOvr>
+</p:sld>
+</file>
+
+<file path=ppt/slides/slide14.xml><?xml version="1.0" encoding="utf-8"?>
+<p:sld xmlns:a="http://schemas.openxmlformats.org/drawingml/2006/main" xmlns:p="http://schemas.openxmlformats.org/presentationml/2006/main" xmlns:r="http://schemas.openxmlformats.org/officeDocument/2006/relationships">
+  <p:cSld>
+    <p:bg>
+      <p:bgPr>
+        <a:solidFill>
+          <a:srgbClr val="FFFFFF"/>
+        </a:solidFill>
+        <a:effectLst/>
+      </p:bgPr>
+    </p:bg>
+    <p:spTree>
+      <p:nvGrpSpPr>
+        <p:cNvPr id="1" name=""/>
+        <p:cNvGrpSpPr/>
+        <p:nvPr/>
+      </p:nvGrpSpPr>
+      <p:grpSpPr/>
+      <p:sp>
+        <p:nvSpPr>
+          <p:cNvPr id="3" name="TextBox 2"/>
+          <p:cNvSpPr txBox="1"/>
+          <p:nvPr/>
+        </p:nvSpPr>
+        <p:spPr>
+          <a:xfrm>
+            <a:off x="609600" y="6206490"/>
+            <a:ext cx="10972800" cy="548640"/>
+          </a:xfrm>
+          <a:prstGeom prst="rect">
+            <a:avLst/>
+          </a:prstGeom>
+          <a:noFill/>
+        </p:spPr>
+        <p:txBody>
+          <a:bodyPr wrap="square">
+            <a:spAutoFit/>
+          </a:bodyPr>
+          <a:lstStyle/>
+          <a:p>
+            <a:pPr algn="ctr"/>
+            <a:r>
+              <a:rPr sz="1300">
+                <a:solidFill>
+                  <a:srgbClr val="444444"/>
+                </a:solidFill>
+              </a:rPr>
+              <a:t>6/11 hippocampal cell types show γ-space substructure invisible or reduced in expression space.</a:t>
+            </a:r>
+          </a:p>
+        </p:txBody>
+      </p:sp>
+      <p:sp>
+        <p:nvSpPr>
+          <p:cNvPr id="4" name="FigBg_4"/>
+          <p:cNvSpPr>
+            <a:spLocks noGrp="1"/>
+          </p:cNvSpPr>
+          <p:nvPr/>
+        </p:nvSpPr>
+        <p:spPr>
+          <a:xfrm>
+            <a:off x="365760" y="1146520"/>
+            <a:ext cx="11460480" cy="4702119"/>
+          </a:xfrm>
+          <a:prstGeom prst="roundRect">
+            <a:avLst/>
+          </a:prstGeom>
+          <a:solidFill>
+            <a:srgbClr val="FFFFFF"/>
+          </a:solidFill>
+          <a:ln w="0">
+            <a:noFill/>
+          </a:ln>
+        </p:spPr>
+        <p:txBody>
+          <a:bodyPr/>
+          <a:lstStyle/>
+          <a:p/>
+        </p:txBody>
+      </p:sp>
+      <p:pic>
+        <p:nvPicPr>
+          <p:cNvPr id="5" name="Picture 4" descr="image.png"/>
+          <p:cNvPicPr>
+            <a:picLocks noChangeAspect="1"/>
+          </p:cNvPicPr>
+          <p:nvPr/>
+        </p:nvPicPr>
+        <p:blipFill>
+          <a:blip r:embed="rId2"/>
+          <a:stretch>
+            <a:fillRect/>
+          </a:stretch>
+        </p:blipFill>
+        <p:spPr>
+          <a:xfrm>
+            <a:off x="502920" y="1283680"/>
+            <a:ext cx="11186160" cy="4427799"/>
+          </a:xfrm>
+          <a:prstGeom prst="rect">
+            <a:avLst/>
+          </a:prstGeom>
+        </p:spPr>
+      </p:pic>
     </p:spTree>
   </p:cSld>
   <p:clrMapOvr>
@@ -7374,9 +6537,72 @@
         <p:nvPr/>
       </p:nvGrpSpPr>
       <p:grpSpPr/>
+      <p:sp>
+        <p:nvSpPr>
+          <p:cNvPr id="3" name="TextBox 2"/>
+          <p:cNvSpPr txBox="1"/>
+          <p:nvPr/>
+        </p:nvSpPr>
+        <p:spPr>
+          <a:xfrm>
+            <a:off x="609600" y="6206490"/>
+            <a:ext cx="10972800" cy="548640"/>
+          </a:xfrm>
+          <a:prstGeom prst="rect">
+            <a:avLst/>
+          </a:prstGeom>
+          <a:noFill/>
+        </p:spPr>
+        <p:txBody>
+          <a:bodyPr wrap="square">
+            <a:spAutoFit/>
+          </a:bodyPr>
+          <a:lstStyle/>
+          <a:p>
+            <a:pPr algn="ctr"/>
+            <a:r>
+              <a:rPr sz="1300">
+                <a:solidFill>
+                  <a:srgbClr val="444444"/>
+                </a:solidFill>
+              </a:rPr>
+              <a:t>Epsilon cells (n=142): one blob in expression (silhouette −0.042), cleanly split in γ-space (silhouette 0.276).</a:t>
+            </a:r>
+          </a:p>
+        </p:txBody>
+      </p:sp>
+      <p:sp>
+        <p:nvSpPr>
+          <p:cNvPr id="4" name="FigBg_4"/>
+          <p:cNvSpPr>
+            <a:spLocks noGrp="1"/>
+          </p:cNvSpPr>
+          <p:nvPr/>
+        </p:nvSpPr>
+        <p:spPr>
+          <a:xfrm>
+            <a:off x="365760" y="1544420"/>
+            <a:ext cx="11460480" cy="3906320"/>
+          </a:xfrm>
+          <a:prstGeom prst="roundRect">
+            <a:avLst/>
+          </a:prstGeom>
+          <a:solidFill>
+            <a:srgbClr val="FFFFFF"/>
+          </a:solidFill>
+          <a:ln w="0">
+            <a:noFill/>
+          </a:ln>
+        </p:spPr>
+        <p:txBody>
+          <a:bodyPr/>
+          <a:lstStyle/>
+          <a:p/>
+        </p:txBody>
+      </p:sp>
       <p:pic>
         <p:nvPicPr>
-          <p:cNvPr id="2" name="Picture 1" descr="fig_invisible_states_pancreas.png"/>
+          <p:cNvPr id="5" name="Picture 4" descr="image.png"/>
           <p:cNvPicPr>
             <a:picLocks noChangeAspect="1"/>
           </p:cNvPicPr>
@@ -7390,48 +6616,14 @@
         </p:blipFill>
         <p:spPr>
           <a:xfrm>
-            <a:off x="914400" y="205740"/>
-            <a:ext cx="10363200" cy="5932170"/>
+            <a:off x="502920" y="1681580"/>
+            <a:ext cx="11186160" cy="3632000"/>
           </a:xfrm>
           <a:prstGeom prst="rect">
             <a:avLst/>
           </a:prstGeom>
         </p:spPr>
       </p:pic>
-      <p:sp>
-        <p:nvSpPr>
-          <p:cNvPr id="3" name="TextBox 2"/>
-          <p:cNvSpPr txBox="1"/>
-          <p:nvPr/>
-        </p:nvSpPr>
-        <p:spPr>
-          <a:xfrm>
-            <a:off x="609600" y="6206490"/>
-            <a:ext cx="10972800" cy="548640"/>
-          </a:xfrm>
-          <a:prstGeom prst="rect">
-            <a:avLst/>
-          </a:prstGeom>
-          <a:noFill/>
-        </p:spPr>
-        <p:txBody>
-          <a:bodyPr wrap="square">
-            <a:spAutoFit/>
-          </a:bodyPr>
-          <a:lstStyle/>
-          <a:p>
-            <a:pPr algn="ctr"/>
-            <a:r>
-              <a:rPr sz="1300">
-                <a:solidFill>
-                  <a:srgbClr val="444444"/>
-                </a:solidFill>
-              </a:rPr>
-              <a:t>Silhouette of γ-space labels in both spaces. 5/8 pancreatic cell types show stronger γ-space than expression-space substructure.</a:t>
-            </a:r>
-          </a:p>
-        </p:txBody>
-      </p:sp>
     </p:spTree>
   </p:cSld>
   <p:clrMapOvr>
@@ -7458,9 +6650,72 @@
         <p:nvPr/>
       </p:nvGrpSpPr>
       <p:grpSpPr/>
+      <p:sp>
+        <p:nvSpPr>
+          <p:cNvPr id="3" name="TextBox 2"/>
+          <p:cNvSpPr txBox="1"/>
+          <p:nvPr/>
+        </p:nvSpPr>
+        <p:spPr>
+          <a:xfrm>
+            <a:off x="609600" y="6206490"/>
+            <a:ext cx="10972800" cy="548640"/>
+          </a:xfrm>
+          <a:prstGeom prst="rect">
+            <a:avLst/>
+          </a:prstGeom>
+          <a:noFill/>
+        </p:spPr>
+        <p:txBody>
+          <a:bodyPr wrap="square">
+            <a:spAutoFit/>
+          </a:bodyPr>
+          <a:lstStyle/>
+          <a:p>
+            <a:pPr algn="ctr"/>
+            <a:r>
+              <a:rPr sz="1300">
+                <a:solidFill>
+                  <a:srgbClr val="444444"/>
+                </a:solidFill>
+              </a:rPr>
+              <a:t>Permutation control: shuffling u/s pairs within each gene before estimation yields ARI ≈ 0, ruling out smoothing artefacts.</a:t>
+            </a:r>
+          </a:p>
+        </p:txBody>
+      </p:sp>
+      <p:sp>
+        <p:nvSpPr>
+          <p:cNvPr id="4" name="FigBg_4"/>
+          <p:cNvSpPr>
+            <a:spLocks noGrp="1"/>
+          </p:cNvSpPr>
+          <p:nvPr/>
+        </p:nvSpPr>
+        <p:spPr>
+          <a:xfrm>
+            <a:off x="447328" y="914400"/>
+            <a:ext cx="11297344" cy="5166360"/>
+          </a:xfrm>
+          <a:prstGeom prst="roundRect">
+            <a:avLst/>
+          </a:prstGeom>
+          <a:solidFill>
+            <a:srgbClr val="FFFFFF"/>
+          </a:solidFill>
+          <a:ln w="0">
+            <a:noFill/>
+          </a:ln>
+        </p:spPr>
+        <p:txBody>
+          <a:bodyPr/>
+          <a:lstStyle/>
+          <a:p/>
+        </p:txBody>
+      </p:sp>
       <p:pic>
         <p:nvPicPr>
-          <p:cNvPr id="2" name="Picture 1" descr="fig_invisible_states_dentate.png"/>
+          <p:cNvPr id="5" name="Picture 4" descr="image.png"/>
           <p:cNvPicPr>
             <a:picLocks noChangeAspect="1"/>
           </p:cNvPicPr>
@@ -7474,48 +6729,14 @@
         </p:blipFill>
         <p:spPr>
           <a:xfrm>
-            <a:off x="914400" y="205740"/>
-            <a:ext cx="10363200" cy="5932170"/>
+            <a:off x="584488" y="1051560"/>
+            <a:ext cx="11023024" cy="4892040"/>
           </a:xfrm>
           <a:prstGeom prst="rect">
             <a:avLst/>
           </a:prstGeom>
         </p:spPr>
       </p:pic>
-      <p:sp>
-        <p:nvSpPr>
-          <p:cNvPr id="3" name="TextBox 2"/>
-          <p:cNvSpPr txBox="1"/>
-          <p:nvPr/>
-        </p:nvSpPr>
-        <p:spPr>
-          <a:xfrm>
-            <a:off x="609600" y="6206490"/>
-            <a:ext cx="10972800" cy="548640"/>
-          </a:xfrm>
-          <a:prstGeom prst="rect">
-            <a:avLst/>
-          </a:prstGeom>
-          <a:noFill/>
-        </p:spPr>
-        <p:txBody>
-          <a:bodyPr wrap="square">
-            <a:spAutoFit/>
-          </a:bodyPr>
-          <a:lstStyle/>
-          <a:p>
-            <a:pPr algn="ctr"/>
-            <a:r>
-              <a:rPr sz="1300">
-                <a:solidFill>
-                  <a:srgbClr val="444444"/>
-                </a:solidFill>
-              </a:rPr>
-              <a:t>6/11 hippocampal cell types show γ-space substructure invisible or reduced in expression space.</a:t>
-            </a:r>
-          </a:p>
-        </p:txBody>
-      </p:sp>
     </p:spTree>
   </p:cSld>
   <p:clrMapOvr>
@@ -7525,81 +6746,518 @@
 </file>
 
 <file path=ppt/slides/slide17.xml><?xml version="1.0" encoding="utf-8"?>
-<p:sld xmlns:a="http://schemas.openxmlformats.org/drawingml/2006/main" xmlns:p="http://schemas.openxmlformats.org/presentationml/2006/main" xmlns:r="http://schemas.openxmlformats.org/officeDocument/2006/relationships">
+<p:sld xmlns:a="http://schemas.openxmlformats.org/drawingml/2006/main" xmlns:r="http://schemas.openxmlformats.org/officeDocument/2006/relationships" xmlns:mc="http://schemas.openxmlformats.org/markup-compatibility/2006" xmlns:mv="urn:schemas-microsoft-com:mac:vml" xmlns:p="http://schemas.openxmlformats.org/presentationml/2006/main" xmlns:c="http://schemas.openxmlformats.org/drawingml/2006/chart" xmlns:dgm="http://schemas.openxmlformats.org/drawingml/2006/diagram" xmlns:o="urn:schemas-microsoft-com:office:office" xmlns:v="urn:schemas-microsoft-com:vml" xmlns:pvml="urn:schemas-microsoft-com:office:powerpoint" xmlns:com="http://schemas.openxmlformats.org/drawingml/2006/compatibility" xmlns:p14="http://schemas.microsoft.com/office/powerpoint/2010/main" xmlns:p15="http://schemas.microsoft.com/office/powerpoint/2012/main" xmlns:ahyp="http://schemas.microsoft.com/office/drawing/2018/hyperlinkcolor">
   <p:cSld>
     <p:bg>
       <p:bgPr>
         <a:solidFill>
           <a:srgbClr val="FFFFFF"/>
         </a:solidFill>
-        <a:effectLst/>
       </p:bgPr>
     </p:bg>
     <p:spTree>
       <p:nvGrpSpPr>
-        <p:cNvPr id="1" name=""/>
+        <p:cNvPr id="218" name="Shape 218"/>
         <p:cNvGrpSpPr/>
         <p:nvPr/>
       </p:nvGrpSpPr>
-      <p:grpSpPr/>
+      <p:grpSpPr>
+        <a:xfrm>
+          <a:off x="0" y="0"/>
+          <a:ext cx="0" cy="0"/>
+          <a:chOff x="0" y="0"/>
+          <a:chExt cx="0" cy="0"/>
+        </a:xfrm>
+      </p:grpSpPr>
+      <p:sp>
+        <p:nvSpPr>
+          <p:cNvPr id="219" name="Google Shape;219;p19"/>
+          <p:cNvSpPr/>
+          <p:nvPr/>
+        </p:nvSpPr>
+        <p:spPr>
+          <a:xfrm>
+            <a:off x="548640" y="457200"/>
+            <a:ext cx="11064240" cy="868680"/>
+          </a:xfrm>
+          <a:prstGeom prst="rect">
+            <a:avLst/>
+          </a:prstGeom>
+          <a:noFill/>
+          <a:ln>
+            <a:noFill/>
+          </a:ln>
+        </p:spPr>
+        <p:txBody>
+          <a:bodyPr anchorCtr="0" anchor="t" bIns="0" lIns="0" spcFirstLastPara="1" rIns="0" wrap="square" tIns="0">
+            <a:noAutofit/>
+          </a:bodyPr>
+          <a:lstStyle/>
+          <a:p>
+            <a:pPr indent="0" lvl="0" marL="0" marR="0" rtl="0" algn="l">
+              <a:spcBef>
+                <a:spcPts val="0"/>
+              </a:spcBef>
+              <a:spcAft>
+                <a:spcPts val="0"/>
+              </a:spcAft>
+              <a:buClr>
+                <a:srgbClr val="111111"/>
+              </a:buClr>
+              <a:buSzPts val="3000"/>
+              <a:buFont typeface="Arial"/>
+              <a:buNone/>
+            </a:pPr>
+            <a:r>
+              <a:rPr b="1" i="0" lang="en-US" sz="3000" u="none" cap="none" strike="noStrike">
+                <a:solidFill>
+                  <a:srgbClr val="111111"/>
+                </a:solidFill>
+                <a:latin typeface="Arial"/>
+                <a:ea typeface="Arial"/>
+                <a:cs typeface="Arial"/>
+                <a:sym typeface="Arial"/>
+              </a:rPr>
+              <a:t>Finding 2 · Degradation changes PRECEDE expression</a:t>
+            </a:r>
+            <a:endParaRPr b="0" i="0" sz="3000" u="none" cap="none" strike="noStrike">
+              <a:solidFill>
+                <a:schemeClr val="dk1"/>
+              </a:solidFill>
+              <a:latin typeface="Calibri"/>
+              <a:ea typeface="Calibri"/>
+              <a:cs typeface="Calibri"/>
+              <a:sym typeface="Calibri"/>
+            </a:endParaRPr>
+          </a:p>
+        </p:txBody>
+      </p:sp>
+      <p:sp>
+        <p:nvSpPr>
+          <p:cNvPr id="220" name="Google Shape;220;p19"/>
+          <p:cNvSpPr/>
+          <p:nvPr/>
+        </p:nvSpPr>
+        <p:spPr>
+          <a:xfrm>
+            <a:off x="278375" y="1764800"/>
+            <a:ext cx="6094800" cy="4642500"/>
+          </a:xfrm>
+          <a:prstGeom prst="roundRect">
+            <a:avLst>
+              <a:gd fmla="val 1909" name="adj"/>
+            </a:avLst>
+          </a:prstGeom>
+          <a:solidFill>
+            <a:srgbClr val="FFFFFF"/>
+          </a:solidFill>
+          <a:ln cap="flat" cmpd="sng" w="15400">
+            <a:solidFill>
+              <a:srgbClr val="BBBBBB"/>
+            </a:solidFill>
+            <a:prstDash val="solid"/>
+            <a:round/>
+            <a:headEnd len="sm" w="sm" type="none"/>
+            <a:tailEnd len="sm" w="sm" type="none"/>
+          </a:ln>
+          <a:effectLst>
+            <a:outerShdw blurRad="107726" rotWithShape="0" algn="bl" dir="5400000" dist="30779">
+              <a:srgbClr val="000000">
+                <a:alpha val="18039"/>
+              </a:srgbClr>
+            </a:outerShdw>
+          </a:effectLst>
+        </p:spPr>
+        <p:txBody>
+          <a:bodyPr anchorCtr="0" anchor="ctr" bIns="110775" lIns="110775" spcFirstLastPara="1" rIns="110775" wrap="square" tIns="110775">
+            <a:noAutofit/>
+          </a:bodyPr>
+          <a:lstStyle/>
+          <a:p>
+            <a:pPr indent="0" lvl="0" marL="0" rtl="0" algn="l">
+              <a:spcBef>
+                <a:spcPts val="0"/>
+              </a:spcBef>
+              <a:spcAft>
+                <a:spcPts val="0"/>
+              </a:spcAft>
+              <a:buNone/>
+            </a:pPr>
+            <a:r>
+              <a:t/>
+            </a:r>
+            <a:endParaRPr/>
+          </a:p>
+        </p:txBody>
+      </p:sp>
+      <p:sp>
+        <p:nvSpPr>
+          <p:cNvPr id="222" name="Google Shape;222;p19"/>
+          <p:cNvSpPr/>
+          <p:nvPr/>
+        </p:nvSpPr>
+        <p:spPr>
+          <a:xfrm>
+            <a:off x="6629400" y="1783080"/>
+            <a:ext cx="4937760" cy="3931920"/>
+          </a:xfrm>
+          <a:prstGeom prst="rect">
+            <a:avLst/>
+          </a:prstGeom>
+          <a:noFill/>
+          <a:ln>
+            <a:noFill/>
+          </a:ln>
+        </p:spPr>
+        <p:txBody>
+          <a:bodyPr anchorCtr="0" anchor="t" bIns="0" lIns="0" spcFirstLastPara="1" rIns="0" wrap="square" tIns="0">
+            <a:noAutofit/>
+          </a:bodyPr>
+          <a:lstStyle/>
+          <a:p>
+            <a:pPr indent="0" lvl="0" marL="0" marR="0" rtl="0" algn="l">
+              <a:lnSpc>
+                <a:spcPct val="112000"/>
+              </a:lnSpc>
+              <a:spcBef>
+                <a:spcPts val="0"/>
+              </a:spcBef>
+              <a:spcAft>
+                <a:spcPts val="0"/>
+              </a:spcAft>
+              <a:buClr>
+                <a:srgbClr val="111111"/>
+              </a:buClr>
+              <a:buSzPts val="1800"/>
+              <a:buFont typeface="Arial"/>
+              <a:buNone/>
+            </a:pPr>
+            <a:r>
+              <a:rPr b="1" i="0" lang="en-US" sz="2200" u="none" cap="none" strike="noStrike">
+                <a:solidFill>
+                  <a:srgbClr val="111111"/>
+                </a:solidFill>
+                <a:latin typeface="Arial"/>
+                <a:ea typeface="Arial"/>
+                <a:cs typeface="Arial"/>
+                <a:sym typeface="Arial"/>
+              </a:rPr>
+              <a:t>Post-transcriptional velocity</a:t>
+            </a:r>
+            <a:endParaRPr b="0" i="0" sz="2200" u="none" cap="none" strike="noStrike">
+              <a:solidFill>
+                <a:schemeClr val="dk1"/>
+              </a:solidFill>
+              <a:latin typeface="Calibri"/>
+              <a:ea typeface="Calibri"/>
+              <a:cs typeface="Calibri"/>
+              <a:sym typeface="Calibri"/>
+            </a:endParaRPr>
+          </a:p>
+          <a:p>
+            <a:pPr indent="0" lvl="0" marL="0" marR="0" rtl="0" algn="l">
+              <a:lnSpc>
+                <a:spcPct val="112000"/>
+              </a:lnSpc>
+              <a:spcBef>
+                <a:spcPts val="0"/>
+              </a:spcBef>
+              <a:spcAft>
+                <a:spcPts val="0"/>
+              </a:spcAft>
+              <a:buClr>
+                <a:srgbClr val="111111"/>
+              </a:buClr>
+              <a:buSzPts val="1550"/>
+              <a:buFont typeface="Arial"/>
+              <a:buNone/>
+            </a:pPr>
+            <a:r>
+              <a:rPr b="0" i="0" lang="en-US" sz="2200" u="none" cap="none" strike="noStrike">
+                <a:solidFill>
+                  <a:srgbClr val="111111"/>
+                </a:solidFill>
+                <a:latin typeface="Arial"/>
+                <a:ea typeface="Arial"/>
+                <a:cs typeface="Arial"/>
+                <a:sym typeface="Arial"/>
+              </a:rPr>
+              <a:t>— a per-cell γ vector field, </a:t>
+            </a:r>
+            <a:r>
+              <a:rPr b="1" i="0" lang="en-US" sz="2200" u="none" cap="none" strike="noStrike">
+                <a:solidFill>
+                  <a:srgbClr val="111111"/>
+                </a:solidFill>
+                <a:latin typeface="Arial"/>
+                <a:ea typeface="Arial"/>
+                <a:cs typeface="Arial"/>
+                <a:sym typeface="Arial"/>
+              </a:rPr>
+              <a:t>≈ orthogonal to RNA velocity</a:t>
+            </a:r>
+            <a:r>
+              <a:rPr b="0" i="0" lang="en-US" sz="2200" u="none" cap="none" strike="noStrike">
+                <a:solidFill>
+                  <a:srgbClr val="111111"/>
+                </a:solidFill>
+                <a:latin typeface="Arial"/>
+                <a:ea typeface="Arial"/>
+                <a:cs typeface="Arial"/>
+                <a:sym typeface="Arial"/>
+              </a:rPr>
+              <a:t> (cosine ≈ −0.06): the two axes carry independent information.</a:t>
+            </a:r>
+            <a:endParaRPr b="0" i="0" sz="2200" u="none" cap="none" strike="noStrike">
+              <a:solidFill>
+                <a:schemeClr val="dk1"/>
+              </a:solidFill>
+              <a:latin typeface="Calibri"/>
+              <a:ea typeface="Calibri"/>
+              <a:cs typeface="Calibri"/>
+              <a:sym typeface="Calibri"/>
+            </a:endParaRPr>
+          </a:p>
+          <a:p>
+            <a:pPr indent="0" lvl="0" marL="0" marR="0" rtl="0" algn="l">
+              <a:lnSpc>
+                <a:spcPct val="112000"/>
+              </a:lnSpc>
+              <a:spcBef>
+                <a:spcPts val="0"/>
+              </a:spcBef>
+              <a:spcAft>
+                <a:spcPts val="0"/>
+              </a:spcAft>
+              <a:buClr>
+                <a:schemeClr val="dk1"/>
+              </a:buClr>
+              <a:buSzPts val="1550"/>
+              <a:buFont typeface="Calibri"/>
+              <a:buNone/>
+            </a:pPr>
+            <a:r>
+              <a:t/>
+            </a:r>
+            <a:endParaRPr b="0" i="0" sz="2200" u="none" cap="none" strike="noStrike">
+              <a:solidFill>
+                <a:schemeClr val="dk1"/>
+              </a:solidFill>
+              <a:latin typeface="Calibri"/>
+              <a:ea typeface="Calibri"/>
+              <a:cs typeface="Calibri"/>
+              <a:sym typeface="Calibri"/>
+            </a:endParaRPr>
+          </a:p>
+          <a:p>
+            <a:pPr indent="0" lvl="0" marL="0" marR="0" rtl="0" algn="l">
+              <a:lnSpc>
+                <a:spcPct val="112000"/>
+              </a:lnSpc>
+              <a:spcBef>
+                <a:spcPts val="0"/>
+              </a:spcBef>
+              <a:spcAft>
+                <a:spcPts val="0"/>
+              </a:spcAft>
+              <a:buClr>
+                <a:srgbClr val="000000"/>
+              </a:buClr>
+              <a:buSzPts val="1800"/>
+              <a:buFont typeface="Arial"/>
+              <a:buNone/>
+            </a:pPr>
+            <a:r>
+              <a:rPr b="1" i="0" lang="en-US" sz="2200" u="none" cap="none" strike="noStrike">
+                <a:solidFill>
+                  <a:srgbClr val="000000"/>
+                </a:solidFill>
+                <a:latin typeface="Arial"/>
+                <a:ea typeface="Arial"/>
+                <a:cs typeface="Arial"/>
+                <a:sym typeface="Arial"/>
+              </a:rPr>
+              <a:t>γ leads expression</a:t>
+            </a:r>
+            <a:r>
+              <a:rPr b="0" i="0" lang="en-US" sz="2200" u="none" cap="none" strike="noStrike">
+                <a:solidFill>
+                  <a:srgbClr val="111111"/>
+                </a:solidFill>
+                <a:latin typeface="Arial"/>
+                <a:ea typeface="Arial"/>
+                <a:cs typeface="Arial"/>
+                <a:sym typeface="Arial"/>
+              </a:rPr>
+              <a:t> along pseudotime for:</a:t>
+            </a:r>
+            <a:endParaRPr b="0" i="0" sz="2200" u="none" cap="none" strike="noStrike">
+              <a:solidFill>
+                <a:schemeClr val="dk1"/>
+              </a:solidFill>
+              <a:latin typeface="Calibri"/>
+              <a:ea typeface="Calibri"/>
+              <a:cs typeface="Calibri"/>
+              <a:sym typeface="Calibri"/>
+            </a:endParaRPr>
+          </a:p>
+          <a:p>
+            <a:pPr indent="0" lvl="0" marL="0" marR="0" rtl="0" algn="l">
+              <a:lnSpc>
+                <a:spcPct val="112000"/>
+              </a:lnSpc>
+              <a:spcBef>
+                <a:spcPts val="0"/>
+              </a:spcBef>
+              <a:spcAft>
+                <a:spcPts val="0"/>
+              </a:spcAft>
+              <a:buClr>
+                <a:srgbClr val="111111"/>
+              </a:buClr>
+              <a:buSzPts val="1550"/>
+              <a:buFont typeface="Arial"/>
+              <a:buNone/>
+            </a:pPr>
+            <a:r>
+              <a:rPr b="0" i="0" lang="en-US" sz="2200" u="none" cap="none" strike="noStrike">
+                <a:solidFill>
+                  <a:srgbClr val="111111"/>
+                </a:solidFill>
+                <a:latin typeface="Arial"/>
+                <a:ea typeface="Arial"/>
+                <a:cs typeface="Arial"/>
+                <a:sym typeface="Arial"/>
+              </a:rPr>
+              <a:t>63% of pancreas (p=5.3×10⁻⁶), 78% of dentate gyrus, 61% of A549 transition genes.</a:t>
+            </a:r>
+            <a:endParaRPr b="0" i="0" sz="2200" u="none" cap="none" strike="noStrike">
+              <a:solidFill>
+                <a:schemeClr val="dk1"/>
+              </a:solidFill>
+              <a:latin typeface="Calibri"/>
+              <a:ea typeface="Calibri"/>
+              <a:cs typeface="Calibri"/>
+              <a:sym typeface="Calibri"/>
+            </a:endParaRPr>
+          </a:p>
+          <a:p>
+            <a:pPr indent="0" lvl="0" marL="0" marR="0" rtl="0" algn="l">
+              <a:lnSpc>
+                <a:spcPct val="112000"/>
+              </a:lnSpc>
+              <a:spcBef>
+                <a:spcPts val="0"/>
+              </a:spcBef>
+              <a:spcAft>
+                <a:spcPts val="0"/>
+              </a:spcAft>
+              <a:buClr>
+                <a:schemeClr val="dk1"/>
+              </a:buClr>
+              <a:buSzPts val="1550"/>
+              <a:buFont typeface="Calibri"/>
+              <a:buNone/>
+            </a:pPr>
+            <a:r>
+              <a:t/>
+            </a:r>
+            <a:endParaRPr b="0" i="0" sz="2200" u="none" cap="none" strike="noStrike">
+              <a:solidFill>
+                <a:schemeClr val="dk1"/>
+              </a:solidFill>
+              <a:latin typeface="Calibri"/>
+              <a:ea typeface="Calibri"/>
+              <a:cs typeface="Calibri"/>
+              <a:sym typeface="Calibri"/>
+            </a:endParaRPr>
+          </a:p>
+          <a:p>
+            <a:pPr indent="0" lvl="0" marL="0" marR="0" rtl="0" algn="l">
+              <a:lnSpc>
+                <a:spcPct val="112000"/>
+              </a:lnSpc>
+              <a:spcBef>
+                <a:spcPts val="0"/>
+              </a:spcBef>
+              <a:spcAft>
+                <a:spcPts val="0"/>
+              </a:spcAft>
+              <a:buClr>
+                <a:srgbClr val="6A6A6A"/>
+              </a:buClr>
+              <a:buSzPts val="1550"/>
+              <a:buFont typeface="Arial"/>
+              <a:buNone/>
+            </a:pPr>
+            <a:r>
+              <a:t/>
+            </a:r>
+            <a:endParaRPr b="0" i="0" sz="2200" u="none" cap="none" strike="noStrike">
+              <a:solidFill>
+                <a:schemeClr val="dk1"/>
+              </a:solidFill>
+              <a:latin typeface="Calibri"/>
+              <a:ea typeface="Calibri"/>
+              <a:cs typeface="Calibri"/>
+              <a:sym typeface="Calibri"/>
+            </a:endParaRPr>
+          </a:p>
+        </p:txBody>
+      </p:sp>
+      <p:sp>
+        <p:nvSpPr>
+          <p:cNvPr id="223" name="FigBg_223"/>
+          <p:cNvSpPr>
+            <a:spLocks noGrp="1"/>
+          </p:cNvSpPr>
+          <p:nvPr/>
+        </p:nvSpPr>
+        <p:spPr>
+          <a:xfrm>
+            <a:off x="816984" y="914400"/>
+            <a:ext cx="10558031" cy="5166360"/>
+          </a:xfrm>
+          <a:prstGeom prst="roundRect">
+            <a:avLst/>
+          </a:prstGeom>
+          <a:solidFill>
+            <a:srgbClr val="FFFFFF"/>
+          </a:solidFill>
+          <a:ln w="0">
+            <a:noFill/>
+          </a:ln>
+        </p:spPr>
+        <p:txBody>
+          <a:bodyPr/>
+          <a:lstStyle/>
+          <a:p/>
+        </p:txBody>
+      </p:sp>
       <p:pic>
         <p:nvPicPr>
-          <p:cNvPr id="2" name="Picture 1" descr="fig_invisible_epsilon.png"/>
+          <p:cNvPr id="224" name="Picture 223" descr="image.png"/>
           <p:cNvPicPr>
             <a:picLocks noChangeAspect="1"/>
           </p:cNvPicPr>
           <p:nvPr/>
         </p:nvPicPr>
         <p:blipFill>
-          <a:blip r:embed="rId2"/>
+          <a:blip r:embed="rId4"/>
           <a:stretch>
             <a:fillRect/>
           </a:stretch>
         </p:blipFill>
         <p:spPr>
           <a:xfrm>
-            <a:off x="914400" y="205740"/>
-            <a:ext cx="10363200" cy="5932170"/>
+            <a:off x="954144" y="1051560"/>
+            <a:ext cx="10283711" cy="4892040"/>
           </a:xfrm>
           <a:prstGeom prst="rect">
             <a:avLst/>
           </a:prstGeom>
         </p:spPr>
       </p:pic>
-      <p:sp>
-        <p:nvSpPr>
-          <p:cNvPr id="3" name="TextBox 2"/>
-          <p:cNvSpPr txBox="1"/>
-          <p:nvPr/>
-        </p:nvSpPr>
-        <p:spPr>
-          <a:xfrm>
-            <a:off x="609600" y="6206490"/>
-            <a:ext cx="10972800" cy="548640"/>
-          </a:xfrm>
-          <a:prstGeom prst="rect">
-            <a:avLst/>
-          </a:prstGeom>
-          <a:noFill/>
-        </p:spPr>
-        <p:txBody>
-          <a:bodyPr wrap="square">
-            <a:spAutoFit/>
-          </a:bodyPr>
-          <a:lstStyle/>
-          <a:p>
-            <a:pPr algn="ctr"/>
-            <a:r>
-              <a:rPr sz="1300">
-                <a:solidFill>
-                  <a:srgbClr val="444444"/>
-                </a:solidFill>
-              </a:rPr>
-              <a:t>Epsilon cells (n=142): one blob in expression (silhouette −0.042), cleanly split in γ-space (silhouette 0.276).</a:t>
-            </a:r>
-          </a:p>
-        </p:txBody>
-      </p:sp>
     </p:spTree>
   </p:cSld>
   <p:clrMapOvr>
@@ -7626,9 +7284,72 @@
         <p:nvPr/>
       </p:nvGrpSpPr>
       <p:grpSpPr/>
+      <p:sp>
+        <p:nvSpPr>
+          <p:cNvPr id="3" name="TextBox 2"/>
+          <p:cNvSpPr txBox="1"/>
+          <p:nvPr/>
+        </p:nvSpPr>
+        <p:spPr>
+          <a:xfrm>
+            <a:off x="609600" y="6206490"/>
+            <a:ext cx="10972800" cy="548640"/>
+          </a:xfrm>
+          <a:prstGeom prst="rect">
+            <a:avLst/>
+          </a:prstGeom>
+          <a:noFill/>
+        </p:spPr>
+        <p:txBody>
+          <a:bodyPr wrap="square">
+            <a:spAutoFit/>
+          </a:bodyPr>
+          <a:lstStyle/>
+          <a:p>
+            <a:pPr algn="ctr"/>
+            <a:r>
+              <a:rPr sz="1300">
+                <a:solidFill>
+                  <a:srgbClr val="444444"/>
+                </a:solidFill>
+              </a:rPr>
+              <a:t>PT velocity approximately orthogonal to RNA velocity (mean cosine = −0.056), confirming independent information axes.</a:t>
+            </a:r>
+          </a:p>
+        </p:txBody>
+      </p:sp>
+      <p:sp>
+        <p:nvSpPr>
+          <p:cNvPr id="4" name="FigBg_4"/>
+          <p:cNvSpPr>
+            <a:spLocks noGrp="1"/>
+          </p:cNvSpPr>
+          <p:nvPr/>
+        </p:nvSpPr>
+        <p:spPr>
+          <a:xfrm>
+            <a:off x="780157" y="914400"/>
+            <a:ext cx="10631685" cy="5166360"/>
+          </a:xfrm>
+          <a:prstGeom prst="roundRect">
+            <a:avLst/>
+          </a:prstGeom>
+          <a:solidFill>
+            <a:srgbClr val="FFFFFF"/>
+          </a:solidFill>
+          <a:ln w="0">
+            <a:noFill/>
+          </a:ln>
+        </p:spPr>
+        <p:txBody>
+          <a:bodyPr/>
+          <a:lstStyle/>
+          <a:p/>
+        </p:txBody>
+      </p:sp>
       <p:pic>
         <p:nvPicPr>
-          <p:cNvPr id="2" name="Picture 1" descr="fig_permutation_control.png"/>
+          <p:cNvPr id="5" name="Picture 4" descr="image.png"/>
           <p:cNvPicPr>
             <a:picLocks noChangeAspect="1"/>
           </p:cNvPicPr>
@@ -7642,48 +7363,533 @@
         </p:blipFill>
         <p:spPr>
           <a:xfrm>
-            <a:off x="914400" y="205740"/>
-            <a:ext cx="10363200" cy="5932170"/>
+            <a:off x="917317" y="1051560"/>
+            <a:ext cx="10357365" cy="4892040"/>
           </a:xfrm>
           <a:prstGeom prst="rect">
             <a:avLst/>
           </a:prstGeom>
         </p:spPr>
       </p:pic>
-      <p:sp>
-        <p:nvSpPr>
-          <p:cNvPr id="3" name="TextBox 2"/>
-          <p:cNvSpPr txBox="1"/>
+    </p:spTree>
+  </p:cSld>
+  <p:clrMapOvr>
+    <a:masterClrMapping/>
+  </p:clrMapOvr>
+</p:sld>
+</file>
+
+<file path=ppt/slides/slide19.xml><?xml version="1.0" encoding="utf-8"?>
+<p:sld xmlns:a="http://schemas.openxmlformats.org/drawingml/2006/main" xmlns:r="http://schemas.openxmlformats.org/officeDocument/2006/relationships" xmlns:mc="http://schemas.openxmlformats.org/markup-compatibility/2006" xmlns:mv="urn:schemas-microsoft-com:mac:vml" xmlns:p="http://schemas.openxmlformats.org/presentationml/2006/main" xmlns:c="http://schemas.openxmlformats.org/drawingml/2006/chart" xmlns:dgm="http://schemas.openxmlformats.org/drawingml/2006/diagram" xmlns:o="urn:schemas-microsoft-com:office:office" xmlns:v="urn:schemas-microsoft-com:vml" xmlns:pvml="urn:schemas-microsoft-com:office:powerpoint" xmlns:com="http://schemas.openxmlformats.org/drawingml/2006/compatibility" xmlns:p14="http://schemas.microsoft.com/office/powerpoint/2010/main" xmlns:p15="http://schemas.microsoft.com/office/powerpoint/2012/main" xmlns:ahyp="http://schemas.microsoft.com/office/drawing/2018/hyperlinkcolor">
+  <p:cSld>
+    <p:bg>
+      <p:bgPr>
+        <a:solidFill>
+          <a:srgbClr val="FFFFFF"/>
+        </a:solidFill>
+      </p:bgPr>
+    </p:bg>
+    <p:spTree>
+      <p:nvGrpSpPr>
+        <p:cNvPr id="227" name="Shape 227"/>
+        <p:cNvGrpSpPr/>
+        <p:nvPr/>
+      </p:nvGrpSpPr>
+      <p:grpSpPr>
+        <a:xfrm>
+          <a:off x="0" y="0"/>
+          <a:ext cx="0" cy="0"/>
+          <a:chOff x="0" y="0"/>
+          <a:chExt cx="0" cy="0"/>
+        </a:xfrm>
+      </p:grpSpPr>
+      <p:sp>
+        <p:nvSpPr>
+          <p:cNvPr id="228" name="Google Shape;228;p20"/>
+          <p:cNvSpPr/>
           <p:nvPr/>
         </p:nvSpPr>
         <p:spPr>
           <a:xfrm>
-            <a:off x="609600" y="6206490"/>
-            <a:ext cx="10972800" cy="548640"/>
+            <a:off x="548640" y="457200"/>
+            <a:ext cx="11064240" cy="868680"/>
           </a:xfrm>
           <a:prstGeom prst="rect">
             <a:avLst/>
           </a:prstGeom>
           <a:noFill/>
-        </p:spPr>
-        <p:txBody>
-          <a:bodyPr wrap="square">
-            <a:spAutoFit/>
+          <a:ln>
+            <a:noFill/>
+          </a:ln>
+        </p:spPr>
+        <p:txBody>
+          <a:bodyPr anchorCtr="0" anchor="t" bIns="0" lIns="0" spcFirstLastPara="1" rIns="0" wrap="square" tIns="0">
+            <a:noAutofit/>
           </a:bodyPr>
           <a:lstStyle/>
           <a:p>
-            <a:pPr algn="ctr"/>
-            <a:r>
-              <a:rPr sz="1300">
-                <a:solidFill>
-                  <a:srgbClr val="444444"/>
-                </a:solidFill>
-              </a:rPr>
-              <a:t>Permutation control: shuffling u/s pairs within each gene before estimation yields ARI ≈ 0, ruling out smoothing artefacts.</a:t>
-            </a:r>
-          </a:p>
-        </p:txBody>
-      </p:sp>
+            <a:pPr indent="0" lvl="0" marL="0" marR="0" rtl="0" algn="l">
+              <a:spcBef>
+                <a:spcPts val="0"/>
+              </a:spcBef>
+              <a:spcAft>
+                <a:spcPts val="0"/>
+              </a:spcAft>
+              <a:buClr>
+                <a:srgbClr val="111111"/>
+              </a:buClr>
+              <a:buSzPts val="3000"/>
+              <a:buFont typeface="Arial"/>
+              <a:buNone/>
+            </a:pPr>
+            <a:r>
+              <a:rPr b="1" i="0" lang="en-US" sz="3000" u="none" cap="none" strike="noStrike">
+                <a:solidFill>
+                  <a:srgbClr val="111111"/>
+                </a:solidFill>
+                <a:latin typeface="Arial"/>
+                <a:ea typeface="Arial"/>
+                <a:cs typeface="Arial"/>
+                <a:sym typeface="Arial"/>
+              </a:rPr>
+              <a:t>Finding 3 · RBP networks recover cancer dependencies</a:t>
+            </a:r>
+            <a:endParaRPr b="0" i="0" sz="3000" u="none" cap="none" strike="noStrike">
+              <a:solidFill>
+                <a:schemeClr val="dk1"/>
+              </a:solidFill>
+              <a:latin typeface="Calibri"/>
+              <a:ea typeface="Calibri"/>
+              <a:cs typeface="Calibri"/>
+              <a:sym typeface="Calibri"/>
+            </a:endParaRPr>
+          </a:p>
+        </p:txBody>
+      </p:sp>
+      <p:sp>
+        <p:nvSpPr>
+          <p:cNvPr id="229" name="Google Shape;229;p20"/>
+          <p:cNvSpPr/>
+          <p:nvPr/>
+        </p:nvSpPr>
+        <p:spPr>
+          <a:xfrm>
+            <a:off x="594360" y="1783080"/>
+            <a:ext cx="5669280" cy="4023360"/>
+          </a:xfrm>
+          <a:prstGeom prst="rect">
+            <a:avLst/>
+          </a:prstGeom>
+          <a:noFill/>
+          <a:ln>
+            <a:noFill/>
+          </a:ln>
+        </p:spPr>
+        <p:txBody>
+          <a:bodyPr anchorCtr="0" anchor="t" bIns="0" lIns="0" spcFirstLastPara="1" rIns="0" wrap="square" tIns="0">
+            <a:noAutofit/>
+          </a:bodyPr>
+          <a:lstStyle/>
+          <a:p>
+            <a:pPr indent="0" lvl="0" marL="0" marR="0" rtl="0" algn="l">
+              <a:lnSpc>
+                <a:spcPct val="112000"/>
+              </a:lnSpc>
+              <a:spcBef>
+                <a:spcPts val="0"/>
+              </a:spcBef>
+              <a:spcAft>
+                <a:spcPts val="0"/>
+              </a:spcAft>
+              <a:buClr>
+                <a:srgbClr val="111111"/>
+              </a:buClr>
+              <a:buSzPts val="1700"/>
+              <a:buFont typeface="Arial"/>
+              <a:buNone/>
+            </a:pPr>
+            <a:r>
+              <a:rPr b="1" i="0" lang="en-US" sz="1700" u="none" cap="none" strike="noStrike">
+                <a:solidFill>
+                  <a:schemeClr val="dk1"/>
+                </a:solidFill>
+              </a:rPr>
+              <a:t>Library-size correction is essential.</a:t>
+            </a:r>
+            <a:endParaRPr i="0" sz="1700" u="none" cap="none" strike="noStrike">
+              <a:solidFill>
+                <a:schemeClr val="dk1"/>
+              </a:solidFill>
+            </a:endParaRPr>
+          </a:p>
+          <a:p>
+            <a:pPr indent="0" lvl="0" marL="0" marR="0" rtl="0" algn="l">
+              <a:lnSpc>
+                <a:spcPct val="112000"/>
+              </a:lnSpc>
+              <a:spcBef>
+                <a:spcPts val="0"/>
+              </a:spcBef>
+              <a:spcAft>
+                <a:spcPts val="0"/>
+              </a:spcAft>
+              <a:buClr>
+                <a:srgbClr val="3A3A3A"/>
+              </a:buClr>
+              <a:buSzPts val="1500"/>
+              <a:buFont typeface="Arial"/>
+              <a:buNone/>
+            </a:pPr>
+            <a:r>
+              <a:rPr i="0" lang="en-US" sz="1700" u="none" cap="none" strike="noStrike">
+                <a:solidFill>
+                  <a:schemeClr val="dk1"/>
+                </a:solidFill>
+              </a:rPr>
+              <a:t>Uncorrected inference is 98.9% destabilising (depth confound); correction drops 11,847 spurious edges → balanced 53/47.</a:t>
+            </a:r>
+            <a:endParaRPr i="0" sz="1700" u="none" cap="none" strike="noStrike">
+              <a:solidFill>
+                <a:schemeClr val="dk1"/>
+              </a:solidFill>
+            </a:endParaRPr>
+          </a:p>
+          <a:p>
+            <a:pPr indent="0" lvl="0" marL="0" marR="0" rtl="0" algn="l">
+              <a:lnSpc>
+                <a:spcPct val="112000"/>
+              </a:lnSpc>
+              <a:spcBef>
+                <a:spcPts val="0"/>
+              </a:spcBef>
+              <a:spcAft>
+                <a:spcPts val="0"/>
+              </a:spcAft>
+              <a:buClr>
+                <a:schemeClr val="dk1"/>
+              </a:buClr>
+              <a:buSzPts val="1500"/>
+              <a:buFont typeface="Calibri"/>
+              <a:buNone/>
+            </a:pPr>
+            <a:r>
+              <a:t/>
+            </a:r>
+            <a:endParaRPr i="0" sz="1700" u="none" cap="none" strike="noStrike">
+              <a:solidFill>
+                <a:schemeClr val="dk1"/>
+              </a:solidFill>
+            </a:endParaRPr>
+          </a:p>
+          <a:p>
+            <a:pPr indent="0" lvl="0" marL="0" marR="0" rtl="0" algn="l">
+              <a:lnSpc>
+                <a:spcPct val="112000"/>
+              </a:lnSpc>
+              <a:spcBef>
+                <a:spcPts val="0"/>
+              </a:spcBef>
+              <a:spcAft>
+                <a:spcPts val="0"/>
+              </a:spcAft>
+              <a:buClr>
+                <a:srgbClr val="111111"/>
+              </a:buClr>
+              <a:buSzPts val="1700"/>
+              <a:buFont typeface="Arial"/>
+              <a:buNone/>
+            </a:pPr>
+            <a:r>
+              <a:rPr b="1" i="0" lang="en-US" sz="1700" u="none" cap="none" strike="noStrike">
+                <a:solidFill>
+                  <a:schemeClr val="dk1"/>
+                </a:solidFill>
+              </a:rPr>
+              <a:t>Hubs = known essentials.</a:t>
+            </a:r>
+            <a:endParaRPr i="0" sz="1700" u="none" cap="none" strike="noStrike">
+              <a:solidFill>
+                <a:schemeClr val="dk1"/>
+              </a:solidFill>
+            </a:endParaRPr>
+          </a:p>
+          <a:p>
+            <a:pPr indent="0" lvl="0" marL="0" marR="0" rtl="0" algn="l">
+              <a:lnSpc>
+                <a:spcPct val="112000"/>
+              </a:lnSpc>
+              <a:spcBef>
+                <a:spcPts val="0"/>
+              </a:spcBef>
+              <a:spcAft>
+                <a:spcPts val="0"/>
+              </a:spcAft>
+              <a:buClr>
+                <a:srgbClr val="3A3A3A"/>
+              </a:buClr>
+              <a:buSzPts val="1500"/>
+              <a:buFont typeface="Arial"/>
+              <a:buNone/>
+            </a:pPr>
+            <a:r>
+              <a:rPr i="0" lang="en-US" sz="1700" u="none" cap="none" strike="noStrike">
+                <a:solidFill>
+                  <a:schemeClr val="dk1"/>
+                </a:solidFill>
+              </a:rPr>
+              <a:t>Top hubs (HNRNPA1, YBX1, ELAVL1/HuR, SRSF3) overlap DepMap CRISPR essentials (p = 6.4×10⁻⁵).</a:t>
+            </a:r>
+            <a:endParaRPr i="0" sz="1700" u="none" cap="none" strike="noStrike">
+              <a:solidFill>
+                <a:schemeClr val="dk1"/>
+              </a:solidFill>
+            </a:endParaRPr>
+          </a:p>
+          <a:p>
+            <a:pPr indent="0" lvl="0" marL="0" marR="0" rtl="0" algn="l">
+              <a:lnSpc>
+                <a:spcPct val="112000"/>
+              </a:lnSpc>
+              <a:spcBef>
+                <a:spcPts val="0"/>
+              </a:spcBef>
+              <a:spcAft>
+                <a:spcPts val="0"/>
+              </a:spcAft>
+              <a:buClr>
+                <a:schemeClr val="dk1"/>
+              </a:buClr>
+              <a:buSzPts val="1500"/>
+              <a:buFont typeface="Calibri"/>
+              <a:buNone/>
+            </a:pPr>
+            <a:r>
+              <a:t/>
+            </a:r>
+            <a:endParaRPr i="0" sz="1700" u="none" cap="none" strike="noStrike">
+              <a:solidFill>
+                <a:schemeClr val="dk1"/>
+              </a:solidFill>
+            </a:endParaRPr>
+          </a:p>
+          <a:p>
+            <a:pPr indent="0" lvl="0" marL="0" marR="0" rtl="0" algn="l">
+              <a:lnSpc>
+                <a:spcPct val="112000"/>
+              </a:lnSpc>
+              <a:spcBef>
+                <a:spcPts val="0"/>
+              </a:spcBef>
+              <a:spcAft>
+                <a:spcPts val="0"/>
+              </a:spcAft>
+              <a:buClr>
+                <a:srgbClr val="000000"/>
+              </a:buClr>
+              <a:buSzPts val="1700"/>
+              <a:buFont typeface="Arial"/>
+              <a:buNone/>
+            </a:pPr>
+            <a:r>
+              <a:rPr b="1" i="0" lang="en-US" sz="1700" u="none" cap="none" strike="noStrike">
+                <a:solidFill>
+                  <a:schemeClr val="dk1"/>
+                </a:solidFill>
+              </a:rPr>
+              <a:t>Neuroblastoma flips the sign.</a:t>
+            </a:r>
+            <a:endParaRPr i="0" sz="1700" u="none" cap="none" strike="noStrike">
+              <a:solidFill>
+                <a:schemeClr val="dk1"/>
+              </a:solidFill>
+            </a:endParaRPr>
+          </a:p>
+          <a:p>
+            <a:pPr indent="0" lvl="0" marL="0" marR="0" rtl="0" algn="l">
+              <a:lnSpc>
+                <a:spcPct val="112000"/>
+              </a:lnSpc>
+              <a:spcBef>
+                <a:spcPts val="0"/>
+              </a:spcBef>
+              <a:spcAft>
+                <a:spcPts val="0"/>
+              </a:spcAft>
+              <a:buClr>
+                <a:srgbClr val="3A3A3A"/>
+              </a:buClr>
+              <a:buSzPts val="1500"/>
+              <a:buFont typeface="Arial"/>
+              <a:buNone/>
+            </a:pPr>
+            <a:r>
+              <a:rPr i="0" lang="en-US" sz="1700" u="none" cap="none" strike="noStrike">
+                <a:solidFill>
+                  <a:schemeClr val="dk1"/>
+                </a:solidFill>
+              </a:rPr>
+              <a:t>Landscape becomes 66% stabilising — the oncogenic regime; a ~3.4% MYCN-driven subpopulation reaches 81%.</a:t>
+            </a:r>
+            <a:endParaRPr i="0" sz="1700" u="none" cap="none" strike="noStrike">
+              <a:solidFill>
+                <a:schemeClr val="dk1"/>
+              </a:solidFill>
+            </a:endParaRPr>
+          </a:p>
+          <a:p>
+            <a:pPr indent="0" lvl="0" marL="0" marR="0" rtl="0" algn="l">
+              <a:lnSpc>
+                <a:spcPct val="112000"/>
+              </a:lnSpc>
+              <a:spcBef>
+                <a:spcPts val="0"/>
+              </a:spcBef>
+              <a:spcAft>
+                <a:spcPts val="0"/>
+              </a:spcAft>
+              <a:buClr>
+                <a:srgbClr val="3A3A3A"/>
+              </a:buClr>
+              <a:buSzPts val="1500"/>
+              <a:buFont typeface="Arial"/>
+              <a:buNone/>
+            </a:pPr>
+            <a:r>
+              <a:t/>
+            </a:r>
+            <a:endParaRPr sz="1700">
+              <a:solidFill>
+                <a:schemeClr val="dk1"/>
+              </a:solidFill>
+            </a:endParaRPr>
+          </a:p>
+          <a:p>
+            <a:pPr indent="0" lvl="0" marL="0" marR="0" rtl="0" algn="l">
+              <a:lnSpc>
+                <a:spcPct val="112000"/>
+              </a:lnSpc>
+              <a:spcBef>
+                <a:spcPts val="0"/>
+              </a:spcBef>
+              <a:spcAft>
+                <a:spcPts val="0"/>
+              </a:spcAft>
+              <a:buClr>
+                <a:srgbClr val="3A3A3A"/>
+              </a:buClr>
+              <a:buSzPts val="1500"/>
+              <a:buFont typeface="Arial"/>
+              <a:buNone/>
+            </a:pPr>
+            <a:r>
+              <a:rPr b="1" lang="en-US" sz="1700">
+                <a:solidFill>
+                  <a:schemeClr val="dk1"/>
+                </a:solidFill>
+              </a:rPr>
+              <a:t>Top stabilizing hubs:</a:t>
+            </a:r>
+            <a:r>
+              <a:rPr lang="en-US" sz="1700">
+                <a:solidFill>
+                  <a:schemeClr val="dk1"/>
+                </a:solidFill>
+              </a:rPr>
+              <a:t> HNRNPA2B1, PABPC1 (known cancer dependencies). Destabilizing minority: ZFP36 / TTP — AU-rich-element decay factors suppressed in cancer </a:t>
+            </a:r>
+            <a:endParaRPr sz="1700">
+              <a:solidFill>
+                <a:schemeClr val="dk1"/>
+              </a:solidFill>
+            </a:endParaRPr>
+          </a:p>
+        </p:txBody>
+      </p:sp>
+      <p:sp>
+        <p:nvSpPr>
+          <p:cNvPr id="230" name="Google Shape;230;p20"/>
+          <p:cNvSpPr/>
+          <p:nvPr/>
+        </p:nvSpPr>
+        <p:spPr>
+          <a:xfrm>
+            <a:off x="6336792" y="2084832"/>
+            <a:ext cx="5477256" cy="3282696"/>
+          </a:xfrm>
+          <a:prstGeom prst="roundRect">
+            <a:avLst>
+              <a:gd fmla="val 2228" name="adj"/>
+            </a:avLst>
+          </a:prstGeom>
+          <a:solidFill>
+            <a:srgbClr val="FFFFFF"/>
+          </a:solidFill>
+          <a:ln cap="flat" cmpd="sng" w="12700">
+            <a:solidFill>
+              <a:srgbClr val="BBBBBB"/>
+            </a:solidFill>
+            <a:prstDash val="solid"/>
+            <a:round/>
+            <a:headEnd len="sm" w="sm" type="none"/>
+            <a:tailEnd len="sm" w="sm" type="none"/>
+          </a:ln>
+          <a:effectLst>
+            <a:outerShdw blurRad="88900" rotWithShape="0" algn="bl" dir="5400000" dist="25400">
+              <a:srgbClr val="000000">
+                <a:alpha val="18039"/>
+              </a:srgbClr>
+            </a:outerShdw>
+          </a:effectLst>
+        </p:spPr>
+        <p:txBody>
+          <a:bodyPr anchorCtr="0" anchor="ctr" bIns="91425" lIns="91425" spcFirstLastPara="1" rIns="91425" wrap="square" tIns="91425">
+            <a:noAutofit/>
+          </a:bodyPr>
+          <a:lstStyle/>
+          <a:p>
+            <a:pPr indent="0" lvl="0" marL="0" rtl="0" algn="l">
+              <a:spcBef>
+                <a:spcPts val="0"/>
+              </a:spcBef>
+              <a:spcAft>
+                <a:spcPts val="0"/>
+              </a:spcAft>
+              <a:buNone/>
+            </a:pPr>
+            <a:r>
+              <a:t/>
+            </a:r>
+            <a:endParaRPr/>
+          </a:p>
+        </p:txBody>
+      </p:sp>
+      <p:pic>
+        <p:nvPicPr>
+          <p:cNvPr descr="figs/gen_flip.png" id="231" name="Google Shape;231;p20"/>
+          <p:cNvPicPr preferRelativeResize="0"/>
+          <p:nvPr/>
+        </p:nvPicPr>
+        <p:blipFill rotWithShape="1">
+          <a:blip r:embed="rId3">
+            <a:alphaModFix/>
+          </a:blip>
+          <a:srcRect b="0" l="0" r="0" t="0"/>
+          <a:stretch/>
+        </p:blipFill>
+        <p:spPr>
+          <a:xfrm>
+            <a:off x="6446520" y="2194560"/>
+            <a:ext cx="5257798" cy="3063240"/>
+          </a:xfrm>
+          <a:prstGeom prst="rect">
+            <a:avLst/>
+          </a:prstGeom>
+          <a:noFill/>
+          <a:ln>
+            <a:noFill/>
+          </a:ln>
+        </p:spPr>
+      </p:pic>
     </p:spTree>
   </p:cSld>
   <p:clrMapOvr>
@@ -8676,499 +8882,7 @@
 </p:sld>
 </file>
 
-<file path=ppt/slides/slide21.xml><?xml version="1.0" encoding="utf-8"?>
-<p:sld xmlns:a="http://schemas.openxmlformats.org/drawingml/2006/main" xmlns:r="http://schemas.openxmlformats.org/officeDocument/2006/relationships" xmlns:mc="http://schemas.openxmlformats.org/markup-compatibility/2006" xmlns:mv="urn:schemas-microsoft-com:mac:vml" xmlns:p="http://schemas.openxmlformats.org/presentationml/2006/main" xmlns:c="http://schemas.openxmlformats.org/drawingml/2006/chart" xmlns:dgm="http://schemas.openxmlformats.org/drawingml/2006/diagram" xmlns:o="urn:schemas-microsoft-com:office:office" xmlns:v="urn:schemas-microsoft-com:vml" xmlns:pvml="urn:schemas-microsoft-com:office:powerpoint" xmlns:com="http://schemas.openxmlformats.org/drawingml/2006/compatibility" xmlns:p14="http://schemas.microsoft.com/office/powerpoint/2010/main" xmlns:p15="http://schemas.microsoft.com/office/powerpoint/2012/main" xmlns:ahyp="http://schemas.microsoft.com/office/drawing/2018/hyperlinkcolor">
-  <p:cSld>
-    <p:bg>
-      <p:bgPr>
-        <a:solidFill>
-          <a:srgbClr val="FFFFFF"/>
-        </a:solidFill>
-      </p:bgPr>
-    </p:bg>
-    <p:spTree>
-      <p:nvGrpSpPr>
-        <p:cNvPr id="218" name="Shape 218"/>
-        <p:cNvGrpSpPr/>
-        <p:nvPr/>
-      </p:nvGrpSpPr>
-      <p:grpSpPr>
-        <a:xfrm>
-          <a:off x="0" y="0"/>
-          <a:ext cx="0" cy="0"/>
-          <a:chOff x="0" y="0"/>
-          <a:chExt cx="0" cy="0"/>
-        </a:xfrm>
-      </p:grpSpPr>
-      <p:sp>
-        <p:nvSpPr>
-          <p:cNvPr id="219" name="Google Shape;219;p19"/>
-          <p:cNvSpPr/>
-          <p:nvPr/>
-        </p:nvSpPr>
-        <p:spPr>
-          <a:xfrm>
-            <a:off x="548640" y="457200"/>
-            <a:ext cx="11064240" cy="868680"/>
-          </a:xfrm>
-          <a:prstGeom prst="rect">
-            <a:avLst/>
-          </a:prstGeom>
-          <a:noFill/>
-          <a:ln>
-            <a:noFill/>
-          </a:ln>
-        </p:spPr>
-        <p:txBody>
-          <a:bodyPr anchorCtr="0" anchor="t" bIns="0" lIns="0" spcFirstLastPara="1" rIns="0" wrap="square" tIns="0">
-            <a:noAutofit/>
-          </a:bodyPr>
-          <a:lstStyle/>
-          <a:p>
-            <a:pPr indent="0" lvl="0" marL="0" marR="0" rtl="0" algn="l">
-              <a:spcBef>
-                <a:spcPts val="0"/>
-              </a:spcBef>
-              <a:spcAft>
-                <a:spcPts val="0"/>
-              </a:spcAft>
-              <a:buClr>
-                <a:srgbClr val="111111"/>
-              </a:buClr>
-              <a:buSzPts val="3000"/>
-              <a:buFont typeface="Arial"/>
-              <a:buNone/>
-            </a:pPr>
-            <a:r>
-              <a:rPr b="1" i="0" lang="en-US" sz="3000" u="none" cap="none" strike="noStrike">
-                <a:solidFill>
-                  <a:srgbClr val="111111"/>
-                </a:solidFill>
-                <a:latin typeface="Arial"/>
-                <a:ea typeface="Arial"/>
-                <a:cs typeface="Arial"/>
-                <a:sym typeface="Arial"/>
-              </a:rPr>
-              <a:t>Finding 2 · Degradation changes PRECEDE expression</a:t>
-            </a:r>
-            <a:endParaRPr b="0" i="0" sz="3000" u="none" cap="none" strike="noStrike">
-              <a:solidFill>
-                <a:schemeClr val="dk1"/>
-              </a:solidFill>
-              <a:latin typeface="Calibri"/>
-              <a:ea typeface="Calibri"/>
-              <a:cs typeface="Calibri"/>
-              <a:sym typeface="Calibri"/>
-            </a:endParaRPr>
-          </a:p>
-        </p:txBody>
-      </p:sp>
-      <p:sp>
-        <p:nvSpPr>
-          <p:cNvPr id="220" name="Google Shape;220;p19"/>
-          <p:cNvSpPr/>
-          <p:nvPr/>
-        </p:nvSpPr>
-        <p:spPr>
-          <a:xfrm>
-            <a:off x="278375" y="1764800"/>
-            <a:ext cx="6094800" cy="4642500"/>
-          </a:xfrm>
-          <a:prstGeom prst="roundRect">
-            <a:avLst>
-              <a:gd fmla="val 1909" name="adj"/>
-            </a:avLst>
-          </a:prstGeom>
-          <a:solidFill>
-            <a:srgbClr val="FFFFFF"/>
-          </a:solidFill>
-          <a:ln cap="flat" cmpd="sng" w="15400">
-            <a:solidFill>
-              <a:srgbClr val="BBBBBB"/>
-            </a:solidFill>
-            <a:prstDash val="solid"/>
-            <a:round/>
-            <a:headEnd len="sm" w="sm" type="none"/>
-            <a:tailEnd len="sm" w="sm" type="none"/>
-          </a:ln>
-          <a:effectLst>
-            <a:outerShdw blurRad="107726" rotWithShape="0" algn="bl" dir="5400000" dist="30779">
-              <a:srgbClr val="000000">
-                <a:alpha val="18039"/>
-              </a:srgbClr>
-            </a:outerShdw>
-          </a:effectLst>
-        </p:spPr>
-        <p:txBody>
-          <a:bodyPr anchorCtr="0" anchor="ctr" bIns="110775" lIns="110775" spcFirstLastPara="1" rIns="110775" wrap="square" tIns="110775">
-            <a:noAutofit/>
-          </a:bodyPr>
-          <a:lstStyle/>
-          <a:p>
-            <a:pPr indent="0" lvl="0" marL="0" rtl="0" algn="l">
-              <a:spcBef>
-                <a:spcPts val="0"/>
-              </a:spcBef>
-              <a:spcAft>
-                <a:spcPts val="0"/>
-              </a:spcAft>
-              <a:buNone/>
-            </a:pPr>
-            <a:r>
-              <a:t/>
-            </a:r>
-            <a:endParaRPr/>
-          </a:p>
-        </p:txBody>
-      </p:sp>
-      <p:sp>
-        <p:nvSpPr>
-          <p:cNvPr id="222" name="Google Shape;222;p19"/>
-          <p:cNvSpPr/>
-          <p:nvPr/>
-        </p:nvSpPr>
-        <p:spPr>
-          <a:xfrm>
-            <a:off x="6629400" y="1783080"/>
-            <a:ext cx="4937760" cy="3931920"/>
-          </a:xfrm>
-          <a:prstGeom prst="rect">
-            <a:avLst/>
-          </a:prstGeom>
-          <a:noFill/>
-          <a:ln>
-            <a:noFill/>
-          </a:ln>
-        </p:spPr>
-        <p:txBody>
-          <a:bodyPr anchorCtr="0" anchor="t" bIns="0" lIns="0" spcFirstLastPara="1" rIns="0" wrap="square" tIns="0">
-            <a:noAutofit/>
-          </a:bodyPr>
-          <a:lstStyle/>
-          <a:p>
-            <a:pPr indent="0" lvl="0" marL="0" marR="0" rtl="0" algn="l">
-              <a:lnSpc>
-                <a:spcPct val="112000"/>
-              </a:lnSpc>
-              <a:spcBef>
-                <a:spcPts val="0"/>
-              </a:spcBef>
-              <a:spcAft>
-                <a:spcPts val="0"/>
-              </a:spcAft>
-              <a:buClr>
-                <a:srgbClr val="111111"/>
-              </a:buClr>
-              <a:buSzPts val="1800"/>
-              <a:buFont typeface="Arial"/>
-              <a:buNone/>
-            </a:pPr>
-            <a:r>
-              <a:rPr b="1" i="0" lang="en-US" sz="2200" u="none" cap="none" strike="noStrike">
-                <a:solidFill>
-                  <a:srgbClr val="111111"/>
-                </a:solidFill>
-                <a:latin typeface="Arial"/>
-                <a:ea typeface="Arial"/>
-                <a:cs typeface="Arial"/>
-                <a:sym typeface="Arial"/>
-              </a:rPr>
-              <a:t>Post-transcriptional velocity</a:t>
-            </a:r>
-            <a:endParaRPr b="0" i="0" sz="2200" u="none" cap="none" strike="noStrike">
-              <a:solidFill>
-                <a:schemeClr val="dk1"/>
-              </a:solidFill>
-              <a:latin typeface="Calibri"/>
-              <a:ea typeface="Calibri"/>
-              <a:cs typeface="Calibri"/>
-              <a:sym typeface="Calibri"/>
-            </a:endParaRPr>
-          </a:p>
-          <a:p>
-            <a:pPr indent="0" lvl="0" marL="0" marR="0" rtl="0" algn="l">
-              <a:lnSpc>
-                <a:spcPct val="112000"/>
-              </a:lnSpc>
-              <a:spcBef>
-                <a:spcPts val="0"/>
-              </a:spcBef>
-              <a:spcAft>
-                <a:spcPts val="0"/>
-              </a:spcAft>
-              <a:buClr>
-                <a:srgbClr val="111111"/>
-              </a:buClr>
-              <a:buSzPts val="1550"/>
-              <a:buFont typeface="Arial"/>
-              <a:buNone/>
-            </a:pPr>
-            <a:r>
-              <a:rPr b="0" i="0" lang="en-US" sz="2200" u="none" cap="none" strike="noStrike">
-                <a:solidFill>
-                  <a:srgbClr val="111111"/>
-                </a:solidFill>
-                <a:latin typeface="Arial"/>
-                <a:ea typeface="Arial"/>
-                <a:cs typeface="Arial"/>
-                <a:sym typeface="Arial"/>
-              </a:rPr>
-              <a:t>— a per-cell γ vector field, </a:t>
-            </a:r>
-            <a:r>
-              <a:rPr b="1" i="0" lang="en-US" sz="2200" u="none" cap="none" strike="noStrike">
-                <a:solidFill>
-                  <a:srgbClr val="111111"/>
-                </a:solidFill>
-                <a:latin typeface="Arial"/>
-                <a:ea typeface="Arial"/>
-                <a:cs typeface="Arial"/>
-                <a:sym typeface="Arial"/>
-              </a:rPr>
-              <a:t>≈ orthogonal to RNA velocity</a:t>
-            </a:r>
-            <a:r>
-              <a:rPr b="0" i="0" lang="en-US" sz="2200" u="none" cap="none" strike="noStrike">
-                <a:solidFill>
-                  <a:srgbClr val="111111"/>
-                </a:solidFill>
-                <a:latin typeface="Arial"/>
-                <a:ea typeface="Arial"/>
-                <a:cs typeface="Arial"/>
-                <a:sym typeface="Arial"/>
-              </a:rPr>
-              <a:t> (cosine ≈ −0.06): the two axes carry independent information.</a:t>
-            </a:r>
-            <a:endParaRPr b="0" i="0" sz="2200" u="none" cap="none" strike="noStrike">
-              <a:solidFill>
-                <a:schemeClr val="dk1"/>
-              </a:solidFill>
-              <a:latin typeface="Calibri"/>
-              <a:ea typeface="Calibri"/>
-              <a:cs typeface="Calibri"/>
-              <a:sym typeface="Calibri"/>
-            </a:endParaRPr>
-          </a:p>
-          <a:p>
-            <a:pPr indent="0" lvl="0" marL="0" marR="0" rtl="0" algn="l">
-              <a:lnSpc>
-                <a:spcPct val="112000"/>
-              </a:lnSpc>
-              <a:spcBef>
-                <a:spcPts val="0"/>
-              </a:spcBef>
-              <a:spcAft>
-                <a:spcPts val="0"/>
-              </a:spcAft>
-              <a:buClr>
-                <a:schemeClr val="dk1"/>
-              </a:buClr>
-              <a:buSzPts val="1550"/>
-              <a:buFont typeface="Calibri"/>
-              <a:buNone/>
-            </a:pPr>
-            <a:r>
-              <a:t/>
-            </a:r>
-            <a:endParaRPr b="0" i="0" sz="2200" u="none" cap="none" strike="noStrike">
-              <a:solidFill>
-                <a:schemeClr val="dk1"/>
-              </a:solidFill>
-              <a:latin typeface="Calibri"/>
-              <a:ea typeface="Calibri"/>
-              <a:cs typeface="Calibri"/>
-              <a:sym typeface="Calibri"/>
-            </a:endParaRPr>
-          </a:p>
-          <a:p>
-            <a:pPr indent="0" lvl="0" marL="0" marR="0" rtl="0" algn="l">
-              <a:lnSpc>
-                <a:spcPct val="112000"/>
-              </a:lnSpc>
-              <a:spcBef>
-                <a:spcPts val="0"/>
-              </a:spcBef>
-              <a:spcAft>
-                <a:spcPts val="0"/>
-              </a:spcAft>
-              <a:buClr>
-                <a:srgbClr val="000000"/>
-              </a:buClr>
-              <a:buSzPts val="1800"/>
-              <a:buFont typeface="Arial"/>
-              <a:buNone/>
-            </a:pPr>
-            <a:r>
-              <a:rPr b="1" i="0" lang="en-US" sz="2200" u="none" cap="none" strike="noStrike">
-                <a:solidFill>
-                  <a:srgbClr val="000000"/>
-                </a:solidFill>
-                <a:latin typeface="Arial"/>
-                <a:ea typeface="Arial"/>
-                <a:cs typeface="Arial"/>
-                <a:sym typeface="Arial"/>
-              </a:rPr>
-              <a:t>γ leads expression</a:t>
-            </a:r>
-            <a:r>
-              <a:rPr b="0" i="0" lang="en-US" sz="2200" u="none" cap="none" strike="noStrike">
-                <a:solidFill>
-                  <a:srgbClr val="111111"/>
-                </a:solidFill>
-                <a:latin typeface="Arial"/>
-                <a:ea typeface="Arial"/>
-                <a:cs typeface="Arial"/>
-                <a:sym typeface="Arial"/>
-              </a:rPr>
-              <a:t> along pseudotime for:</a:t>
-            </a:r>
-            <a:endParaRPr b="0" i="0" sz="2200" u="none" cap="none" strike="noStrike">
-              <a:solidFill>
-                <a:schemeClr val="dk1"/>
-              </a:solidFill>
-              <a:latin typeface="Calibri"/>
-              <a:ea typeface="Calibri"/>
-              <a:cs typeface="Calibri"/>
-              <a:sym typeface="Calibri"/>
-            </a:endParaRPr>
-          </a:p>
-          <a:p>
-            <a:pPr indent="0" lvl="0" marL="0" marR="0" rtl="0" algn="l">
-              <a:lnSpc>
-                <a:spcPct val="112000"/>
-              </a:lnSpc>
-              <a:spcBef>
-                <a:spcPts val="0"/>
-              </a:spcBef>
-              <a:spcAft>
-                <a:spcPts val="0"/>
-              </a:spcAft>
-              <a:buClr>
-                <a:srgbClr val="111111"/>
-              </a:buClr>
-              <a:buSzPts val="1550"/>
-              <a:buFont typeface="Arial"/>
-              <a:buNone/>
-            </a:pPr>
-            <a:r>
-              <a:rPr b="0" i="0" lang="en-US" sz="2200" u="none" cap="none" strike="noStrike">
-                <a:solidFill>
-                  <a:srgbClr val="111111"/>
-                </a:solidFill>
-                <a:latin typeface="Arial"/>
-                <a:ea typeface="Arial"/>
-                <a:cs typeface="Arial"/>
-                <a:sym typeface="Arial"/>
-              </a:rPr>
-              <a:t>63% of pancreas (p=5.3×10⁻⁶), 78% of dentate gyrus, 61% of A549 transition genes.</a:t>
-            </a:r>
-            <a:endParaRPr b="0" i="0" sz="2200" u="none" cap="none" strike="noStrike">
-              <a:solidFill>
-                <a:schemeClr val="dk1"/>
-              </a:solidFill>
-              <a:latin typeface="Calibri"/>
-              <a:ea typeface="Calibri"/>
-              <a:cs typeface="Calibri"/>
-              <a:sym typeface="Calibri"/>
-            </a:endParaRPr>
-          </a:p>
-          <a:p>
-            <a:pPr indent="0" lvl="0" marL="0" marR="0" rtl="0" algn="l">
-              <a:lnSpc>
-                <a:spcPct val="112000"/>
-              </a:lnSpc>
-              <a:spcBef>
-                <a:spcPts val="0"/>
-              </a:spcBef>
-              <a:spcAft>
-                <a:spcPts val="0"/>
-              </a:spcAft>
-              <a:buClr>
-                <a:schemeClr val="dk1"/>
-              </a:buClr>
-              <a:buSzPts val="1550"/>
-              <a:buFont typeface="Calibri"/>
-              <a:buNone/>
-            </a:pPr>
-            <a:r>
-              <a:t/>
-            </a:r>
-            <a:endParaRPr b="0" i="0" sz="2200" u="none" cap="none" strike="noStrike">
-              <a:solidFill>
-                <a:schemeClr val="dk1"/>
-              </a:solidFill>
-              <a:latin typeface="Calibri"/>
-              <a:ea typeface="Calibri"/>
-              <a:cs typeface="Calibri"/>
-              <a:sym typeface="Calibri"/>
-            </a:endParaRPr>
-          </a:p>
-          <a:p>
-            <a:pPr indent="0" lvl="0" marL="0" marR="0" rtl="0" algn="l">
-              <a:lnSpc>
-                <a:spcPct val="112000"/>
-              </a:lnSpc>
-              <a:spcBef>
-                <a:spcPts val="0"/>
-              </a:spcBef>
-              <a:spcAft>
-                <a:spcPts val="0"/>
-              </a:spcAft>
-              <a:buClr>
-                <a:srgbClr val="6A6A6A"/>
-              </a:buClr>
-              <a:buSzPts val="1550"/>
-              <a:buFont typeface="Arial"/>
-              <a:buNone/>
-            </a:pPr>
-            <a:r>
-              <a:t/>
-            </a:r>
-            <a:endParaRPr b="0" i="0" sz="2200" u="none" cap="none" strike="noStrike">
-              <a:solidFill>
-                <a:schemeClr val="dk1"/>
-              </a:solidFill>
-              <a:latin typeface="Calibri"/>
-              <a:ea typeface="Calibri"/>
-              <a:cs typeface="Calibri"/>
-              <a:sym typeface="Calibri"/>
-            </a:endParaRPr>
-          </a:p>
-        </p:txBody>
-      </p:sp>
-      <p:pic>
-        <p:nvPicPr>
-          <p:cNvPr id="223" name="Picture 222" descr="image.png"/>
-          <p:cNvPicPr>
-            <a:picLocks noChangeAspect="1"/>
-          </p:cNvPicPr>
-          <p:nvPr/>
-        </p:nvPicPr>
-        <p:blipFill>
-          <a:blip r:embed="rId4"/>
-          <a:stretch>
-            <a:fillRect/>
-          </a:stretch>
-        </p:blipFill>
-        <p:spPr>
-          <a:xfrm>
-            <a:off x="609600" y="685800"/>
-            <a:ext cx="10972800" cy="5486400"/>
-          </a:xfrm>
-          <a:prstGeom prst="rect">
-            <a:avLst/>
-          </a:prstGeom>
-        </p:spPr>
-      </p:pic>
-    </p:spTree>
-  </p:cSld>
-  <p:clrMapOvr>
-    <a:masterClrMapping/>
-  </p:clrMapOvr>
-</p:sld>
-</file>
-
-<file path=ppt/slides/slide23.xml><?xml version="1.0" encoding="utf-8"?>
+<file path=ppt/slides/slide20.xml><?xml version="1.0" encoding="utf-8"?>
 <p:sld xmlns:a="http://schemas.openxmlformats.org/drawingml/2006/main" xmlns:p="http://schemas.openxmlformats.org/presentationml/2006/main" xmlns:r="http://schemas.openxmlformats.org/officeDocument/2006/relationships">
   <p:cSld>
     <p:bg>
@@ -9186,9 +8900,72 @@
         <p:nvPr/>
       </p:nvGrpSpPr>
       <p:grpSpPr/>
+      <p:sp>
+        <p:nvSpPr>
+          <p:cNvPr id="3" name="TextBox 2"/>
+          <p:cNvSpPr txBox="1"/>
+          <p:nvPr/>
+        </p:nvSpPr>
+        <p:spPr>
+          <a:xfrm>
+            <a:off x="609600" y="6206490"/>
+            <a:ext cx="10972800" cy="548640"/>
+          </a:xfrm>
+          <a:prstGeom prst="rect">
+            <a:avLst/>
+          </a:prstGeom>
+          <a:noFill/>
+        </p:spPr>
+        <p:txBody>
+          <a:bodyPr wrap="square">
+            <a:spAutoFit/>
+          </a:bodyPr>
+          <a:lstStyle/>
+          <a:p>
+            <a:pPr algn="ctr"/>
+            <a:r>
+              <a:rPr sz="1300">
+                <a:solidFill>
+                  <a:srgbClr val="444444"/>
+                </a:solidFill>
+              </a:rPr>
+              <a:t>Hub RBPs identified by scPTR are significantly more essential in DepMap CRISPR screens (p=6.4×10⁻⁵).</a:t>
+            </a:r>
+          </a:p>
+        </p:txBody>
+      </p:sp>
+      <p:sp>
+        <p:nvSpPr>
+          <p:cNvPr id="4" name="FigBg_4"/>
+          <p:cNvSpPr>
+            <a:spLocks noGrp="1"/>
+          </p:cNvSpPr>
+          <p:nvPr/>
+        </p:nvSpPr>
+        <p:spPr>
+          <a:xfrm>
+            <a:off x="382523" y="914400"/>
+            <a:ext cx="11426954" cy="5166360"/>
+          </a:xfrm>
+          <a:prstGeom prst="roundRect">
+            <a:avLst/>
+          </a:prstGeom>
+          <a:solidFill>
+            <a:srgbClr val="FFFFFF"/>
+          </a:solidFill>
+          <a:ln w="0">
+            <a:noFill/>
+          </a:ln>
+        </p:spPr>
+        <p:txBody>
+          <a:bodyPr/>
+          <a:lstStyle/>
+          <a:p/>
+        </p:txBody>
+      </p:sp>
       <p:pic>
         <p:nvPicPr>
-          <p:cNvPr id="2" name="Picture 1" descr="fig_pt_velocity_orthogonality.png"/>
+          <p:cNvPr id="5" name="Picture 4" descr="image.png"/>
           <p:cNvPicPr>
             <a:picLocks noChangeAspect="1"/>
           </p:cNvPicPr>
@@ -9202,565 +8979,12 @@
         </p:blipFill>
         <p:spPr>
           <a:xfrm>
-            <a:off x="914400" y="205740"/>
-            <a:ext cx="10363200" cy="5932170"/>
+            <a:off x="519683" y="1051560"/>
+            <a:ext cx="11152634" cy="4892040"/>
           </a:xfrm>
           <a:prstGeom prst="rect">
             <a:avLst/>
           </a:prstGeom>
-        </p:spPr>
-      </p:pic>
-      <p:sp>
-        <p:nvSpPr>
-          <p:cNvPr id="3" name="TextBox 2"/>
-          <p:cNvSpPr txBox="1"/>
-          <p:nvPr/>
-        </p:nvSpPr>
-        <p:spPr>
-          <a:xfrm>
-            <a:off x="609600" y="6206490"/>
-            <a:ext cx="10972800" cy="548640"/>
-          </a:xfrm>
-          <a:prstGeom prst="rect">
-            <a:avLst/>
-          </a:prstGeom>
-          <a:noFill/>
-        </p:spPr>
-        <p:txBody>
-          <a:bodyPr wrap="square">
-            <a:spAutoFit/>
-          </a:bodyPr>
-          <a:lstStyle/>
-          <a:p>
-            <a:pPr algn="ctr"/>
-            <a:r>
-              <a:rPr sz="1300">
-                <a:solidFill>
-                  <a:srgbClr val="444444"/>
-                </a:solidFill>
-              </a:rPr>
-              <a:t>PT velocity approximately orthogonal to RNA velocity (mean cosine = −0.056), confirming independent information axes.</a:t>
-            </a:r>
-          </a:p>
-        </p:txBody>
-      </p:sp>
-    </p:spTree>
-  </p:cSld>
-  <p:clrMapOvr>
-    <a:masterClrMapping/>
-  </p:clrMapOvr>
-</p:sld>
-</file>
-
-<file path=ppt/slides/slide24.xml><?xml version="1.0" encoding="utf-8"?>
-<p:sld xmlns:a="http://schemas.openxmlformats.org/drawingml/2006/main" xmlns:r="http://schemas.openxmlformats.org/officeDocument/2006/relationships" xmlns:mc="http://schemas.openxmlformats.org/markup-compatibility/2006" xmlns:mv="urn:schemas-microsoft-com:mac:vml" xmlns:p="http://schemas.openxmlformats.org/presentationml/2006/main" xmlns:c="http://schemas.openxmlformats.org/drawingml/2006/chart" xmlns:dgm="http://schemas.openxmlformats.org/drawingml/2006/diagram" xmlns:o="urn:schemas-microsoft-com:office:office" xmlns:v="urn:schemas-microsoft-com:vml" xmlns:pvml="urn:schemas-microsoft-com:office:powerpoint" xmlns:com="http://schemas.openxmlformats.org/drawingml/2006/compatibility" xmlns:p14="http://schemas.microsoft.com/office/powerpoint/2010/main" xmlns:p15="http://schemas.microsoft.com/office/powerpoint/2012/main" xmlns:ahyp="http://schemas.microsoft.com/office/drawing/2018/hyperlinkcolor">
-  <p:cSld>
-    <p:bg>
-      <p:bgPr>
-        <a:solidFill>
-          <a:srgbClr val="FFFFFF"/>
-        </a:solidFill>
-      </p:bgPr>
-    </p:bg>
-    <p:spTree>
-      <p:nvGrpSpPr>
-        <p:cNvPr id="227" name="Shape 227"/>
-        <p:cNvGrpSpPr/>
-        <p:nvPr/>
-      </p:nvGrpSpPr>
-      <p:grpSpPr>
-        <a:xfrm>
-          <a:off x="0" y="0"/>
-          <a:ext cx="0" cy="0"/>
-          <a:chOff x="0" y="0"/>
-          <a:chExt cx="0" cy="0"/>
-        </a:xfrm>
-      </p:grpSpPr>
-      <p:sp>
-        <p:nvSpPr>
-          <p:cNvPr id="228" name="Google Shape;228;p20"/>
-          <p:cNvSpPr/>
-          <p:nvPr/>
-        </p:nvSpPr>
-        <p:spPr>
-          <a:xfrm>
-            <a:off x="548640" y="457200"/>
-            <a:ext cx="11064240" cy="868680"/>
-          </a:xfrm>
-          <a:prstGeom prst="rect">
-            <a:avLst/>
-          </a:prstGeom>
-          <a:noFill/>
-          <a:ln>
-            <a:noFill/>
-          </a:ln>
-        </p:spPr>
-        <p:txBody>
-          <a:bodyPr anchorCtr="0" anchor="t" bIns="0" lIns="0" spcFirstLastPara="1" rIns="0" wrap="square" tIns="0">
-            <a:noAutofit/>
-          </a:bodyPr>
-          <a:lstStyle/>
-          <a:p>
-            <a:pPr indent="0" lvl="0" marL="0" marR="0" rtl="0" algn="l">
-              <a:spcBef>
-                <a:spcPts val="0"/>
-              </a:spcBef>
-              <a:spcAft>
-                <a:spcPts val="0"/>
-              </a:spcAft>
-              <a:buClr>
-                <a:srgbClr val="111111"/>
-              </a:buClr>
-              <a:buSzPts val="3000"/>
-              <a:buFont typeface="Arial"/>
-              <a:buNone/>
-            </a:pPr>
-            <a:r>
-              <a:rPr b="1" i="0" lang="en-US" sz="3000" u="none" cap="none" strike="noStrike">
-                <a:solidFill>
-                  <a:srgbClr val="111111"/>
-                </a:solidFill>
-                <a:latin typeface="Arial"/>
-                <a:ea typeface="Arial"/>
-                <a:cs typeface="Arial"/>
-                <a:sym typeface="Arial"/>
-              </a:rPr>
-              <a:t>Finding 3 · RBP networks recover cancer dependencies</a:t>
-            </a:r>
-            <a:endParaRPr b="0" i="0" sz="3000" u="none" cap="none" strike="noStrike">
-              <a:solidFill>
-                <a:schemeClr val="dk1"/>
-              </a:solidFill>
-              <a:latin typeface="Calibri"/>
-              <a:ea typeface="Calibri"/>
-              <a:cs typeface="Calibri"/>
-              <a:sym typeface="Calibri"/>
-            </a:endParaRPr>
-          </a:p>
-        </p:txBody>
-      </p:sp>
-      <p:sp>
-        <p:nvSpPr>
-          <p:cNvPr id="229" name="Google Shape;229;p20"/>
-          <p:cNvSpPr/>
-          <p:nvPr/>
-        </p:nvSpPr>
-        <p:spPr>
-          <a:xfrm>
-            <a:off x="594360" y="1783080"/>
-            <a:ext cx="5669280" cy="4023360"/>
-          </a:xfrm>
-          <a:prstGeom prst="rect">
-            <a:avLst/>
-          </a:prstGeom>
-          <a:noFill/>
-          <a:ln>
-            <a:noFill/>
-          </a:ln>
-        </p:spPr>
-        <p:txBody>
-          <a:bodyPr anchorCtr="0" anchor="t" bIns="0" lIns="0" spcFirstLastPara="1" rIns="0" wrap="square" tIns="0">
-            <a:noAutofit/>
-          </a:bodyPr>
-          <a:lstStyle/>
-          <a:p>
-            <a:pPr indent="0" lvl="0" marL="0" marR="0" rtl="0" algn="l">
-              <a:lnSpc>
-                <a:spcPct val="112000"/>
-              </a:lnSpc>
-              <a:spcBef>
-                <a:spcPts val="0"/>
-              </a:spcBef>
-              <a:spcAft>
-                <a:spcPts val="0"/>
-              </a:spcAft>
-              <a:buClr>
-                <a:srgbClr val="111111"/>
-              </a:buClr>
-              <a:buSzPts val="1700"/>
-              <a:buFont typeface="Arial"/>
-              <a:buNone/>
-            </a:pPr>
-            <a:r>
-              <a:rPr b="1" i="0" lang="en-US" sz="1700" u="none" cap="none" strike="noStrike">
-                <a:solidFill>
-                  <a:schemeClr val="dk1"/>
-                </a:solidFill>
-              </a:rPr>
-              <a:t>Library-size correction is essential.</a:t>
-            </a:r>
-            <a:endParaRPr i="0" sz="1700" u="none" cap="none" strike="noStrike">
-              <a:solidFill>
-                <a:schemeClr val="dk1"/>
-              </a:solidFill>
-            </a:endParaRPr>
-          </a:p>
-          <a:p>
-            <a:pPr indent="0" lvl="0" marL="0" marR="0" rtl="0" algn="l">
-              <a:lnSpc>
-                <a:spcPct val="112000"/>
-              </a:lnSpc>
-              <a:spcBef>
-                <a:spcPts val="0"/>
-              </a:spcBef>
-              <a:spcAft>
-                <a:spcPts val="0"/>
-              </a:spcAft>
-              <a:buClr>
-                <a:srgbClr val="3A3A3A"/>
-              </a:buClr>
-              <a:buSzPts val="1500"/>
-              <a:buFont typeface="Arial"/>
-              <a:buNone/>
-            </a:pPr>
-            <a:r>
-              <a:rPr i="0" lang="en-US" sz="1700" u="none" cap="none" strike="noStrike">
-                <a:solidFill>
-                  <a:schemeClr val="dk1"/>
-                </a:solidFill>
-              </a:rPr>
-              <a:t>Uncorrected inference is 98.9% destabilising (depth confound); correction drops 11,847 spurious edges → balanced 53/47.</a:t>
-            </a:r>
-            <a:endParaRPr i="0" sz="1700" u="none" cap="none" strike="noStrike">
-              <a:solidFill>
-                <a:schemeClr val="dk1"/>
-              </a:solidFill>
-            </a:endParaRPr>
-          </a:p>
-          <a:p>
-            <a:pPr indent="0" lvl="0" marL="0" marR="0" rtl="0" algn="l">
-              <a:lnSpc>
-                <a:spcPct val="112000"/>
-              </a:lnSpc>
-              <a:spcBef>
-                <a:spcPts val="0"/>
-              </a:spcBef>
-              <a:spcAft>
-                <a:spcPts val="0"/>
-              </a:spcAft>
-              <a:buClr>
-                <a:schemeClr val="dk1"/>
-              </a:buClr>
-              <a:buSzPts val="1500"/>
-              <a:buFont typeface="Calibri"/>
-              <a:buNone/>
-            </a:pPr>
-            <a:r>
-              <a:t/>
-            </a:r>
-            <a:endParaRPr i="0" sz="1700" u="none" cap="none" strike="noStrike">
-              <a:solidFill>
-                <a:schemeClr val="dk1"/>
-              </a:solidFill>
-            </a:endParaRPr>
-          </a:p>
-          <a:p>
-            <a:pPr indent="0" lvl="0" marL="0" marR="0" rtl="0" algn="l">
-              <a:lnSpc>
-                <a:spcPct val="112000"/>
-              </a:lnSpc>
-              <a:spcBef>
-                <a:spcPts val="0"/>
-              </a:spcBef>
-              <a:spcAft>
-                <a:spcPts val="0"/>
-              </a:spcAft>
-              <a:buClr>
-                <a:srgbClr val="111111"/>
-              </a:buClr>
-              <a:buSzPts val="1700"/>
-              <a:buFont typeface="Arial"/>
-              <a:buNone/>
-            </a:pPr>
-            <a:r>
-              <a:rPr b="1" i="0" lang="en-US" sz="1700" u="none" cap="none" strike="noStrike">
-                <a:solidFill>
-                  <a:schemeClr val="dk1"/>
-                </a:solidFill>
-              </a:rPr>
-              <a:t>Hubs = known essentials.</a:t>
-            </a:r>
-            <a:endParaRPr i="0" sz="1700" u="none" cap="none" strike="noStrike">
-              <a:solidFill>
-                <a:schemeClr val="dk1"/>
-              </a:solidFill>
-            </a:endParaRPr>
-          </a:p>
-          <a:p>
-            <a:pPr indent="0" lvl="0" marL="0" marR="0" rtl="0" algn="l">
-              <a:lnSpc>
-                <a:spcPct val="112000"/>
-              </a:lnSpc>
-              <a:spcBef>
-                <a:spcPts val="0"/>
-              </a:spcBef>
-              <a:spcAft>
-                <a:spcPts val="0"/>
-              </a:spcAft>
-              <a:buClr>
-                <a:srgbClr val="3A3A3A"/>
-              </a:buClr>
-              <a:buSzPts val="1500"/>
-              <a:buFont typeface="Arial"/>
-              <a:buNone/>
-            </a:pPr>
-            <a:r>
-              <a:rPr i="0" lang="en-US" sz="1700" u="none" cap="none" strike="noStrike">
-                <a:solidFill>
-                  <a:schemeClr val="dk1"/>
-                </a:solidFill>
-              </a:rPr>
-              <a:t>Top hubs (HNRNPA1, YBX1, ELAVL1/HuR, SRSF3) overlap DepMap CRISPR essentials (p = 6.4×10⁻⁵).</a:t>
-            </a:r>
-            <a:endParaRPr i="0" sz="1700" u="none" cap="none" strike="noStrike">
-              <a:solidFill>
-                <a:schemeClr val="dk1"/>
-              </a:solidFill>
-            </a:endParaRPr>
-          </a:p>
-          <a:p>
-            <a:pPr indent="0" lvl="0" marL="0" marR="0" rtl="0" algn="l">
-              <a:lnSpc>
-                <a:spcPct val="112000"/>
-              </a:lnSpc>
-              <a:spcBef>
-                <a:spcPts val="0"/>
-              </a:spcBef>
-              <a:spcAft>
-                <a:spcPts val="0"/>
-              </a:spcAft>
-              <a:buClr>
-                <a:schemeClr val="dk1"/>
-              </a:buClr>
-              <a:buSzPts val="1500"/>
-              <a:buFont typeface="Calibri"/>
-              <a:buNone/>
-            </a:pPr>
-            <a:r>
-              <a:t/>
-            </a:r>
-            <a:endParaRPr i="0" sz="1700" u="none" cap="none" strike="noStrike">
-              <a:solidFill>
-                <a:schemeClr val="dk1"/>
-              </a:solidFill>
-            </a:endParaRPr>
-          </a:p>
-          <a:p>
-            <a:pPr indent="0" lvl="0" marL="0" marR="0" rtl="0" algn="l">
-              <a:lnSpc>
-                <a:spcPct val="112000"/>
-              </a:lnSpc>
-              <a:spcBef>
-                <a:spcPts val="0"/>
-              </a:spcBef>
-              <a:spcAft>
-                <a:spcPts val="0"/>
-              </a:spcAft>
-              <a:buClr>
-                <a:srgbClr val="000000"/>
-              </a:buClr>
-              <a:buSzPts val="1700"/>
-              <a:buFont typeface="Arial"/>
-              <a:buNone/>
-            </a:pPr>
-            <a:r>
-              <a:rPr b="1" i="0" lang="en-US" sz="1700" u="none" cap="none" strike="noStrike">
-                <a:solidFill>
-                  <a:schemeClr val="dk1"/>
-                </a:solidFill>
-              </a:rPr>
-              <a:t>Neuroblastoma flips the sign.</a:t>
-            </a:r>
-            <a:endParaRPr i="0" sz="1700" u="none" cap="none" strike="noStrike">
-              <a:solidFill>
-                <a:schemeClr val="dk1"/>
-              </a:solidFill>
-            </a:endParaRPr>
-          </a:p>
-          <a:p>
-            <a:pPr indent="0" lvl="0" marL="0" marR="0" rtl="0" algn="l">
-              <a:lnSpc>
-                <a:spcPct val="112000"/>
-              </a:lnSpc>
-              <a:spcBef>
-                <a:spcPts val="0"/>
-              </a:spcBef>
-              <a:spcAft>
-                <a:spcPts val="0"/>
-              </a:spcAft>
-              <a:buClr>
-                <a:srgbClr val="3A3A3A"/>
-              </a:buClr>
-              <a:buSzPts val="1500"/>
-              <a:buFont typeface="Arial"/>
-              <a:buNone/>
-            </a:pPr>
-            <a:r>
-              <a:rPr i="0" lang="en-US" sz="1700" u="none" cap="none" strike="noStrike">
-                <a:solidFill>
-                  <a:schemeClr val="dk1"/>
-                </a:solidFill>
-              </a:rPr>
-              <a:t>Landscape becomes 66% stabilising — the oncogenic regime; a ~3.4% MYCN-driven subpopulation reaches 81%.</a:t>
-            </a:r>
-            <a:endParaRPr i="0" sz="1700" u="none" cap="none" strike="noStrike">
-              <a:solidFill>
-                <a:schemeClr val="dk1"/>
-              </a:solidFill>
-            </a:endParaRPr>
-          </a:p>
-          <a:p>
-            <a:pPr indent="0" lvl="0" marL="0" marR="0" rtl="0" algn="l">
-              <a:lnSpc>
-                <a:spcPct val="112000"/>
-              </a:lnSpc>
-              <a:spcBef>
-                <a:spcPts val="0"/>
-              </a:spcBef>
-              <a:spcAft>
-                <a:spcPts val="0"/>
-              </a:spcAft>
-              <a:buClr>
-                <a:srgbClr val="3A3A3A"/>
-              </a:buClr>
-              <a:buSzPts val="1500"/>
-              <a:buFont typeface="Arial"/>
-              <a:buNone/>
-            </a:pPr>
-            <a:r>
-              <a:t/>
-            </a:r>
-            <a:endParaRPr sz="1700">
-              <a:solidFill>
-                <a:schemeClr val="dk1"/>
-              </a:solidFill>
-            </a:endParaRPr>
-          </a:p>
-          <a:p>
-            <a:pPr indent="0" lvl="0" marL="0" marR="0" rtl="0" algn="l">
-              <a:lnSpc>
-                <a:spcPct val="112000"/>
-              </a:lnSpc>
-              <a:spcBef>
-                <a:spcPts val="0"/>
-              </a:spcBef>
-              <a:spcAft>
-                <a:spcPts val="0"/>
-              </a:spcAft>
-              <a:buClr>
-                <a:srgbClr val="3A3A3A"/>
-              </a:buClr>
-              <a:buSzPts val="1500"/>
-              <a:buFont typeface="Arial"/>
-              <a:buNone/>
-            </a:pPr>
-            <a:r>
-              <a:rPr b="1" lang="en-US" sz="1700">
-                <a:solidFill>
-                  <a:schemeClr val="dk1"/>
-                </a:solidFill>
-              </a:rPr>
-              <a:t>Top stabilizing hubs:</a:t>
-            </a:r>
-            <a:r>
-              <a:rPr lang="en-US" sz="1700">
-                <a:solidFill>
-                  <a:schemeClr val="dk1"/>
-                </a:solidFill>
-              </a:rPr>
-              <a:t> HNRNPA2B1, PABPC1 (known cancer dependencies). Destabilizing minority: ZFP36 / TTP — AU-rich-element decay factors suppressed in cancer </a:t>
-            </a:r>
-            <a:endParaRPr sz="1700">
-              <a:solidFill>
-                <a:schemeClr val="dk1"/>
-              </a:solidFill>
-            </a:endParaRPr>
-          </a:p>
-        </p:txBody>
-      </p:sp>
-      <p:sp>
-        <p:nvSpPr>
-          <p:cNvPr id="230" name="Google Shape;230;p20"/>
-          <p:cNvSpPr/>
-          <p:nvPr/>
-        </p:nvSpPr>
-        <p:spPr>
-          <a:xfrm>
-            <a:off x="6336792" y="2084832"/>
-            <a:ext cx="5477256" cy="3282696"/>
-          </a:xfrm>
-          <a:prstGeom prst="roundRect">
-            <a:avLst>
-              <a:gd fmla="val 2228" name="adj"/>
-            </a:avLst>
-          </a:prstGeom>
-          <a:solidFill>
-            <a:srgbClr val="FFFFFF"/>
-          </a:solidFill>
-          <a:ln cap="flat" cmpd="sng" w="12700">
-            <a:solidFill>
-              <a:srgbClr val="BBBBBB"/>
-            </a:solidFill>
-            <a:prstDash val="solid"/>
-            <a:round/>
-            <a:headEnd len="sm" w="sm" type="none"/>
-            <a:tailEnd len="sm" w="sm" type="none"/>
-          </a:ln>
-          <a:effectLst>
-            <a:outerShdw blurRad="88900" rotWithShape="0" algn="bl" dir="5400000" dist="25400">
-              <a:srgbClr val="000000">
-                <a:alpha val="18039"/>
-              </a:srgbClr>
-            </a:outerShdw>
-          </a:effectLst>
-        </p:spPr>
-        <p:txBody>
-          <a:bodyPr anchorCtr="0" anchor="ctr" bIns="91425" lIns="91425" spcFirstLastPara="1" rIns="91425" wrap="square" tIns="91425">
-            <a:noAutofit/>
-          </a:bodyPr>
-          <a:lstStyle/>
-          <a:p>
-            <a:pPr indent="0" lvl="0" marL="0" rtl="0" algn="l">
-              <a:spcBef>
-                <a:spcPts val="0"/>
-              </a:spcBef>
-              <a:spcAft>
-                <a:spcPts val="0"/>
-              </a:spcAft>
-              <a:buNone/>
-            </a:pPr>
-            <a:r>
-              <a:t/>
-            </a:r>
-            <a:endParaRPr/>
-          </a:p>
-        </p:txBody>
-      </p:sp>
-      <p:pic>
-        <p:nvPicPr>
-          <p:cNvPr descr="figs/gen_flip.png" id="231" name="Google Shape;231;p20"/>
-          <p:cNvPicPr preferRelativeResize="0"/>
-          <p:nvPr/>
-        </p:nvPicPr>
-        <p:blipFill rotWithShape="1">
-          <a:blip r:embed="rId3">
-            <a:alphaModFix/>
-          </a:blip>
-          <a:srcRect b="0" l="0" r="0" t="0"/>
-          <a:stretch/>
-        </p:blipFill>
-        <p:spPr>
-          <a:xfrm>
-            <a:off x="6446520" y="2194560"/>
-            <a:ext cx="5257798" cy="3063240"/>
-          </a:xfrm>
-          <a:prstGeom prst="rect">
-            <a:avLst/>
-          </a:prstGeom>
-          <a:noFill/>
-          <a:ln>
-            <a:noFill/>
-          </a:ln>
         </p:spPr>
       </p:pic>
     </p:spTree>
@@ -9771,91 +8995,7 @@
 </p:sld>
 </file>
 
-<file path=ppt/slides/slide26.xml><?xml version="1.0" encoding="utf-8"?>
-<p:sld xmlns:a="http://schemas.openxmlformats.org/drawingml/2006/main" xmlns:p="http://schemas.openxmlformats.org/presentationml/2006/main" xmlns:r="http://schemas.openxmlformats.org/officeDocument/2006/relationships">
-  <p:cSld>
-    <p:bg>
-      <p:bgPr>
-        <a:solidFill>
-          <a:srgbClr val="FFFFFF"/>
-        </a:solidFill>
-        <a:effectLst/>
-      </p:bgPr>
-    </p:bg>
-    <p:spTree>
-      <p:nvGrpSpPr>
-        <p:cNvPr id="1" name=""/>
-        <p:cNvGrpSpPr/>
-        <p:nvPr/>
-      </p:nvGrpSpPr>
-      <p:grpSpPr/>
-      <p:pic>
-        <p:nvPicPr>
-          <p:cNvPr id="2" name="Picture 1" descr="fig_depmap_essentials.png"/>
-          <p:cNvPicPr>
-            <a:picLocks noChangeAspect="1"/>
-          </p:cNvPicPr>
-          <p:nvPr/>
-        </p:nvPicPr>
-        <p:blipFill>
-          <a:blip r:embed="rId2"/>
-          <a:stretch>
-            <a:fillRect/>
-          </a:stretch>
-        </p:blipFill>
-        <p:spPr>
-          <a:xfrm>
-            <a:off x="914400" y="205740"/>
-            <a:ext cx="10363200" cy="5932170"/>
-          </a:xfrm>
-          <a:prstGeom prst="rect">
-            <a:avLst/>
-          </a:prstGeom>
-        </p:spPr>
-      </p:pic>
-      <p:sp>
-        <p:nvSpPr>
-          <p:cNvPr id="3" name="TextBox 2"/>
-          <p:cNvSpPr txBox="1"/>
-          <p:nvPr/>
-        </p:nvSpPr>
-        <p:spPr>
-          <a:xfrm>
-            <a:off x="609600" y="6206490"/>
-            <a:ext cx="10972800" cy="548640"/>
-          </a:xfrm>
-          <a:prstGeom prst="rect">
-            <a:avLst/>
-          </a:prstGeom>
-          <a:noFill/>
-        </p:spPr>
-        <p:txBody>
-          <a:bodyPr wrap="square">
-            <a:spAutoFit/>
-          </a:bodyPr>
-          <a:lstStyle/>
-          <a:p>
-            <a:pPr algn="ctr"/>
-            <a:r>
-              <a:rPr sz="1300">
-                <a:solidFill>
-                  <a:srgbClr val="444444"/>
-                </a:solidFill>
-              </a:rPr>
-              <a:t>Hub RBPs identified by scPTR are significantly more essential in DepMap CRISPR screens (p=6.4×10⁻⁵).</a:t>
-            </a:r>
-          </a:p>
-        </p:txBody>
-      </p:sp>
-    </p:spTree>
-  </p:cSld>
-  <p:clrMapOvr>
-    <a:masterClrMapping/>
-  </p:clrMapOvr>
-</p:sld>
-</file>
-
-<file path=ppt/slides/slide27.xml><?xml version="1.0" encoding="utf-8"?>
+<file path=ppt/slides/slide21.xml><?xml version="1.0" encoding="utf-8"?>
 <p:sld xmlns:a="http://schemas.openxmlformats.org/drawingml/2006/main" xmlns:r="http://schemas.openxmlformats.org/officeDocument/2006/relationships" xmlns:mc="http://schemas.openxmlformats.org/markup-compatibility/2006" xmlns:mv="urn:schemas-microsoft-com:mac:vml" xmlns:p="http://schemas.openxmlformats.org/presentationml/2006/main" xmlns:c="http://schemas.openxmlformats.org/drawingml/2006/chart" xmlns:dgm="http://schemas.openxmlformats.org/drawingml/2006/diagram" xmlns:o="urn:schemas-microsoft-com:office:office" xmlns:v="urn:schemas-microsoft-com:vml" xmlns:pvml="urn:schemas-microsoft-com:office:powerpoint" xmlns:com="http://schemas.openxmlformats.org/drawingml/2006/compatibility" xmlns:p14="http://schemas.microsoft.com/office/powerpoint/2010/main" xmlns:p15="http://schemas.microsoft.com/office/powerpoint/2012/main" xmlns:ahyp="http://schemas.microsoft.com/office/drawing/2018/hyperlinkcolor">
   <p:cSld>
     <p:bg>
@@ -11686,7 +10826,7 @@
 </p:sld>
 </file>
 
-<file path=ppt/slides/slide29.xml><?xml version="1.0" encoding="utf-8"?>
+<file path=ppt/slides/slide22.xml><?xml version="1.0" encoding="utf-8"?>
 <p:sld xmlns:a="http://schemas.openxmlformats.org/drawingml/2006/main" xmlns:r="http://schemas.openxmlformats.org/officeDocument/2006/relationships" xmlns:mc="http://schemas.openxmlformats.org/markup-compatibility/2006" xmlns:mv="urn:schemas-microsoft-com:mac:vml" xmlns:p="http://schemas.openxmlformats.org/presentationml/2006/main" xmlns:c="http://schemas.openxmlformats.org/drawingml/2006/chart" xmlns:dgm="http://schemas.openxmlformats.org/drawingml/2006/diagram" xmlns:o="urn:schemas-microsoft-com:office:office" xmlns:v="urn:schemas-microsoft-com:vml" xmlns:pvml="urn:schemas-microsoft-com:office:powerpoint" xmlns:com="http://schemas.openxmlformats.org/drawingml/2006/compatibility" xmlns:p14="http://schemas.microsoft.com/office/powerpoint/2010/main" xmlns:p15="http://schemas.microsoft.com/office/powerpoint/2012/main" xmlns:ahyp="http://schemas.microsoft.com/office/drawing/2018/hyperlinkcolor">
   <p:cSld>
     <p:spTree>
@@ -11731,6 +10871,1115 @@
           </a:ln>
         </p:spPr>
       </p:pic>
+    </p:spTree>
+  </p:cSld>
+  <p:clrMapOvr>
+    <a:masterClrMapping/>
+  </p:clrMapOvr>
+</p:sld>
+</file>
+
+<file path=ppt/slides/slide23.xml><?xml version="1.0" encoding="utf-8"?>
+<p:sld xmlns:a="http://schemas.openxmlformats.org/drawingml/2006/main" xmlns:r="http://schemas.openxmlformats.org/officeDocument/2006/relationships" xmlns:mc="http://schemas.openxmlformats.org/markup-compatibility/2006" xmlns:mv="urn:schemas-microsoft-com:mac:vml" xmlns:p="http://schemas.openxmlformats.org/presentationml/2006/main" xmlns:c="http://schemas.openxmlformats.org/drawingml/2006/chart" xmlns:dgm="http://schemas.openxmlformats.org/drawingml/2006/diagram" xmlns:o="urn:schemas-microsoft-com:office:office" xmlns:v="urn:schemas-microsoft-com:vml" xmlns:pvml="urn:schemas-microsoft-com:office:powerpoint" xmlns:com="http://schemas.openxmlformats.org/drawingml/2006/compatibility" xmlns:p14="http://schemas.microsoft.com/office/powerpoint/2010/main" xmlns:p15="http://schemas.microsoft.com/office/powerpoint/2012/main" xmlns:ahyp="http://schemas.microsoft.com/office/drawing/2018/hyperlinkcolor">
+  <p:cSld>
+    <p:bg>
+      <p:bgPr>
+        <a:solidFill>
+          <a:srgbClr val="FFFFFF"/>
+        </a:solidFill>
+      </p:bgPr>
+    </p:bg>
+    <p:spTree>
+      <p:nvGrpSpPr>
+        <p:cNvPr id="302" name="Shape 302"/>
+        <p:cNvGrpSpPr/>
+        <p:nvPr/>
+      </p:nvGrpSpPr>
+      <p:grpSpPr>
+        <a:xfrm>
+          <a:off x="0" y="0"/>
+          <a:ext cx="0" cy="0"/>
+          <a:chOff x="0" y="0"/>
+          <a:chExt cx="0" cy="0"/>
+        </a:xfrm>
+      </p:grpSpPr>
+      <p:sp>
+        <p:nvSpPr>
+          <p:cNvPr id="303" name="Google Shape;303;p24"/>
+          <p:cNvSpPr/>
+          <p:nvPr/>
+        </p:nvSpPr>
+        <p:spPr>
+          <a:xfrm>
+            <a:off x="548640" y="457200"/>
+            <a:ext cx="11064240" cy="868680"/>
+          </a:xfrm>
+          <a:prstGeom prst="rect">
+            <a:avLst/>
+          </a:prstGeom>
+          <a:noFill/>
+          <a:ln>
+            <a:noFill/>
+          </a:ln>
+        </p:spPr>
+        <p:txBody>
+          <a:bodyPr anchorCtr="0" anchor="t" bIns="0" lIns="0" spcFirstLastPara="1" rIns="0" wrap="square" tIns="0">
+            <a:noAutofit/>
+          </a:bodyPr>
+          <a:lstStyle/>
+          <a:p>
+            <a:pPr indent="0" lvl="0" marL="0" marR="0" rtl="0" algn="l">
+              <a:spcBef>
+                <a:spcPts val="0"/>
+              </a:spcBef>
+              <a:spcAft>
+                <a:spcPts val="0"/>
+              </a:spcAft>
+              <a:buClr>
+                <a:srgbClr val="111111"/>
+              </a:buClr>
+              <a:buSzPts val="3000"/>
+              <a:buFont typeface="Arial"/>
+              <a:buNone/>
+            </a:pPr>
+            <a:r>
+              <a:rPr b="1" i="0" lang="en-US" sz="3000" u="none" cap="none" strike="noStrike">
+                <a:solidFill>
+                  <a:srgbClr val="111111"/>
+                </a:solidFill>
+                <a:latin typeface="Arial"/>
+                <a:ea typeface="Arial"/>
+                <a:cs typeface="Arial"/>
+                <a:sym typeface="Arial"/>
+              </a:rPr>
+              <a:t>Discussion — results at a glance, and where this goes</a:t>
+            </a:r>
+            <a:endParaRPr b="0" i="0" sz="3000" u="none" cap="none" strike="noStrike">
+              <a:solidFill>
+                <a:schemeClr val="dk1"/>
+              </a:solidFill>
+              <a:latin typeface="Calibri"/>
+              <a:ea typeface="Calibri"/>
+              <a:cs typeface="Calibri"/>
+              <a:sym typeface="Calibri"/>
+            </a:endParaRPr>
+          </a:p>
+        </p:txBody>
+      </p:sp>
+      <p:sp>
+        <p:nvSpPr>
+          <p:cNvPr id="304" name="Google Shape;304;p24"/>
+          <p:cNvSpPr/>
+          <p:nvPr/>
+        </p:nvSpPr>
+        <p:spPr>
+          <a:xfrm>
+            <a:off x="548650" y="1307600"/>
+            <a:ext cx="10707600" cy="4281900"/>
+          </a:xfrm>
+          <a:prstGeom prst="roundRect">
+            <a:avLst>
+              <a:gd fmla="val 2111" name="adj"/>
+            </a:avLst>
+          </a:prstGeom>
+          <a:solidFill>
+            <a:srgbClr val="FFFFFF"/>
+          </a:solidFill>
+          <a:ln cap="flat" cmpd="sng" w="12700">
+            <a:solidFill>
+              <a:srgbClr val="BBBBBB"/>
+            </a:solidFill>
+            <a:prstDash val="solid"/>
+            <a:round/>
+            <a:headEnd len="sm" w="sm" type="none"/>
+            <a:tailEnd len="sm" w="sm" type="none"/>
+          </a:ln>
+          <a:effectLst>
+            <a:outerShdw blurRad="88900" rotWithShape="0" algn="bl" dir="5400000" dist="25400">
+              <a:srgbClr val="000000">
+                <a:alpha val="18039"/>
+              </a:srgbClr>
+            </a:outerShdw>
+          </a:effectLst>
+        </p:spPr>
+        <p:txBody>
+          <a:bodyPr anchorCtr="0" anchor="ctr" bIns="91425" lIns="91425" spcFirstLastPara="1" rIns="91425" wrap="square" tIns="91425">
+            <a:noAutofit/>
+          </a:bodyPr>
+          <a:lstStyle/>
+          <a:p>
+            <a:pPr indent="0" lvl="0" marL="0" rtl="0" algn="l">
+              <a:spcBef>
+                <a:spcPts val="0"/>
+              </a:spcBef>
+              <a:spcAft>
+                <a:spcPts val="0"/>
+              </a:spcAft>
+              <a:buNone/>
+            </a:pPr>
+            <a:r>
+              <a:t/>
+            </a:r>
+            <a:endParaRPr/>
+          </a:p>
+        </p:txBody>
+      </p:sp>
+      <p:sp>
+        <p:nvSpPr>
+          <p:cNvPr id="305" name="Google Shape;305;p24"/>
+          <p:cNvSpPr/>
+          <p:nvPr/>
+        </p:nvSpPr>
+        <p:spPr>
+          <a:xfrm>
+            <a:off x="640075" y="5812850"/>
+            <a:ext cx="10927200" cy="359400"/>
+          </a:xfrm>
+          <a:prstGeom prst="rect">
+            <a:avLst/>
+          </a:prstGeom>
+          <a:noFill/>
+          <a:ln>
+            <a:noFill/>
+          </a:ln>
+        </p:spPr>
+        <p:txBody>
+          <a:bodyPr anchorCtr="0" anchor="t" bIns="0" lIns="0" spcFirstLastPara="1" rIns="0" wrap="square" tIns="0">
+            <a:noAutofit/>
+          </a:bodyPr>
+          <a:lstStyle/>
+          <a:p>
+            <a:pPr indent="0" lvl="0" marL="0" marR="0" rtl="0" algn="l">
+              <a:lnSpc>
+                <a:spcPct val="115000"/>
+              </a:lnSpc>
+              <a:spcBef>
+                <a:spcPts val="0"/>
+              </a:spcBef>
+              <a:spcAft>
+                <a:spcPts val="0"/>
+              </a:spcAft>
+              <a:buClr>
+                <a:srgbClr val="000000"/>
+              </a:buClr>
+              <a:buSzPts val="1500"/>
+              <a:buFont typeface="Arial"/>
+              <a:buNone/>
+            </a:pPr>
+            <a:r>
+              <a:rPr b="1" i="0" lang="en-US" sz="1500" u="none" cap="none" strike="noStrike">
+                <a:solidFill>
+                  <a:srgbClr val="000000"/>
+                </a:solidFill>
+                <a:latin typeface="Arial"/>
+                <a:ea typeface="Arial"/>
+                <a:cs typeface="Arial"/>
+                <a:sym typeface="Arial"/>
+              </a:rPr>
+              <a:t>Future directions:   </a:t>
+            </a:r>
+            <a:r>
+              <a:rPr b="0" i="0" lang="en-US" sz="1500" u="none" cap="none" strike="noStrike">
+                <a:solidFill>
+                  <a:srgbClr val="3A3A3A"/>
+                </a:solidFill>
+                <a:latin typeface="Arial"/>
+                <a:ea typeface="Arial"/>
+                <a:cs typeface="Arial"/>
+                <a:sym typeface="Arial"/>
+              </a:rPr>
+              <a:t>(1) non-steady-state extensions coupling adaptive smoothing with dynamical EM;  (2) eCLIP-informed priors to sharpen RBP-network edges;  (3) spatial transcriptomics — stability gradients across tumour–immune interfaces.</a:t>
+            </a:r>
+            <a:endParaRPr b="0" i="0" sz="1500" u="none" cap="none" strike="noStrike">
+              <a:solidFill>
+                <a:schemeClr val="dk1"/>
+              </a:solidFill>
+              <a:latin typeface="Calibri"/>
+              <a:ea typeface="Calibri"/>
+              <a:cs typeface="Calibri"/>
+              <a:sym typeface="Calibri"/>
+            </a:endParaRPr>
+          </a:p>
+        </p:txBody>
+      </p:sp>
+      <p:sp>
+        <p:nvSpPr>
+          <p:cNvPr id="306" name="FigBg_306"/>
+          <p:cNvSpPr>
+            <a:spLocks noGrp="1"/>
+          </p:cNvSpPr>
+          <p:nvPr/>
+        </p:nvSpPr>
+        <p:spPr>
+          <a:xfrm>
+            <a:off x="365760" y="1442132"/>
+            <a:ext cx="11460480" cy="4110895"/>
+          </a:xfrm>
+          <a:prstGeom prst="roundRect">
+            <a:avLst/>
+          </a:prstGeom>
+          <a:solidFill>
+            <a:srgbClr val="FFFFFF"/>
+          </a:solidFill>
+          <a:ln w="0">
+            <a:noFill/>
+          </a:ln>
+        </p:spPr>
+        <p:txBody>
+          <a:bodyPr/>
+          <a:lstStyle/>
+          <a:p/>
+        </p:txBody>
+      </p:sp>
+      <p:pic>
+        <p:nvPicPr>
+          <p:cNvPr id="307" name="Picture 306" descr="image.png"/>
+          <p:cNvPicPr>
+            <a:picLocks noChangeAspect="1"/>
+          </p:cNvPicPr>
+          <p:nvPr/>
+        </p:nvPicPr>
+        <p:blipFill>
+          <a:blip r:embed="rId4"/>
+          <a:stretch>
+            <a:fillRect/>
+          </a:stretch>
+        </p:blipFill>
+        <p:spPr>
+          <a:xfrm>
+            <a:off x="502920" y="1579292"/>
+            <a:ext cx="11186160" cy="3836575"/>
+          </a:xfrm>
+          <a:prstGeom prst="rect">
+            <a:avLst/>
+          </a:prstGeom>
+        </p:spPr>
+      </p:pic>
+    </p:spTree>
+  </p:cSld>
+  <p:clrMapOvr>
+    <a:masterClrMapping/>
+  </p:clrMapOvr>
+</p:sld>
+</file>
+
+<file path=ppt/slides/slide24.xml><?xml version="1.0" encoding="utf-8"?>
+<p:sld xmlns:a="http://schemas.openxmlformats.org/drawingml/2006/main" xmlns:r="http://schemas.openxmlformats.org/officeDocument/2006/relationships" xmlns:mc="http://schemas.openxmlformats.org/markup-compatibility/2006" xmlns:mv="urn:schemas-microsoft-com:mac:vml" xmlns:p="http://schemas.openxmlformats.org/presentationml/2006/main" xmlns:c="http://schemas.openxmlformats.org/drawingml/2006/chart" xmlns:dgm="http://schemas.openxmlformats.org/drawingml/2006/diagram" xmlns:o="urn:schemas-microsoft-com:office:office" xmlns:v="urn:schemas-microsoft-com:vml" xmlns:pvml="urn:schemas-microsoft-com:office:powerpoint" xmlns:com="http://schemas.openxmlformats.org/drawingml/2006/compatibility" xmlns:p14="http://schemas.microsoft.com/office/powerpoint/2010/main" xmlns:p15="http://schemas.microsoft.com/office/powerpoint/2012/main" xmlns:ahyp="http://schemas.microsoft.com/office/drawing/2018/hyperlinkcolor">
+  <p:cSld>
+    <p:bg>
+      <p:bgPr>
+        <a:solidFill>
+          <a:srgbClr val="FFFFFF"/>
+        </a:solidFill>
+      </p:bgPr>
+    </p:bg>
+    <p:spTree>
+      <p:nvGrpSpPr>
+        <p:cNvPr id="311" name="Shape 311"/>
+        <p:cNvGrpSpPr/>
+        <p:nvPr/>
+      </p:nvGrpSpPr>
+      <p:grpSpPr>
+        <a:xfrm>
+          <a:off x="0" y="0"/>
+          <a:ext cx="0" cy="0"/>
+          <a:chOff x="0" y="0"/>
+          <a:chExt cx="0" cy="0"/>
+        </a:xfrm>
+      </p:grpSpPr>
+      <p:sp>
+        <p:nvSpPr>
+          <p:cNvPr id="312" name="Google Shape;312;p25"/>
+          <p:cNvSpPr/>
+          <p:nvPr/>
+        </p:nvSpPr>
+        <p:spPr>
+          <a:xfrm>
+            <a:off x="548640" y="457200"/>
+            <a:ext cx="11064240" cy="868680"/>
+          </a:xfrm>
+          <a:prstGeom prst="rect">
+            <a:avLst/>
+          </a:prstGeom>
+          <a:noFill/>
+          <a:ln>
+            <a:noFill/>
+          </a:ln>
+        </p:spPr>
+        <p:txBody>
+          <a:bodyPr anchorCtr="0" anchor="t" bIns="0" lIns="0" spcFirstLastPara="1" rIns="0" wrap="square" tIns="0">
+            <a:noAutofit/>
+          </a:bodyPr>
+          <a:lstStyle/>
+          <a:p>
+            <a:pPr indent="0" lvl="0" marL="0" marR="0" rtl="0" algn="l">
+              <a:spcBef>
+                <a:spcPts val="0"/>
+              </a:spcBef>
+              <a:spcAft>
+                <a:spcPts val="0"/>
+              </a:spcAft>
+              <a:buClr>
+                <a:srgbClr val="111111"/>
+              </a:buClr>
+              <a:buSzPts val="3000"/>
+              <a:buFont typeface="Arial"/>
+              <a:buNone/>
+            </a:pPr>
+            <a:r>
+              <a:rPr b="1" i="0" lang="en-US" sz="3000" u="none" cap="none" strike="noStrike">
+                <a:solidFill>
+                  <a:srgbClr val="111111"/>
+                </a:solidFill>
+                <a:latin typeface="Arial"/>
+                <a:ea typeface="Arial"/>
+                <a:cs typeface="Arial"/>
+                <a:sym typeface="Arial"/>
+              </a:rPr>
+              <a:t>Degradation is now a measurable single-cell axis</a:t>
+            </a:r>
+            <a:endParaRPr b="0" i="0" sz="3000" u="none" cap="none" strike="noStrike">
+              <a:solidFill>
+                <a:schemeClr val="dk1"/>
+              </a:solidFill>
+              <a:latin typeface="Calibri"/>
+              <a:ea typeface="Calibri"/>
+              <a:cs typeface="Calibri"/>
+              <a:sym typeface="Calibri"/>
+            </a:endParaRPr>
+          </a:p>
+        </p:txBody>
+      </p:sp>
+      <p:sp>
+        <p:nvSpPr>
+          <p:cNvPr id="313" name="Google Shape;313;p25"/>
+          <p:cNvSpPr/>
+          <p:nvPr/>
+        </p:nvSpPr>
+        <p:spPr>
+          <a:xfrm>
+            <a:off x="640080" y="1837944"/>
+            <a:ext cx="237744" cy="237744"/>
+          </a:xfrm>
+          <a:prstGeom prst="ellipse">
+            <a:avLst/>
+          </a:prstGeom>
+          <a:solidFill>
+            <a:srgbClr val="000000"/>
+          </a:solidFill>
+          <a:ln>
+            <a:noFill/>
+          </a:ln>
+        </p:spPr>
+        <p:txBody>
+          <a:bodyPr anchorCtr="0" anchor="ctr" bIns="91425" lIns="91425" spcFirstLastPara="1" rIns="91425" wrap="square" tIns="91425">
+            <a:noAutofit/>
+          </a:bodyPr>
+          <a:lstStyle/>
+          <a:p>
+            <a:pPr indent="0" lvl="0" marL="0" rtl="0" algn="l">
+              <a:spcBef>
+                <a:spcPts val="0"/>
+              </a:spcBef>
+              <a:spcAft>
+                <a:spcPts val="0"/>
+              </a:spcAft>
+              <a:buNone/>
+            </a:pPr>
+            <a:r>
+              <a:t/>
+            </a:r>
+            <a:endParaRPr/>
+          </a:p>
+        </p:txBody>
+      </p:sp>
+      <p:sp>
+        <p:nvSpPr>
+          <p:cNvPr id="314" name="Google Shape;314;p25"/>
+          <p:cNvSpPr/>
+          <p:nvPr/>
+        </p:nvSpPr>
+        <p:spPr>
+          <a:xfrm>
+            <a:off x="1143000" y="1737360"/>
+            <a:ext cx="10424160" cy="457200"/>
+          </a:xfrm>
+          <a:prstGeom prst="rect">
+            <a:avLst/>
+          </a:prstGeom>
+          <a:noFill/>
+          <a:ln>
+            <a:noFill/>
+          </a:ln>
+        </p:spPr>
+        <p:txBody>
+          <a:bodyPr anchorCtr="0" anchor="ctr" bIns="0" lIns="0" spcFirstLastPara="1" rIns="0" wrap="square" tIns="0">
+            <a:noAutofit/>
+          </a:bodyPr>
+          <a:lstStyle/>
+          <a:p>
+            <a:pPr indent="0" lvl="0" marL="0" marR="0" rtl="0" algn="l">
+              <a:spcBef>
+                <a:spcPts val="0"/>
+              </a:spcBef>
+              <a:spcAft>
+                <a:spcPts val="0"/>
+              </a:spcAft>
+              <a:buClr>
+                <a:srgbClr val="111111"/>
+              </a:buClr>
+              <a:buSzPts val="1700"/>
+              <a:buFont typeface="Arial"/>
+              <a:buNone/>
+            </a:pPr>
+            <a:r>
+              <a:rPr b="0" i="0" lang="en-US" sz="1700" u="none" cap="none" strike="noStrike">
+                <a:solidFill>
+                  <a:srgbClr val="111111"/>
+                </a:solidFill>
+                <a:latin typeface="Arial"/>
+                <a:ea typeface="Arial"/>
+                <a:cs typeface="Arial"/>
+                <a:sym typeface="Arial"/>
+              </a:rPr>
+              <a:t>A biophysically-grounded, CPU-cheap per-cell γ estimator</a:t>
+            </a:r>
+            <a:endParaRPr b="0" i="0" sz="1700" u="none" cap="none" strike="noStrike">
+              <a:solidFill>
+                <a:schemeClr val="dk1"/>
+              </a:solidFill>
+              <a:latin typeface="Calibri"/>
+              <a:ea typeface="Calibri"/>
+              <a:cs typeface="Calibri"/>
+              <a:sym typeface="Calibri"/>
+            </a:endParaRPr>
+          </a:p>
+        </p:txBody>
+      </p:sp>
+      <p:sp>
+        <p:nvSpPr>
+          <p:cNvPr id="315" name="Google Shape;315;p25"/>
+          <p:cNvSpPr/>
+          <p:nvPr/>
+        </p:nvSpPr>
+        <p:spPr>
+          <a:xfrm>
+            <a:off x="640080" y="2368296"/>
+            <a:ext cx="237744" cy="237744"/>
+          </a:xfrm>
+          <a:prstGeom prst="ellipse">
+            <a:avLst/>
+          </a:prstGeom>
+          <a:solidFill>
+            <a:srgbClr val="000000"/>
+          </a:solidFill>
+          <a:ln>
+            <a:noFill/>
+          </a:ln>
+        </p:spPr>
+        <p:txBody>
+          <a:bodyPr anchorCtr="0" anchor="ctr" bIns="91425" lIns="91425" spcFirstLastPara="1" rIns="91425" wrap="square" tIns="91425">
+            <a:noAutofit/>
+          </a:bodyPr>
+          <a:lstStyle/>
+          <a:p>
+            <a:pPr indent="0" lvl="0" marL="0" rtl="0" algn="l">
+              <a:spcBef>
+                <a:spcPts val="0"/>
+              </a:spcBef>
+              <a:spcAft>
+                <a:spcPts val="0"/>
+              </a:spcAft>
+              <a:buNone/>
+            </a:pPr>
+            <a:r>
+              <a:t/>
+            </a:r>
+            <a:endParaRPr/>
+          </a:p>
+        </p:txBody>
+      </p:sp>
+      <p:sp>
+        <p:nvSpPr>
+          <p:cNvPr id="316" name="Google Shape;316;p25"/>
+          <p:cNvSpPr/>
+          <p:nvPr/>
+        </p:nvSpPr>
+        <p:spPr>
+          <a:xfrm>
+            <a:off x="1143000" y="2267712"/>
+            <a:ext cx="10424160" cy="457200"/>
+          </a:xfrm>
+          <a:prstGeom prst="rect">
+            <a:avLst/>
+          </a:prstGeom>
+          <a:noFill/>
+          <a:ln>
+            <a:noFill/>
+          </a:ln>
+        </p:spPr>
+        <p:txBody>
+          <a:bodyPr anchorCtr="0" anchor="ctr" bIns="0" lIns="0" spcFirstLastPara="1" rIns="0" wrap="square" tIns="0">
+            <a:noAutofit/>
+          </a:bodyPr>
+          <a:lstStyle/>
+          <a:p>
+            <a:pPr indent="0" lvl="0" marL="0" marR="0" rtl="0" algn="l">
+              <a:spcBef>
+                <a:spcPts val="0"/>
+              </a:spcBef>
+              <a:spcAft>
+                <a:spcPts val="0"/>
+              </a:spcAft>
+              <a:buClr>
+                <a:srgbClr val="111111"/>
+              </a:buClr>
+              <a:buSzPts val="1700"/>
+              <a:buFont typeface="Arial"/>
+              <a:buNone/>
+            </a:pPr>
+            <a:r>
+              <a:rPr b="0" i="0" lang="en-US" sz="1700" u="none" cap="none" strike="noStrike">
+                <a:solidFill>
+                  <a:srgbClr val="111111"/>
+                </a:solidFill>
+                <a:latin typeface="Arial"/>
+                <a:ea typeface="Arial"/>
+                <a:cs typeface="Arial"/>
+                <a:sym typeface="Arial"/>
+              </a:rPr>
+              <a:t>Dominates scVelo / velVI / UniTVelo on every half-life benchmark (ρ = −0.81)</a:t>
+            </a:r>
+            <a:endParaRPr b="0" i="0" sz="1700" u="none" cap="none" strike="noStrike">
+              <a:solidFill>
+                <a:schemeClr val="dk1"/>
+              </a:solidFill>
+              <a:latin typeface="Calibri"/>
+              <a:ea typeface="Calibri"/>
+              <a:cs typeface="Calibri"/>
+              <a:sym typeface="Calibri"/>
+            </a:endParaRPr>
+          </a:p>
+        </p:txBody>
+      </p:sp>
+      <p:sp>
+        <p:nvSpPr>
+          <p:cNvPr id="317" name="Google Shape;317;p25"/>
+          <p:cNvSpPr/>
+          <p:nvPr/>
+        </p:nvSpPr>
+        <p:spPr>
+          <a:xfrm>
+            <a:off x="640080" y="2898648"/>
+            <a:ext cx="237744" cy="237744"/>
+          </a:xfrm>
+          <a:prstGeom prst="ellipse">
+            <a:avLst/>
+          </a:prstGeom>
+          <a:solidFill>
+            <a:srgbClr val="000000"/>
+          </a:solidFill>
+          <a:ln>
+            <a:noFill/>
+          </a:ln>
+        </p:spPr>
+        <p:txBody>
+          <a:bodyPr anchorCtr="0" anchor="ctr" bIns="91425" lIns="91425" spcFirstLastPara="1" rIns="91425" wrap="square" tIns="91425">
+            <a:noAutofit/>
+          </a:bodyPr>
+          <a:lstStyle/>
+          <a:p>
+            <a:pPr indent="0" lvl="0" marL="0" rtl="0" algn="l">
+              <a:spcBef>
+                <a:spcPts val="0"/>
+              </a:spcBef>
+              <a:spcAft>
+                <a:spcPts val="0"/>
+              </a:spcAft>
+              <a:buNone/>
+            </a:pPr>
+            <a:r>
+              <a:t/>
+            </a:r>
+            <a:endParaRPr/>
+          </a:p>
+        </p:txBody>
+      </p:sp>
+      <p:sp>
+        <p:nvSpPr>
+          <p:cNvPr id="318" name="Google Shape;318;p25"/>
+          <p:cNvSpPr/>
+          <p:nvPr/>
+        </p:nvSpPr>
+        <p:spPr>
+          <a:xfrm>
+            <a:off x="1143000" y="2798064"/>
+            <a:ext cx="10424160" cy="457200"/>
+          </a:xfrm>
+          <a:prstGeom prst="rect">
+            <a:avLst/>
+          </a:prstGeom>
+          <a:noFill/>
+          <a:ln>
+            <a:noFill/>
+          </a:ln>
+        </p:spPr>
+        <p:txBody>
+          <a:bodyPr anchorCtr="0" anchor="ctr" bIns="0" lIns="0" spcFirstLastPara="1" rIns="0" wrap="square" tIns="0">
+            <a:noAutofit/>
+          </a:bodyPr>
+          <a:lstStyle/>
+          <a:p>
+            <a:pPr indent="0" lvl="0" marL="0" marR="0" rtl="0" algn="l">
+              <a:spcBef>
+                <a:spcPts val="0"/>
+              </a:spcBef>
+              <a:spcAft>
+                <a:spcPts val="0"/>
+              </a:spcAft>
+              <a:buClr>
+                <a:srgbClr val="111111"/>
+              </a:buClr>
+              <a:buSzPts val="1700"/>
+              <a:buFont typeface="Arial"/>
+              <a:buNone/>
+            </a:pPr>
+            <a:r>
+              <a:rPr b="0" i="0" lang="en-US" sz="1700" u="none" cap="none" strike="noStrike">
+                <a:solidFill>
+                  <a:srgbClr val="111111"/>
+                </a:solidFill>
+                <a:latin typeface="Arial"/>
+                <a:ea typeface="Arial"/>
+                <a:cs typeface="Arial"/>
+                <a:sym typeface="Arial"/>
+              </a:rPr>
+              <a:t>Unlocks hidden PT states, temporal precedence, and cancer RBP rewiring</a:t>
+            </a:r>
+            <a:endParaRPr b="0" i="0" sz="1700" u="none" cap="none" strike="noStrike">
+              <a:solidFill>
+                <a:schemeClr val="dk1"/>
+              </a:solidFill>
+              <a:latin typeface="Calibri"/>
+              <a:ea typeface="Calibri"/>
+              <a:cs typeface="Calibri"/>
+              <a:sym typeface="Calibri"/>
+            </a:endParaRPr>
+          </a:p>
+        </p:txBody>
+      </p:sp>
+      <p:sp>
+        <p:nvSpPr>
+          <p:cNvPr id="319" name="Google Shape;319;p25"/>
+          <p:cNvSpPr/>
+          <p:nvPr/>
+        </p:nvSpPr>
+        <p:spPr>
+          <a:xfrm>
+            <a:off x="640080" y="3429000"/>
+            <a:ext cx="237744" cy="237744"/>
+          </a:xfrm>
+          <a:prstGeom prst="ellipse">
+            <a:avLst/>
+          </a:prstGeom>
+          <a:solidFill>
+            <a:srgbClr val="000000"/>
+          </a:solidFill>
+          <a:ln>
+            <a:noFill/>
+          </a:ln>
+        </p:spPr>
+        <p:txBody>
+          <a:bodyPr anchorCtr="0" anchor="ctr" bIns="91425" lIns="91425" spcFirstLastPara="1" rIns="91425" wrap="square" tIns="91425">
+            <a:noAutofit/>
+          </a:bodyPr>
+          <a:lstStyle/>
+          <a:p>
+            <a:pPr indent="0" lvl="0" marL="0" rtl="0" algn="l">
+              <a:spcBef>
+                <a:spcPts val="0"/>
+              </a:spcBef>
+              <a:spcAft>
+                <a:spcPts val="0"/>
+              </a:spcAft>
+              <a:buNone/>
+            </a:pPr>
+            <a:r>
+              <a:t/>
+            </a:r>
+            <a:endParaRPr/>
+          </a:p>
+        </p:txBody>
+      </p:sp>
+      <p:sp>
+        <p:nvSpPr>
+          <p:cNvPr id="320" name="Google Shape;320;p25"/>
+          <p:cNvSpPr/>
+          <p:nvPr/>
+        </p:nvSpPr>
+        <p:spPr>
+          <a:xfrm>
+            <a:off x="1143000" y="3328416"/>
+            <a:ext cx="10424160" cy="457200"/>
+          </a:xfrm>
+          <a:prstGeom prst="rect">
+            <a:avLst/>
+          </a:prstGeom>
+          <a:noFill/>
+          <a:ln>
+            <a:noFill/>
+          </a:ln>
+        </p:spPr>
+        <p:txBody>
+          <a:bodyPr anchorCtr="0" anchor="ctr" bIns="0" lIns="0" spcFirstLastPara="1" rIns="0" wrap="square" tIns="0">
+            <a:noAutofit/>
+          </a:bodyPr>
+          <a:lstStyle/>
+          <a:p>
+            <a:pPr indent="0" lvl="0" marL="0" marR="0" rtl="0" algn="l">
+              <a:spcBef>
+                <a:spcPts val="0"/>
+              </a:spcBef>
+              <a:spcAft>
+                <a:spcPts val="0"/>
+              </a:spcAft>
+              <a:buClr>
+                <a:srgbClr val="111111"/>
+              </a:buClr>
+              <a:buSzPts val="1700"/>
+              <a:buFont typeface="Arial"/>
+              <a:buNone/>
+            </a:pPr>
+            <a:r>
+              <a:rPr b="0" i="0" lang="en-US" sz="1700" u="none" cap="none" strike="noStrike">
+                <a:solidFill>
+                  <a:srgbClr val="111111"/>
+                </a:solidFill>
+                <a:latin typeface="Arial"/>
+                <a:ea typeface="Arial"/>
+                <a:cs typeface="Arial"/>
+                <a:sym typeface="Arial"/>
+              </a:rPr>
+              <a:t>DeepPTR adds a generative model with an identifiable degradation latent</a:t>
+            </a:r>
+            <a:endParaRPr b="0" i="0" sz="1700" u="none" cap="none" strike="noStrike">
+              <a:solidFill>
+                <a:schemeClr val="dk1"/>
+              </a:solidFill>
+              <a:latin typeface="Calibri"/>
+              <a:ea typeface="Calibri"/>
+              <a:cs typeface="Calibri"/>
+              <a:sym typeface="Calibri"/>
+            </a:endParaRPr>
+          </a:p>
+        </p:txBody>
+      </p:sp>
+      <p:sp>
+        <p:nvSpPr>
+          <p:cNvPr id="321" name="Google Shape;321;p25"/>
+          <p:cNvSpPr/>
+          <p:nvPr/>
+        </p:nvSpPr>
+        <p:spPr>
+          <a:xfrm>
+            <a:off x="640080" y="3959352"/>
+            <a:ext cx="237744" cy="237744"/>
+          </a:xfrm>
+          <a:prstGeom prst="ellipse">
+            <a:avLst/>
+          </a:prstGeom>
+          <a:solidFill>
+            <a:srgbClr val="000000"/>
+          </a:solidFill>
+          <a:ln>
+            <a:noFill/>
+          </a:ln>
+        </p:spPr>
+        <p:txBody>
+          <a:bodyPr anchorCtr="0" anchor="ctr" bIns="91425" lIns="91425" spcFirstLastPara="1" rIns="91425" wrap="square" tIns="91425">
+            <a:noAutofit/>
+          </a:bodyPr>
+          <a:lstStyle/>
+          <a:p>
+            <a:pPr indent="0" lvl="0" marL="0" rtl="0" algn="l">
+              <a:spcBef>
+                <a:spcPts val="0"/>
+              </a:spcBef>
+              <a:spcAft>
+                <a:spcPts val="0"/>
+              </a:spcAft>
+              <a:buNone/>
+            </a:pPr>
+            <a:r>
+              <a:t/>
+            </a:r>
+            <a:endParaRPr/>
+          </a:p>
+        </p:txBody>
+      </p:sp>
+      <p:sp>
+        <p:nvSpPr>
+          <p:cNvPr id="322" name="Google Shape;322;p25"/>
+          <p:cNvSpPr/>
+          <p:nvPr/>
+        </p:nvSpPr>
+        <p:spPr>
+          <a:xfrm>
+            <a:off x="1143000" y="3858768"/>
+            <a:ext cx="10424160" cy="457200"/>
+          </a:xfrm>
+          <a:prstGeom prst="rect">
+            <a:avLst/>
+          </a:prstGeom>
+          <a:noFill/>
+          <a:ln>
+            <a:noFill/>
+          </a:ln>
+        </p:spPr>
+        <p:txBody>
+          <a:bodyPr anchorCtr="0" anchor="ctr" bIns="0" lIns="0" spcFirstLastPara="1" rIns="0" wrap="square" tIns="0">
+            <a:noAutofit/>
+          </a:bodyPr>
+          <a:lstStyle/>
+          <a:p>
+            <a:pPr indent="0" lvl="0" marL="0" marR="0" rtl="0" algn="l">
+              <a:spcBef>
+                <a:spcPts val="0"/>
+              </a:spcBef>
+              <a:spcAft>
+                <a:spcPts val="0"/>
+              </a:spcAft>
+              <a:buClr>
+                <a:srgbClr val="111111"/>
+              </a:buClr>
+              <a:buSzPts val="1700"/>
+              <a:buFont typeface="Arial"/>
+              <a:buNone/>
+            </a:pPr>
+            <a:r>
+              <a:rPr b="0" i="0" lang="en-US" sz="1700" u="none" cap="none" strike="noStrike">
+                <a:solidFill>
+                  <a:srgbClr val="111111"/>
+                </a:solidFill>
+                <a:latin typeface="Arial"/>
+                <a:ea typeface="Arial"/>
+                <a:cs typeface="Arial"/>
+                <a:sym typeface="Arial"/>
+              </a:rPr>
+              <a:t>Open-source, pip-installable, scanpy/anndata-compatible (scptr.pp / scptr.tl API)</a:t>
+            </a:r>
+            <a:endParaRPr b="0" i="0" sz="1700" u="none" cap="none" strike="noStrike">
+              <a:solidFill>
+                <a:schemeClr val="dk1"/>
+              </a:solidFill>
+              <a:latin typeface="Calibri"/>
+              <a:ea typeface="Calibri"/>
+              <a:cs typeface="Calibri"/>
+              <a:sym typeface="Calibri"/>
+            </a:endParaRPr>
+          </a:p>
+        </p:txBody>
+      </p:sp>
+      <p:sp>
+        <p:nvSpPr>
+          <p:cNvPr id="323" name="Google Shape;323;p25"/>
+          <p:cNvSpPr/>
+          <p:nvPr/>
+        </p:nvSpPr>
+        <p:spPr>
+          <a:xfrm>
+            <a:off x="658368" y="4526280"/>
+            <a:ext cx="10607040" cy="365760"/>
+          </a:xfrm>
+          <a:prstGeom prst="rect">
+            <a:avLst/>
+          </a:prstGeom>
+          <a:noFill/>
+          <a:ln>
+            <a:noFill/>
+          </a:ln>
+        </p:spPr>
+        <p:txBody>
+          <a:bodyPr anchorCtr="0" anchor="ctr" bIns="0" lIns="0" spcFirstLastPara="1" rIns="0" wrap="square" tIns="0">
+            <a:noAutofit/>
+          </a:bodyPr>
+          <a:lstStyle/>
+          <a:p>
+            <a:pPr indent="0" lvl="0" marL="0" marR="0" rtl="0" algn="l">
+              <a:spcBef>
+                <a:spcPts val="0"/>
+              </a:spcBef>
+              <a:spcAft>
+                <a:spcPts val="0"/>
+              </a:spcAft>
+              <a:buClr>
+                <a:srgbClr val="000000"/>
+              </a:buClr>
+              <a:buSzPts val="1450"/>
+              <a:buFont typeface="Arial"/>
+              <a:buNone/>
+            </a:pPr>
+            <a:r>
+              <a:rPr b="1" i="0" lang="en-US" sz="1450" u="none" cap="none" strike="noStrike">
+                <a:solidFill>
+                  <a:srgbClr val="000000"/>
+                </a:solidFill>
+                <a:latin typeface="Arial"/>
+                <a:ea typeface="Arial"/>
+                <a:cs typeface="Arial"/>
+                <a:sym typeface="Arial"/>
+              </a:rPr>
+              <a:t>Code, data &amp; reproducibility notebooks:  </a:t>
+            </a:r>
+            <a:r>
+              <a:rPr b="0" i="0" lang="en-US" sz="1450" u="none" cap="none" strike="noStrike">
+                <a:solidFill>
+                  <a:srgbClr val="111111"/>
+                </a:solidFill>
+                <a:latin typeface="Arial"/>
+                <a:ea typeface="Arial"/>
+                <a:cs typeface="Arial"/>
+                <a:sym typeface="Arial"/>
+              </a:rPr>
+              <a:t>huggingface.co/bryan7264/scPTR</a:t>
+            </a:r>
+            <a:endParaRPr b="0" i="0" sz="1450" u="none" cap="none" strike="noStrike">
+              <a:solidFill>
+                <a:schemeClr val="dk1"/>
+              </a:solidFill>
+              <a:latin typeface="Calibri"/>
+              <a:ea typeface="Calibri"/>
+              <a:cs typeface="Calibri"/>
+              <a:sym typeface="Calibri"/>
+            </a:endParaRPr>
+          </a:p>
+        </p:txBody>
+      </p:sp>
+      <p:sp>
+        <p:nvSpPr>
+          <p:cNvPr id="324" name="Google Shape;324;p25"/>
+          <p:cNvSpPr/>
+          <p:nvPr/>
+        </p:nvSpPr>
+        <p:spPr>
+          <a:xfrm>
+            <a:off x="640080" y="5029200"/>
+            <a:ext cx="10881360" cy="1051560"/>
+          </a:xfrm>
+          <a:prstGeom prst="roundRect">
+            <a:avLst>
+              <a:gd fmla="val 7826" name="adj"/>
+            </a:avLst>
+          </a:prstGeom>
+          <a:solidFill>
+            <a:srgbClr val="F2F2F2"/>
+          </a:solidFill>
+          <a:ln cap="flat" cmpd="sng" w="12700">
+            <a:solidFill>
+              <a:srgbClr val="BBBBBB"/>
+            </a:solidFill>
+            <a:prstDash val="solid"/>
+            <a:round/>
+            <a:headEnd len="sm" w="sm" type="none"/>
+            <a:tailEnd len="sm" w="sm" type="none"/>
+          </a:ln>
+        </p:spPr>
+        <p:txBody>
+          <a:bodyPr anchorCtr="0" anchor="ctr" bIns="91425" lIns="91425" spcFirstLastPara="1" rIns="91425" wrap="square" tIns="91425">
+            <a:noAutofit/>
+          </a:bodyPr>
+          <a:lstStyle/>
+          <a:p>
+            <a:pPr indent="0" lvl="0" marL="0" rtl="0" algn="l">
+              <a:spcBef>
+                <a:spcPts val="0"/>
+              </a:spcBef>
+              <a:spcAft>
+                <a:spcPts val="0"/>
+              </a:spcAft>
+              <a:buNone/>
+            </a:pPr>
+            <a:r>
+              <a:t/>
+            </a:r>
+            <a:endParaRPr/>
+          </a:p>
+        </p:txBody>
+      </p:sp>
+      <p:sp>
+        <p:nvSpPr>
+          <p:cNvPr id="325" name="Google Shape;325;p25"/>
+          <p:cNvSpPr/>
+          <p:nvPr/>
+        </p:nvSpPr>
+        <p:spPr>
+          <a:xfrm>
+            <a:off x="914400" y="5166360"/>
+            <a:ext cx="10332720" cy="822960"/>
+          </a:xfrm>
+          <a:prstGeom prst="rect">
+            <a:avLst/>
+          </a:prstGeom>
+          <a:noFill/>
+          <a:ln>
+            <a:noFill/>
+          </a:ln>
+        </p:spPr>
+        <p:txBody>
+          <a:bodyPr anchorCtr="0" anchor="ctr" bIns="0" lIns="0" spcFirstLastPara="1" rIns="0" wrap="square" tIns="0">
+            <a:noAutofit/>
+          </a:bodyPr>
+          <a:lstStyle/>
+          <a:p>
+            <a:pPr indent="0" lvl="0" marL="0" marR="0" rtl="0" algn="l">
+              <a:lnSpc>
+                <a:spcPct val="105000"/>
+              </a:lnSpc>
+              <a:spcBef>
+                <a:spcPts val="0"/>
+              </a:spcBef>
+              <a:spcAft>
+                <a:spcPts val="0"/>
+              </a:spcAft>
+              <a:buClr>
+                <a:srgbClr val="000000"/>
+              </a:buClr>
+              <a:buSzPts val="1400"/>
+              <a:buFont typeface="Arial"/>
+              <a:buNone/>
+            </a:pPr>
+            <a:r>
+              <a:rPr b="1" i="0" lang="en-US" sz="1400" u="none" cap="none" strike="noStrike">
+                <a:solidFill>
+                  <a:srgbClr val="000000"/>
+                </a:solidFill>
+                <a:latin typeface="Arial"/>
+                <a:ea typeface="Arial"/>
+                <a:cs typeface="Arial"/>
+                <a:sym typeface="Arial"/>
+              </a:rPr>
+              <a:t>Limitations:  </a:t>
+            </a:r>
+            <a:r>
+              <a:rPr lang="en-US">
+                <a:solidFill>
+                  <a:srgbClr val="3A3A3A"/>
+                </a:solidFill>
+              </a:rPr>
+              <a:t>steady-state assumption biases fast transitions (~10% in simulations) · sparse chemistries (10x v2) underdetermine rare states — use 10x v3 / higher-depth · residual library-size confounding in RBP inference · cell-cycle bursts violate steady-state (masked, not modeled). </a:t>
+            </a:r>
+            <a:endParaRPr b="0" i="0" sz="1400" u="none" cap="none" strike="noStrike">
+              <a:solidFill>
+                <a:schemeClr val="dk1"/>
+              </a:solidFill>
+              <a:latin typeface="Calibri"/>
+              <a:ea typeface="Calibri"/>
+              <a:cs typeface="Calibri"/>
+              <a:sym typeface="Calibri"/>
+            </a:endParaRPr>
+          </a:p>
+        </p:txBody>
+      </p:sp>
     </p:spTree>
   </p:cSld>
   <p:clrMapOvr>
@@ -11881,1086 +12130,6 @@
 </p:sld>
 </file>
 
-<file path=ppt/slides/slide30.xml><?xml version="1.0" encoding="utf-8"?>
-<p:sld xmlns:a="http://schemas.openxmlformats.org/drawingml/2006/main" xmlns:r="http://schemas.openxmlformats.org/officeDocument/2006/relationships" xmlns:mc="http://schemas.openxmlformats.org/markup-compatibility/2006" xmlns:mv="urn:schemas-microsoft-com:mac:vml" xmlns:p="http://schemas.openxmlformats.org/presentationml/2006/main" xmlns:c="http://schemas.openxmlformats.org/drawingml/2006/chart" xmlns:dgm="http://schemas.openxmlformats.org/drawingml/2006/diagram" xmlns:o="urn:schemas-microsoft-com:office:office" xmlns:v="urn:schemas-microsoft-com:vml" xmlns:pvml="urn:schemas-microsoft-com:office:powerpoint" xmlns:com="http://schemas.openxmlformats.org/drawingml/2006/compatibility" xmlns:p14="http://schemas.microsoft.com/office/powerpoint/2010/main" xmlns:p15="http://schemas.microsoft.com/office/powerpoint/2012/main" xmlns:ahyp="http://schemas.microsoft.com/office/drawing/2018/hyperlinkcolor">
-  <p:cSld>
-    <p:bg>
-      <p:bgPr>
-        <a:solidFill>
-          <a:srgbClr val="FFFFFF"/>
-        </a:solidFill>
-      </p:bgPr>
-    </p:bg>
-    <p:spTree>
-      <p:nvGrpSpPr>
-        <p:cNvPr id="302" name="Shape 302"/>
-        <p:cNvGrpSpPr/>
-        <p:nvPr/>
-      </p:nvGrpSpPr>
-      <p:grpSpPr>
-        <a:xfrm>
-          <a:off x="0" y="0"/>
-          <a:ext cx="0" cy="0"/>
-          <a:chOff x="0" y="0"/>
-          <a:chExt cx="0" cy="0"/>
-        </a:xfrm>
-      </p:grpSpPr>
-      <p:sp>
-        <p:nvSpPr>
-          <p:cNvPr id="303" name="Google Shape;303;p24"/>
-          <p:cNvSpPr/>
-          <p:nvPr/>
-        </p:nvSpPr>
-        <p:spPr>
-          <a:xfrm>
-            <a:off x="548640" y="457200"/>
-            <a:ext cx="11064240" cy="868680"/>
-          </a:xfrm>
-          <a:prstGeom prst="rect">
-            <a:avLst/>
-          </a:prstGeom>
-          <a:noFill/>
-          <a:ln>
-            <a:noFill/>
-          </a:ln>
-        </p:spPr>
-        <p:txBody>
-          <a:bodyPr anchorCtr="0" anchor="t" bIns="0" lIns="0" spcFirstLastPara="1" rIns="0" wrap="square" tIns="0">
-            <a:noAutofit/>
-          </a:bodyPr>
-          <a:lstStyle/>
-          <a:p>
-            <a:pPr indent="0" lvl="0" marL="0" marR="0" rtl="0" algn="l">
-              <a:spcBef>
-                <a:spcPts val="0"/>
-              </a:spcBef>
-              <a:spcAft>
-                <a:spcPts val="0"/>
-              </a:spcAft>
-              <a:buClr>
-                <a:srgbClr val="111111"/>
-              </a:buClr>
-              <a:buSzPts val="3000"/>
-              <a:buFont typeface="Arial"/>
-              <a:buNone/>
-            </a:pPr>
-            <a:r>
-              <a:rPr b="1" i="0" lang="en-US" sz="3000" u="none" cap="none" strike="noStrike">
-                <a:solidFill>
-                  <a:srgbClr val="111111"/>
-                </a:solidFill>
-                <a:latin typeface="Arial"/>
-                <a:ea typeface="Arial"/>
-                <a:cs typeface="Arial"/>
-                <a:sym typeface="Arial"/>
-              </a:rPr>
-              <a:t>Discussion — results at a glance, and where this goes</a:t>
-            </a:r>
-            <a:endParaRPr b="0" i="0" sz="3000" u="none" cap="none" strike="noStrike">
-              <a:solidFill>
-                <a:schemeClr val="dk1"/>
-              </a:solidFill>
-              <a:latin typeface="Calibri"/>
-              <a:ea typeface="Calibri"/>
-              <a:cs typeface="Calibri"/>
-              <a:sym typeface="Calibri"/>
-            </a:endParaRPr>
-          </a:p>
-        </p:txBody>
-      </p:sp>
-      <p:sp>
-        <p:nvSpPr>
-          <p:cNvPr id="304" name="Google Shape;304;p24"/>
-          <p:cNvSpPr/>
-          <p:nvPr/>
-        </p:nvSpPr>
-        <p:spPr>
-          <a:xfrm>
-            <a:off x="548650" y="1307600"/>
-            <a:ext cx="10707600" cy="4281900"/>
-          </a:xfrm>
-          <a:prstGeom prst="roundRect">
-            <a:avLst>
-              <a:gd fmla="val 2111" name="adj"/>
-            </a:avLst>
-          </a:prstGeom>
-          <a:solidFill>
-            <a:srgbClr val="FFFFFF"/>
-          </a:solidFill>
-          <a:ln cap="flat" cmpd="sng" w="12700">
-            <a:solidFill>
-              <a:srgbClr val="BBBBBB"/>
-            </a:solidFill>
-            <a:prstDash val="solid"/>
-            <a:round/>
-            <a:headEnd len="sm" w="sm" type="none"/>
-            <a:tailEnd len="sm" w="sm" type="none"/>
-          </a:ln>
-          <a:effectLst>
-            <a:outerShdw blurRad="88900" rotWithShape="0" algn="bl" dir="5400000" dist="25400">
-              <a:srgbClr val="000000">
-                <a:alpha val="18039"/>
-              </a:srgbClr>
-            </a:outerShdw>
-          </a:effectLst>
-        </p:spPr>
-        <p:txBody>
-          <a:bodyPr anchorCtr="0" anchor="ctr" bIns="91425" lIns="91425" spcFirstLastPara="1" rIns="91425" wrap="square" tIns="91425">
-            <a:noAutofit/>
-          </a:bodyPr>
-          <a:lstStyle/>
-          <a:p>
-            <a:pPr indent="0" lvl="0" marL="0" rtl="0" algn="l">
-              <a:spcBef>
-                <a:spcPts val="0"/>
-              </a:spcBef>
-              <a:spcAft>
-                <a:spcPts val="0"/>
-              </a:spcAft>
-              <a:buNone/>
-            </a:pPr>
-            <a:r>
-              <a:t/>
-            </a:r>
-            <a:endParaRPr/>
-          </a:p>
-        </p:txBody>
-      </p:sp>
-      <p:sp>
-        <p:nvSpPr>
-          <p:cNvPr id="305" name="Google Shape;305;p24"/>
-          <p:cNvSpPr/>
-          <p:nvPr/>
-        </p:nvSpPr>
-        <p:spPr>
-          <a:xfrm>
-            <a:off x="640075" y="5812850"/>
-            <a:ext cx="10927200" cy="359400"/>
-          </a:xfrm>
-          <a:prstGeom prst="rect">
-            <a:avLst/>
-          </a:prstGeom>
-          <a:noFill/>
-          <a:ln>
-            <a:noFill/>
-          </a:ln>
-        </p:spPr>
-        <p:txBody>
-          <a:bodyPr anchorCtr="0" anchor="t" bIns="0" lIns="0" spcFirstLastPara="1" rIns="0" wrap="square" tIns="0">
-            <a:noAutofit/>
-          </a:bodyPr>
-          <a:lstStyle/>
-          <a:p>
-            <a:pPr indent="0" lvl="0" marL="0" marR="0" rtl="0" algn="l">
-              <a:lnSpc>
-                <a:spcPct val="115000"/>
-              </a:lnSpc>
-              <a:spcBef>
-                <a:spcPts val="0"/>
-              </a:spcBef>
-              <a:spcAft>
-                <a:spcPts val="0"/>
-              </a:spcAft>
-              <a:buClr>
-                <a:srgbClr val="000000"/>
-              </a:buClr>
-              <a:buSzPts val="1500"/>
-              <a:buFont typeface="Arial"/>
-              <a:buNone/>
-            </a:pPr>
-            <a:r>
-              <a:rPr b="1" i="0" lang="en-US" sz="1500" u="none" cap="none" strike="noStrike">
-                <a:solidFill>
-                  <a:srgbClr val="000000"/>
-                </a:solidFill>
-                <a:latin typeface="Arial"/>
-                <a:ea typeface="Arial"/>
-                <a:cs typeface="Arial"/>
-                <a:sym typeface="Arial"/>
-              </a:rPr>
-              <a:t>Future directions:   </a:t>
-            </a:r>
-            <a:r>
-              <a:rPr b="0" i="0" lang="en-US" sz="1500" u="none" cap="none" strike="noStrike">
-                <a:solidFill>
-                  <a:srgbClr val="3A3A3A"/>
-                </a:solidFill>
-                <a:latin typeface="Arial"/>
-                <a:ea typeface="Arial"/>
-                <a:cs typeface="Arial"/>
-                <a:sym typeface="Arial"/>
-              </a:rPr>
-              <a:t>(1) non-steady-state extensions coupling adaptive smoothing with dynamical EM;  (2) eCLIP-informed priors to sharpen RBP-network edges;  (3) spatial transcriptomics — stability gradients across tumour–immune interfaces.</a:t>
-            </a:r>
-            <a:endParaRPr b="0" i="0" sz="1500" u="none" cap="none" strike="noStrike">
-              <a:solidFill>
-                <a:schemeClr val="dk1"/>
-              </a:solidFill>
-              <a:latin typeface="Calibri"/>
-              <a:ea typeface="Calibri"/>
-              <a:cs typeface="Calibri"/>
-              <a:sym typeface="Calibri"/>
-            </a:endParaRPr>
-          </a:p>
-        </p:txBody>
-      </p:sp>
-      <p:pic>
-        <p:nvPicPr>
-          <p:cNvPr id="306" name="Picture 305" descr="fig_results_summary.png"/>
-          <p:cNvPicPr>
-            <a:picLocks noChangeAspect="1"/>
-          </p:cNvPicPr>
-          <p:nvPr/>
-        </p:nvPicPr>
-        <p:blipFill>
-          <a:blip r:embed="rId4"/>
-          <a:stretch>
-            <a:fillRect/>
-          </a:stretch>
-        </p:blipFill>
-        <p:spPr>
-          <a:xfrm>
-            <a:off x="609600" y="685800"/>
-            <a:ext cx="10972800" cy="5486400"/>
-          </a:xfrm>
-          <a:prstGeom prst="rect">
-            <a:avLst/>
-          </a:prstGeom>
-        </p:spPr>
-      </p:pic>
-    </p:spTree>
-  </p:cSld>
-  <p:clrMapOvr>
-    <a:masterClrMapping/>
-  </p:clrMapOvr>
-</p:sld>
-</file>
-
-<file path=ppt/slides/slide31.xml><?xml version="1.0" encoding="utf-8"?>
-<p:sld xmlns:a="http://schemas.openxmlformats.org/drawingml/2006/main" xmlns:r="http://schemas.openxmlformats.org/officeDocument/2006/relationships" xmlns:mc="http://schemas.openxmlformats.org/markup-compatibility/2006" xmlns:mv="urn:schemas-microsoft-com:mac:vml" xmlns:p="http://schemas.openxmlformats.org/presentationml/2006/main" xmlns:c="http://schemas.openxmlformats.org/drawingml/2006/chart" xmlns:dgm="http://schemas.openxmlformats.org/drawingml/2006/diagram" xmlns:o="urn:schemas-microsoft-com:office:office" xmlns:v="urn:schemas-microsoft-com:vml" xmlns:pvml="urn:schemas-microsoft-com:office:powerpoint" xmlns:com="http://schemas.openxmlformats.org/drawingml/2006/compatibility" xmlns:p14="http://schemas.microsoft.com/office/powerpoint/2010/main" xmlns:p15="http://schemas.microsoft.com/office/powerpoint/2012/main" xmlns:ahyp="http://schemas.microsoft.com/office/drawing/2018/hyperlinkcolor">
-  <p:cSld>
-    <p:bg>
-      <p:bgPr>
-        <a:solidFill>
-          <a:srgbClr val="FFFFFF"/>
-        </a:solidFill>
-      </p:bgPr>
-    </p:bg>
-    <p:spTree>
-      <p:nvGrpSpPr>
-        <p:cNvPr id="311" name="Shape 311"/>
-        <p:cNvGrpSpPr/>
-        <p:nvPr/>
-      </p:nvGrpSpPr>
-      <p:grpSpPr>
-        <a:xfrm>
-          <a:off x="0" y="0"/>
-          <a:ext cx="0" cy="0"/>
-          <a:chOff x="0" y="0"/>
-          <a:chExt cx="0" cy="0"/>
-        </a:xfrm>
-      </p:grpSpPr>
-      <p:sp>
-        <p:nvSpPr>
-          <p:cNvPr id="312" name="Google Shape;312;p25"/>
-          <p:cNvSpPr/>
-          <p:nvPr/>
-        </p:nvSpPr>
-        <p:spPr>
-          <a:xfrm>
-            <a:off x="548640" y="457200"/>
-            <a:ext cx="11064240" cy="868680"/>
-          </a:xfrm>
-          <a:prstGeom prst="rect">
-            <a:avLst/>
-          </a:prstGeom>
-          <a:noFill/>
-          <a:ln>
-            <a:noFill/>
-          </a:ln>
-        </p:spPr>
-        <p:txBody>
-          <a:bodyPr anchorCtr="0" anchor="t" bIns="0" lIns="0" spcFirstLastPara="1" rIns="0" wrap="square" tIns="0">
-            <a:noAutofit/>
-          </a:bodyPr>
-          <a:lstStyle/>
-          <a:p>
-            <a:pPr indent="0" lvl="0" marL="0" marR="0" rtl="0" algn="l">
-              <a:spcBef>
-                <a:spcPts val="0"/>
-              </a:spcBef>
-              <a:spcAft>
-                <a:spcPts val="0"/>
-              </a:spcAft>
-              <a:buClr>
-                <a:srgbClr val="111111"/>
-              </a:buClr>
-              <a:buSzPts val="3000"/>
-              <a:buFont typeface="Arial"/>
-              <a:buNone/>
-            </a:pPr>
-            <a:r>
-              <a:rPr b="1" i="0" lang="en-US" sz="3000" u="none" cap="none" strike="noStrike">
-                <a:solidFill>
-                  <a:srgbClr val="111111"/>
-                </a:solidFill>
-                <a:latin typeface="Arial"/>
-                <a:ea typeface="Arial"/>
-                <a:cs typeface="Arial"/>
-                <a:sym typeface="Arial"/>
-              </a:rPr>
-              <a:t>Degradation is now a measurable single-cell axis</a:t>
-            </a:r>
-            <a:endParaRPr b="0" i="0" sz="3000" u="none" cap="none" strike="noStrike">
-              <a:solidFill>
-                <a:schemeClr val="dk1"/>
-              </a:solidFill>
-              <a:latin typeface="Calibri"/>
-              <a:ea typeface="Calibri"/>
-              <a:cs typeface="Calibri"/>
-              <a:sym typeface="Calibri"/>
-            </a:endParaRPr>
-          </a:p>
-        </p:txBody>
-      </p:sp>
-      <p:sp>
-        <p:nvSpPr>
-          <p:cNvPr id="313" name="Google Shape;313;p25"/>
-          <p:cNvSpPr/>
-          <p:nvPr/>
-        </p:nvSpPr>
-        <p:spPr>
-          <a:xfrm>
-            <a:off x="640080" y="1837944"/>
-            <a:ext cx="237744" cy="237744"/>
-          </a:xfrm>
-          <a:prstGeom prst="ellipse">
-            <a:avLst/>
-          </a:prstGeom>
-          <a:solidFill>
-            <a:srgbClr val="000000"/>
-          </a:solidFill>
-          <a:ln>
-            <a:noFill/>
-          </a:ln>
-        </p:spPr>
-        <p:txBody>
-          <a:bodyPr anchorCtr="0" anchor="ctr" bIns="91425" lIns="91425" spcFirstLastPara="1" rIns="91425" wrap="square" tIns="91425">
-            <a:noAutofit/>
-          </a:bodyPr>
-          <a:lstStyle/>
-          <a:p>
-            <a:pPr indent="0" lvl="0" marL="0" rtl="0" algn="l">
-              <a:spcBef>
-                <a:spcPts val="0"/>
-              </a:spcBef>
-              <a:spcAft>
-                <a:spcPts val="0"/>
-              </a:spcAft>
-              <a:buNone/>
-            </a:pPr>
-            <a:r>
-              <a:t/>
-            </a:r>
-            <a:endParaRPr/>
-          </a:p>
-        </p:txBody>
-      </p:sp>
-      <p:sp>
-        <p:nvSpPr>
-          <p:cNvPr id="314" name="Google Shape;314;p25"/>
-          <p:cNvSpPr/>
-          <p:nvPr/>
-        </p:nvSpPr>
-        <p:spPr>
-          <a:xfrm>
-            <a:off x="1143000" y="1737360"/>
-            <a:ext cx="10424160" cy="457200"/>
-          </a:xfrm>
-          <a:prstGeom prst="rect">
-            <a:avLst/>
-          </a:prstGeom>
-          <a:noFill/>
-          <a:ln>
-            <a:noFill/>
-          </a:ln>
-        </p:spPr>
-        <p:txBody>
-          <a:bodyPr anchorCtr="0" anchor="ctr" bIns="0" lIns="0" spcFirstLastPara="1" rIns="0" wrap="square" tIns="0">
-            <a:noAutofit/>
-          </a:bodyPr>
-          <a:lstStyle/>
-          <a:p>
-            <a:pPr indent="0" lvl="0" marL="0" marR="0" rtl="0" algn="l">
-              <a:spcBef>
-                <a:spcPts val="0"/>
-              </a:spcBef>
-              <a:spcAft>
-                <a:spcPts val="0"/>
-              </a:spcAft>
-              <a:buClr>
-                <a:srgbClr val="111111"/>
-              </a:buClr>
-              <a:buSzPts val="1700"/>
-              <a:buFont typeface="Arial"/>
-              <a:buNone/>
-            </a:pPr>
-            <a:r>
-              <a:rPr b="0" i="0" lang="en-US" sz="1700" u="none" cap="none" strike="noStrike">
-                <a:solidFill>
-                  <a:srgbClr val="111111"/>
-                </a:solidFill>
-                <a:latin typeface="Arial"/>
-                <a:ea typeface="Arial"/>
-                <a:cs typeface="Arial"/>
-                <a:sym typeface="Arial"/>
-              </a:rPr>
-              <a:t>A biophysically-grounded, CPU-cheap per-cell γ estimator</a:t>
-            </a:r>
-            <a:endParaRPr b="0" i="0" sz="1700" u="none" cap="none" strike="noStrike">
-              <a:solidFill>
-                <a:schemeClr val="dk1"/>
-              </a:solidFill>
-              <a:latin typeface="Calibri"/>
-              <a:ea typeface="Calibri"/>
-              <a:cs typeface="Calibri"/>
-              <a:sym typeface="Calibri"/>
-            </a:endParaRPr>
-          </a:p>
-        </p:txBody>
-      </p:sp>
-      <p:sp>
-        <p:nvSpPr>
-          <p:cNvPr id="315" name="Google Shape;315;p25"/>
-          <p:cNvSpPr/>
-          <p:nvPr/>
-        </p:nvSpPr>
-        <p:spPr>
-          <a:xfrm>
-            <a:off x="640080" y="2368296"/>
-            <a:ext cx="237744" cy="237744"/>
-          </a:xfrm>
-          <a:prstGeom prst="ellipse">
-            <a:avLst/>
-          </a:prstGeom>
-          <a:solidFill>
-            <a:srgbClr val="000000"/>
-          </a:solidFill>
-          <a:ln>
-            <a:noFill/>
-          </a:ln>
-        </p:spPr>
-        <p:txBody>
-          <a:bodyPr anchorCtr="0" anchor="ctr" bIns="91425" lIns="91425" spcFirstLastPara="1" rIns="91425" wrap="square" tIns="91425">
-            <a:noAutofit/>
-          </a:bodyPr>
-          <a:lstStyle/>
-          <a:p>
-            <a:pPr indent="0" lvl="0" marL="0" rtl="0" algn="l">
-              <a:spcBef>
-                <a:spcPts val="0"/>
-              </a:spcBef>
-              <a:spcAft>
-                <a:spcPts val="0"/>
-              </a:spcAft>
-              <a:buNone/>
-            </a:pPr>
-            <a:r>
-              <a:t/>
-            </a:r>
-            <a:endParaRPr/>
-          </a:p>
-        </p:txBody>
-      </p:sp>
-      <p:sp>
-        <p:nvSpPr>
-          <p:cNvPr id="316" name="Google Shape;316;p25"/>
-          <p:cNvSpPr/>
-          <p:nvPr/>
-        </p:nvSpPr>
-        <p:spPr>
-          <a:xfrm>
-            <a:off x="1143000" y="2267712"/>
-            <a:ext cx="10424160" cy="457200"/>
-          </a:xfrm>
-          <a:prstGeom prst="rect">
-            <a:avLst/>
-          </a:prstGeom>
-          <a:noFill/>
-          <a:ln>
-            <a:noFill/>
-          </a:ln>
-        </p:spPr>
-        <p:txBody>
-          <a:bodyPr anchorCtr="0" anchor="ctr" bIns="0" lIns="0" spcFirstLastPara="1" rIns="0" wrap="square" tIns="0">
-            <a:noAutofit/>
-          </a:bodyPr>
-          <a:lstStyle/>
-          <a:p>
-            <a:pPr indent="0" lvl="0" marL="0" marR="0" rtl="0" algn="l">
-              <a:spcBef>
-                <a:spcPts val="0"/>
-              </a:spcBef>
-              <a:spcAft>
-                <a:spcPts val="0"/>
-              </a:spcAft>
-              <a:buClr>
-                <a:srgbClr val="111111"/>
-              </a:buClr>
-              <a:buSzPts val="1700"/>
-              <a:buFont typeface="Arial"/>
-              <a:buNone/>
-            </a:pPr>
-            <a:r>
-              <a:rPr b="0" i="0" lang="en-US" sz="1700" u="none" cap="none" strike="noStrike">
-                <a:solidFill>
-                  <a:srgbClr val="111111"/>
-                </a:solidFill>
-                <a:latin typeface="Arial"/>
-                <a:ea typeface="Arial"/>
-                <a:cs typeface="Arial"/>
-                <a:sym typeface="Arial"/>
-              </a:rPr>
-              <a:t>Dominates scVelo / velVI / UniTVelo on every half-life benchmark (ρ = −0.81)</a:t>
-            </a:r>
-            <a:endParaRPr b="0" i="0" sz="1700" u="none" cap="none" strike="noStrike">
-              <a:solidFill>
-                <a:schemeClr val="dk1"/>
-              </a:solidFill>
-              <a:latin typeface="Calibri"/>
-              <a:ea typeface="Calibri"/>
-              <a:cs typeface="Calibri"/>
-              <a:sym typeface="Calibri"/>
-            </a:endParaRPr>
-          </a:p>
-        </p:txBody>
-      </p:sp>
-      <p:sp>
-        <p:nvSpPr>
-          <p:cNvPr id="317" name="Google Shape;317;p25"/>
-          <p:cNvSpPr/>
-          <p:nvPr/>
-        </p:nvSpPr>
-        <p:spPr>
-          <a:xfrm>
-            <a:off x="640080" y="2898648"/>
-            <a:ext cx="237744" cy="237744"/>
-          </a:xfrm>
-          <a:prstGeom prst="ellipse">
-            <a:avLst/>
-          </a:prstGeom>
-          <a:solidFill>
-            <a:srgbClr val="000000"/>
-          </a:solidFill>
-          <a:ln>
-            <a:noFill/>
-          </a:ln>
-        </p:spPr>
-        <p:txBody>
-          <a:bodyPr anchorCtr="0" anchor="ctr" bIns="91425" lIns="91425" spcFirstLastPara="1" rIns="91425" wrap="square" tIns="91425">
-            <a:noAutofit/>
-          </a:bodyPr>
-          <a:lstStyle/>
-          <a:p>
-            <a:pPr indent="0" lvl="0" marL="0" rtl="0" algn="l">
-              <a:spcBef>
-                <a:spcPts val="0"/>
-              </a:spcBef>
-              <a:spcAft>
-                <a:spcPts val="0"/>
-              </a:spcAft>
-              <a:buNone/>
-            </a:pPr>
-            <a:r>
-              <a:t/>
-            </a:r>
-            <a:endParaRPr/>
-          </a:p>
-        </p:txBody>
-      </p:sp>
-      <p:sp>
-        <p:nvSpPr>
-          <p:cNvPr id="318" name="Google Shape;318;p25"/>
-          <p:cNvSpPr/>
-          <p:nvPr/>
-        </p:nvSpPr>
-        <p:spPr>
-          <a:xfrm>
-            <a:off x="1143000" y="2798064"/>
-            <a:ext cx="10424160" cy="457200"/>
-          </a:xfrm>
-          <a:prstGeom prst="rect">
-            <a:avLst/>
-          </a:prstGeom>
-          <a:noFill/>
-          <a:ln>
-            <a:noFill/>
-          </a:ln>
-        </p:spPr>
-        <p:txBody>
-          <a:bodyPr anchorCtr="0" anchor="ctr" bIns="0" lIns="0" spcFirstLastPara="1" rIns="0" wrap="square" tIns="0">
-            <a:noAutofit/>
-          </a:bodyPr>
-          <a:lstStyle/>
-          <a:p>
-            <a:pPr indent="0" lvl="0" marL="0" marR="0" rtl="0" algn="l">
-              <a:spcBef>
-                <a:spcPts val="0"/>
-              </a:spcBef>
-              <a:spcAft>
-                <a:spcPts val="0"/>
-              </a:spcAft>
-              <a:buClr>
-                <a:srgbClr val="111111"/>
-              </a:buClr>
-              <a:buSzPts val="1700"/>
-              <a:buFont typeface="Arial"/>
-              <a:buNone/>
-            </a:pPr>
-            <a:r>
-              <a:rPr b="0" i="0" lang="en-US" sz="1700" u="none" cap="none" strike="noStrike">
-                <a:solidFill>
-                  <a:srgbClr val="111111"/>
-                </a:solidFill>
-                <a:latin typeface="Arial"/>
-                <a:ea typeface="Arial"/>
-                <a:cs typeface="Arial"/>
-                <a:sym typeface="Arial"/>
-              </a:rPr>
-              <a:t>Unlocks hidden PT states, temporal precedence, and cancer RBP rewiring</a:t>
-            </a:r>
-            <a:endParaRPr b="0" i="0" sz="1700" u="none" cap="none" strike="noStrike">
-              <a:solidFill>
-                <a:schemeClr val="dk1"/>
-              </a:solidFill>
-              <a:latin typeface="Calibri"/>
-              <a:ea typeface="Calibri"/>
-              <a:cs typeface="Calibri"/>
-              <a:sym typeface="Calibri"/>
-            </a:endParaRPr>
-          </a:p>
-        </p:txBody>
-      </p:sp>
-      <p:sp>
-        <p:nvSpPr>
-          <p:cNvPr id="319" name="Google Shape;319;p25"/>
-          <p:cNvSpPr/>
-          <p:nvPr/>
-        </p:nvSpPr>
-        <p:spPr>
-          <a:xfrm>
-            <a:off x="640080" y="3429000"/>
-            <a:ext cx="237744" cy="237744"/>
-          </a:xfrm>
-          <a:prstGeom prst="ellipse">
-            <a:avLst/>
-          </a:prstGeom>
-          <a:solidFill>
-            <a:srgbClr val="000000"/>
-          </a:solidFill>
-          <a:ln>
-            <a:noFill/>
-          </a:ln>
-        </p:spPr>
-        <p:txBody>
-          <a:bodyPr anchorCtr="0" anchor="ctr" bIns="91425" lIns="91425" spcFirstLastPara="1" rIns="91425" wrap="square" tIns="91425">
-            <a:noAutofit/>
-          </a:bodyPr>
-          <a:lstStyle/>
-          <a:p>
-            <a:pPr indent="0" lvl="0" marL="0" rtl="0" algn="l">
-              <a:spcBef>
-                <a:spcPts val="0"/>
-              </a:spcBef>
-              <a:spcAft>
-                <a:spcPts val="0"/>
-              </a:spcAft>
-              <a:buNone/>
-            </a:pPr>
-            <a:r>
-              <a:t/>
-            </a:r>
-            <a:endParaRPr/>
-          </a:p>
-        </p:txBody>
-      </p:sp>
-      <p:sp>
-        <p:nvSpPr>
-          <p:cNvPr id="320" name="Google Shape;320;p25"/>
-          <p:cNvSpPr/>
-          <p:nvPr/>
-        </p:nvSpPr>
-        <p:spPr>
-          <a:xfrm>
-            <a:off x="1143000" y="3328416"/>
-            <a:ext cx="10424160" cy="457200"/>
-          </a:xfrm>
-          <a:prstGeom prst="rect">
-            <a:avLst/>
-          </a:prstGeom>
-          <a:noFill/>
-          <a:ln>
-            <a:noFill/>
-          </a:ln>
-        </p:spPr>
-        <p:txBody>
-          <a:bodyPr anchorCtr="0" anchor="ctr" bIns="0" lIns="0" spcFirstLastPara="1" rIns="0" wrap="square" tIns="0">
-            <a:noAutofit/>
-          </a:bodyPr>
-          <a:lstStyle/>
-          <a:p>
-            <a:pPr indent="0" lvl="0" marL="0" marR="0" rtl="0" algn="l">
-              <a:spcBef>
-                <a:spcPts val="0"/>
-              </a:spcBef>
-              <a:spcAft>
-                <a:spcPts val="0"/>
-              </a:spcAft>
-              <a:buClr>
-                <a:srgbClr val="111111"/>
-              </a:buClr>
-              <a:buSzPts val="1700"/>
-              <a:buFont typeface="Arial"/>
-              <a:buNone/>
-            </a:pPr>
-            <a:r>
-              <a:rPr b="0" i="0" lang="en-US" sz="1700" u="none" cap="none" strike="noStrike">
-                <a:solidFill>
-                  <a:srgbClr val="111111"/>
-                </a:solidFill>
-                <a:latin typeface="Arial"/>
-                <a:ea typeface="Arial"/>
-                <a:cs typeface="Arial"/>
-                <a:sym typeface="Arial"/>
-              </a:rPr>
-              <a:t>DeepPTR adds a generative model with an identifiable degradation latent</a:t>
-            </a:r>
-            <a:endParaRPr b="0" i="0" sz="1700" u="none" cap="none" strike="noStrike">
-              <a:solidFill>
-                <a:schemeClr val="dk1"/>
-              </a:solidFill>
-              <a:latin typeface="Calibri"/>
-              <a:ea typeface="Calibri"/>
-              <a:cs typeface="Calibri"/>
-              <a:sym typeface="Calibri"/>
-            </a:endParaRPr>
-          </a:p>
-        </p:txBody>
-      </p:sp>
-      <p:sp>
-        <p:nvSpPr>
-          <p:cNvPr id="321" name="Google Shape;321;p25"/>
-          <p:cNvSpPr/>
-          <p:nvPr/>
-        </p:nvSpPr>
-        <p:spPr>
-          <a:xfrm>
-            <a:off x="640080" y="3959352"/>
-            <a:ext cx="237744" cy="237744"/>
-          </a:xfrm>
-          <a:prstGeom prst="ellipse">
-            <a:avLst/>
-          </a:prstGeom>
-          <a:solidFill>
-            <a:srgbClr val="000000"/>
-          </a:solidFill>
-          <a:ln>
-            <a:noFill/>
-          </a:ln>
-        </p:spPr>
-        <p:txBody>
-          <a:bodyPr anchorCtr="0" anchor="ctr" bIns="91425" lIns="91425" spcFirstLastPara="1" rIns="91425" wrap="square" tIns="91425">
-            <a:noAutofit/>
-          </a:bodyPr>
-          <a:lstStyle/>
-          <a:p>
-            <a:pPr indent="0" lvl="0" marL="0" rtl="0" algn="l">
-              <a:spcBef>
-                <a:spcPts val="0"/>
-              </a:spcBef>
-              <a:spcAft>
-                <a:spcPts val="0"/>
-              </a:spcAft>
-              <a:buNone/>
-            </a:pPr>
-            <a:r>
-              <a:t/>
-            </a:r>
-            <a:endParaRPr/>
-          </a:p>
-        </p:txBody>
-      </p:sp>
-      <p:sp>
-        <p:nvSpPr>
-          <p:cNvPr id="322" name="Google Shape;322;p25"/>
-          <p:cNvSpPr/>
-          <p:nvPr/>
-        </p:nvSpPr>
-        <p:spPr>
-          <a:xfrm>
-            <a:off x="1143000" y="3858768"/>
-            <a:ext cx="10424160" cy="457200"/>
-          </a:xfrm>
-          <a:prstGeom prst="rect">
-            <a:avLst/>
-          </a:prstGeom>
-          <a:noFill/>
-          <a:ln>
-            <a:noFill/>
-          </a:ln>
-        </p:spPr>
-        <p:txBody>
-          <a:bodyPr anchorCtr="0" anchor="ctr" bIns="0" lIns="0" spcFirstLastPara="1" rIns="0" wrap="square" tIns="0">
-            <a:noAutofit/>
-          </a:bodyPr>
-          <a:lstStyle/>
-          <a:p>
-            <a:pPr indent="0" lvl="0" marL="0" marR="0" rtl="0" algn="l">
-              <a:spcBef>
-                <a:spcPts val="0"/>
-              </a:spcBef>
-              <a:spcAft>
-                <a:spcPts val="0"/>
-              </a:spcAft>
-              <a:buClr>
-                <a:srgbClr val="111111"/>
-              </a:buClr>
-              <a:buSzPts val="1700"/>
-              <a:buFont typeface="Arial"/>
-              <a:buNone/>
-            </a:pPr>
-            <a:r>
-              <a:rPr b="0" i="0" lang="en-US" sz="1700" u="none" cap="none" strike="noStrike">
-                <a:solidFill>
-                  <a:srgbClr val="111111"/>
-                </a:solidFill>
-                <a:latin typeface="Arial"/>
-                <a:ea typeface="Arial"/>
-                <a:cs typeface="Arial"/>
-                <a:sym typeface="Arial"/>
-              </a:rPr>
-              <a:t>Open-source, pip-installable, scanpy/anndata-compatible (scptr.pp / scptr.tl API)</a:t>
-            </a:r>
-            <a:endParaRPr b="0" i="0" sz="1700" u="none" cap="none" strike="noStrike">
-              <a:solidFill>
-                <a:schemeClr val="dk1"/>
-              </a:solidFill>
-              <a:latin typeface="Calibri"/>
-              <a:ea typeface="Calibri"/>
-              <a:cs typeface="Calibri"/>
-              <a:sym typeface="Calibri"/>
-            </a:endParaRPr>
-          </a:p>
-        </p:txBody>
-      </p:sp>
-      <p:sp>
-        <p:nvSpPr>
-          <p:cNvPr id="323" name="Google Shape;323;p25"/>
-          <p:cNvSpPr/>
-          <p:nvPr/>
-        </p:nvSpPr>
-        <p:spPr>
-          <a:xfrm>
-            <a:off x="658368" y="4526280"/>
-            <a:ext cx="10607040" cy="365760"/>
-          </a:xfrm>
-          <a:prstGeom prst="rect">
-            <a:avLst/>
-          </a:prstGeom>
-          <a:noFill/>
-          <a:ln>
-            <a:noFill/>
-          </a:ln>
-        </p:spPr>
-        <p:txBody>
-          <a:bodyPr anchorCtr="0" anchor="ctr" bIns="0" lIns="0" spcFirstLastPara="1" rIns="0" wrap="square" tIns="0">
-            <a:noAutofit/>
-          </a:bodyPr>
-          <a:lstStyle/>
-          <a:p>
-            <a:pPr indent="0" lvl="0" marL="0" marR="0" rtl="0" algn="l">
-              <a:spcBef>
-                <a:spcPts val="0"/>
-              </a:spcBef>
-              <a:spcAft>
-                <a:spcPts val="0"/>
-              </a:spcAft>
-              <a:buClr>
-                <a:srgbClr val="000000"/>
-              </a:buClr>
-              <a:buSzPts val="1450"/>
-              <a:buFont typeface="Arial"/>
-              <a:buNone/>
-            </a:pPr>
-            <a:r>
-              <a:rPr b="1" i="0" lang="en-US" sz="1450" u="none" cap="none" strike="noStrike">
-                <a:solidFill>
-                  <a:srgbClr val="000000"/>
-                </a:solidFill>
-                <a:latin typeface="Arial"/>
-                <a:ea typeface="Arial"/>
-                <a:cs typeface="Arial"/>
-                <a:sym typeface="Arial"/>
-              </a:rPr>
-              <a:t>Code, data &amp; reproducibility notebooks:  </a:t>
-            </a:r>
-            <a:r>
-              <a:rPr b="0" i="0" lang="en-US" sz="1450" u="none" cap="none" strike="noStrike">
-                <a:solidFill>
-                  <a:srgbClr val="111111"/>
-                </a:solidFill>
-                <a:latin typeface="Arial"/>
-                <a:ea typeface="Arial"/>
-                <a:cs typeface="Arial"/>
-                <a:sym typeface="Arial"/>
-              </a:rPr>
-              <a:t>huggingface.co/bryan7264/scPTR</a:t>
-            </a:r>
-            <a:endParaRPr b="0" i="0" sz="1450" u="none" cap="none" strike="noStrike">
-              <a:solidFill>
-                <a:schemeClr val="dk1"/>
-              </a:solidFill>
-              <a:latin typeface="Calibri"/>
-              <a:ea typeface="Calibri"/>
-              <a:cs typeface="Calibri"/>
-              <a:sym typeface="Calibri"/>
-            </a:endParaRPr>
-          </a:p>
-        </p:txBody>
-      </p:sp>
-      <p:sp>
-        <p:nvSpPr>
-          <p:cNvPr id="324" name="Google Shape;324;p25"/>
-          <p:cNvSpPr/>
-          <p:nvPr/>
-        </p:nvSpPr>
-        <p:spPr>
-          <a:xfrm>
-            <a:off x="640080" y="5029200"/>
-            <a:ext cx="10881360" cy="1051560"/>
-          </a:xfrm>
-          <a:prstGeom prst="roundRect">
-            <a:avLst>
-              <a:gd fmla="val 7826" name="adj"/>
-            </a:avLst>
-          </a:prstGeom>
-          <a:solidFill>
-            <a:srgbClr val="F2F2F2"/>
-          </a:solidFill>
-          <a:ln cap="flat" cmpd="sng" w="12700">
-            <a:solidFill>
-              <a:srgbClr val="BBBBBB"/>
-            </a:solidFill>
-            <a:prstDash val="solid"/>
-            <a:round/>
-            <a:headEnd len="sm" w="sm" type="none"/>
-            <a:tailEnd len="sm" w="sm" type="none"/>
-          </a:ln>
-        </p:spPr>
-        <p:txBody>
-          <a:bodyPr anchorCtr="0" anchor="ctr" bIns="91425" lIns="91425" spcFirstLastPara="1" rIns="91425" wrap="square" tIns="91425">
-            <a:noAutofit/>
-          </a:bodyPr>
-          <a:lstStyle/>
-          <a:p>
-            <a:pPr indent="0" lvl="0" marL="0" rtl="0" algn="l">
-              <a:spcBef>
-                <a:spcPts val="0"/>
-              </a:spcBef>
-              <a:spcAft>
-                <a:spcPts val="0"/>
-              </a:spcAft>
-              <a:buNone/>
-            </a:pPr>
-            <a:r>
-              <a:t/>
-            </a:r>
-            <a:endParaRPr/>
-          </a:p>
-        </p:txBody>
-      </p:sp>
-      <p:sp>
-        <p:nvSpPr>
-          <p:cNvPr id="325" name="Google Shape;325;p25"/>
-          <p:cNvSpPr/>
-          <p:nvPr/>
-        </p:nvSpPr>
-        <p:spPr>
-          <a:xfrm>
-            <a:off x="914400" y="5166360"/>
-            <a:ext cx="10332720" cy="822960"/>
-          </a:xfrm>
-          <a:prstGeom prst="rect">
-            <a:avLst/>
-          </a:prstGeom>
-          <a:noFill/>
-          <a:ln>
-            <a:noFill/>
-          </a:ln>
-        </p:spPr>
-        <p:txBody>
-          <a:bodyPr anchorCtr="0" anchor="ctr" bIns="0" lIns="0" spcFirstLastPara="1" rIns="0" wrap="square" tIns="0">
-            <a:noAutofit/>
-          </a:bodyPr>
-          <a:lstStyle/>
-          <a:p>
-            <a:pPr indent="0" lvl="0" marL="0" marR="0" rtl="0" algn="l">
-              <a:lnSpc>
-                <a:spcPct val="105000"/>
-              </a:lnSpc>
-              <a:spcBef>
-                <a:spcPts val="0"/>
-              </a:spcBef>
-              <a:spcAft>
-                <a:spcPts val="0"/>
-              </a:spcAft>
-              <a:buClr>
-                <a:srgbClr val="000000"/>
-              </a:buClr>
-              <a:buSzPts val="1400"/>
-              <a:buFont typeface="Arial"/>
-              <a:buNone/>
-            </a:pPr>
-            <a:r>
-              <a:rPr b="1" i="0" lang="en-US" sz="1400" u="none" cap="none" strike="noStrike">
-                <a:solidFill>
-                  <a:srgbClr val="000000"/>
-                </a:solidFill>
-                <a:latin typeface="Arial"/>
-                <a:ea typeface="Arial"/>
-                <a:cs typeface="Arial"/>
-                <a:sym typeface="Arial"/>
-              </a:rPr>
-              <a:t>Limitations:  </a:t>
-            </a:r>
-            <a:r>
-              <a:rPr lang="en-US">
-                <a:solidFill>
-                  <a:srgbClr val="3A3A3A"/>
-                </a:solidFill>
-              </a:rPr>
-              <a:t>steady-state assumption biases fast transitions (~10% in simulations) · sparse chemistries (10x v2) underdetermine rare states — use 10x v3 / higher-depth · residual library-size confounding in RBP inference · cell-cycle bursts violate steady-state (masked, not modeled). </a:t>
-            </a:r>
-            <a:endParaRPr b="0" i="0" sz="1400" u="none" cap="none" strike="noStrike">
-              <a:solidFill>
-                <a:schemeClr val="dk1"/>
-              </a:solidFill>
-              <a:latin typeface="Calibri"/>
-              <a:ea typeface="Calibri"/>
-              <a:cs typeface="Calibri"/>
-              <a:sym typeface="Calibri"/>
-            </a:endParaRPr>
-          </a:p>
-        </p:txBody>
-      </p:sp>
-    </p:spTree>
-  </p:cSld>
-  <p:clrMapOvr>
-    <a:masterClrMapping/>
-  </p:clrMapOvr>
-</p:sld>
-</file>
-
 <file path=ppt/slides/slide4.xml><?xml version="1.0" encoding="utf-8"?>
 <p:sld xmlns:a="http://schemas.openxmlformats.org/drawingml/2006/main" xmlns:r="http://schemas.openxmlformats.org/officeDocument/2006/relationships" xmlns:mc="http://schemas.openxmlformats.org/markup-compatibility/2006" xmlns:mv="urn:schemas-microsoft-com:mac:vml" xmlns:p="http://schemas.openxmlformats.org/presentationml/2006/main" xmlns:c="http://schemas.openxmlformats.org/drawingml/2006/chart" xmlns:dgm="http://schemas.openxmlformats.org/drawingml/2006/diagram" xmlns:o="urn:schemas-microsoft-com:office:office" xmlns:v="urn:schemas-microsoft-com:vml" xmlns:pvml="urn:schemas-microsoft-com:office:powerpoint" xmlns:com="http://schemas.openxmlformats.org/drawingml/2006/compatibility" xmlns:p14="http://schemas.microsoft.com/office/powerpoint/2010/main" xmlns:p15="http://schemas.microsoft.com/office/powerpoint/2012/main" xmlns:ahyp="http://schemas.microsoft.com/office/drawing/2018/hyperlinkcolor">
   <p:cSld>
@@ -16160,7 +15329,7 @@
 </p:sld>
 </file>
 
-<file path=ppt/slides/slide8.xml><?xml version="1.0" encoding="utf-8"?>
+<file path=ppt/slides/slide7.xml><?xml version="1.0" encoding="utf-8"?>
 <p:sld xmlns:a="http://schemas.openxmlformats.org/drawingml/2006/main" xmlns:r="http://schemas.openxmlformats.org/officeDocument/2006/relationships" xmlns:mc="http://schemas.openxmlformats.org/markup-compatibility/2006" xmlns:mv="urn:schemas-microsoft-com:mac:vml" xmlns:p="http://schemas.openxmlformats.org/presentationml/2006/main" xmlns:c="http://schemas.openxmlformats.org/drawingml/2006/chart" xmlns:dgm="http://schemas.openxmlformats.org/drawingml/2006/diagram" xmlns:o="urn:schemas-microsoft-com:office:office" xmlns:v="urn:schemas-microsoft-com:vml" xmlns:pvml="urn:schemas-microsoft-com:office:powerpoint" xmlns:com="http://schemas.openxmlformats.org/drawingml/2006/compatibility" xmlns:p14="http://schemas.microsoft.com/office/powerpoint/2010/main" xmlns:p15="http://schemas.microsoft.com/office/powerpoint/2012/main" xmlns:ahyp="http://schemas.microsoft.com/office/drawing/2018/hyperlinkcolor">
   <p:cSld>
     <p:bg>
@@ -16394,7 +15563,7 @@
 </p:sld>
 </file>
 
-<file path=ppt/slides/slide9.xml><?xml version="1.0" encoding="utf-8"?>
+<file path=ppt/slides/slide8.xml><?xml version="1.0" encoding="utf-8"?>
 <p:sld xmlns:a="http://schemas.openxmlformats.org/drawingml/2006/main" xmlns:r="http://schemas.openxmlformats.org/officeDocument/2006/relationships" xmlns:mc="http://schemas.openxmlformats.org/markup-compatibility/2006" xmlns:mv="urn:schemas-microsoft-com:mac:vml" xmlns:p="http://schemas.openxmlformats.org/presentationml/2006/main" xmlns:c="http://schemas.openxmlformats.org/drawingml/2006/chart" xmlns:dgm="http://schemas.openxmlformats.org/drawingml/2006/diagram" xmlns:o="urn:schemas-microsoft-com:office:office" xmlns:v="urn:schemas-microsoft-com:vml" xmlns:pvml="urn:schemas-microsoft-com:office:powerpoint" xmlns:com="http://schemas.openxmlformats.org/drawingml/2006/compatibility" xmlns:p14="http://schemas.microsoft.com/office/powerpoint/2010/main" xmlns:p15="http://schemas.microsoft.com/office/powerpoint/2012/main" xmlns:ahyp="http://schemas.microsoft.com/office/drawing/2018/hyperlinkcolor">
   <p:cSld>
     <p:bg>
@@ -16623,6 +15792,1069 @@
           </a:ln>
         </p:spPr>
       </p:pic>
+    </p:spTree>
+  </p:cSld>
+  <p:clrMapOvr>
+    <a:masterClrMapping/>
+  </p:clrMapOvr>
+</p:sld>
+</file>
+
+<file path=ppt/slides/slide9.xml><?xml version="1.0" encoding="utf-8"?>
+<p:sld xmlns:a="http://schemas.openxmlformats.org/drawingml/2006/main" xmlns:r="http://schemas.openxmlformats.org/officeDocument/2006/relationships" xmlns:mc="http://schemas.openxmlformats.org/markup-compatibility/2006" xmlns:mv="urn:schemas-microsoft-com:mac:vml" xmlns:p="http://schemas.openxmlformats.org/presentationml/2006/main" xmlns:c="http://schemas.openxmlformats.org/drawingml/2006/chart" xmlns:dgm="http://schemas.openxmlformats.org/drawingml/2006/diagram" xmlns:o="urn:schemas-microsoft-com:office:office" xmlns:v="urn:schemas-microsoft-com:vml" xmlns:pvml="urn:schemas-microsoft-com:office:powerpoint" xmlns:com="http://schemas.openxmlformats.org/drawingml/2006/compatibility" xmlns:p14="http://schemas.microsoft.com/office/powerpoint/2010/main" xmlns:p15="http://schemas.microsoft.com/office/powerpoint/2012/main" xmlns:ahyp="http://schemas.microsoft.com/office/drawing/2018/hyperlinkcolor">
+  <p:cSld>
+    <p:bg>
+      <p:bgPr>
+        <a:solidFill>
+          <a:srgbClr val="FFFFFF"/>
+        </a:solidFill>
+      </p:bgPr>
+    </p:bg>
+    <p:spTree>
+      <p:nvGrpSpPr>
+        <p:cNvPr id="158" name="Shape 158"/>
+        <p:cNvGrpSpPr/>
+        <p:nvPr/>
+      </p:nvGrpSpPr>
+      <p:grpSpPr>
+        <a:xfrm>
+          <a:off x="0" y="0"/>
+          <a:ext cx="0" cy="0"/>
+          <a:chOff x="0" y="0"/>
+          <a:chExt cx="0" cy="0"/>
+        </a:xfrm>
+      </p:grpSpPr>
+      <p:sp>
+        <p:nvSpPr>
+          <p:cNvPr id="159" name="Google Shape;159;p13"/>
+          <p:cNvSpPr/>
+          <p:nvPr/>
+        </p:nvSpPr>
+        <p:spPr>
+          <a:xfrm>
+            <a:off x="548640" y="457200"/>
+            <a:ext cx="11064240" cy="868680"/>
+          </a:xfrm>
+          <a:prstGeom prst="rect">
+            <a:avLst/>
+          </a:prstGeom>
+          <a:noFill/>
+          <a:ln>
+            <a:noFill/>
+          </a:ln>
+        </p:spPr>
+        <p:txBody>
+          <a:bodyPr anchorCtr="0" anchor="t" bIns="0" lIns="0" spcFirstLastPara="1" rIns="0" wrap="square" tIns="0">
+            <a:noAutofit/>
+          </a:bodyPr>
+          <a:lstStyle/>
+          <a:p>
+            <a:pPr indent="0" lvl="0" marL="0" marR="0" rtl="0" algn="l">
+              <a:spcBef>
+                <a:spcPts val="0"/>
+              </a:spcBef>
+              <a:spcAft>
+                <a:spcPts val="0"/>
+              </a:spcAft>
+              <a:buClr>
+                <a:srgbClr val="111111"/>
+              </a:buClr>
+              <a:buSzPts val="3000"/>
+              <a:buFont typeface="Arial"/>
+              <a:buNone/>
+            </a:pPr>
+            <a:r>
+              <a:rPr b="1" i="0" lang="en-US" sz="3000" u="none" cap="none" strike="noStrike">
+                <a:solidFill>
+                  <a:srgbClr val="111111"/>
+                </a:solidFill>
+                <a:latin typeface="Arial"/>
+                <a:ea typeface="Arial"/>
+                <a:cs typeface="Arial"/>
+                <a:sym typeface="Arial"/>
+              </a:rPr>
+              <a:t>γ recovers published mRNA half-lives</a:t>
+            </a:r>
+            <a:endParaRPr b="0" i="0" sz="3000" u="none" cap="none" strike="noStrike">
+              <a:solidFill>
+                <a:schemeClr val="dk1"/>
+              </a:solidFill>
+              <a:latin typeface="Calibri"/>
+              <a:ea typeface="Calibri"/>
+              <a:cs typeface="Calibri"/>
+              <a:sym typeface="Calibri"/>
+            </a:endParaRPr>
+          </a:p>
+        </p:txBody>
+      </p:sp>
+      <p:sp>
+        <p:nvSpPr>
+          <p:cNvPr id="160" name="Google Shape;160;p13"/>
+          <p:cNvSpPr/>
+          <p:nvPr/>
+        </p:nvSpPr>
+        <p:spPr>
+          <a:xfrm>
+            <a:off x="835025" y="1719075"/>
+            <a:ext cx="5446800" cy="3922800"/>
+          </a:xfrm>
+          <a:prstGeom prst="roundRect">
+            <a:avLst>
+              <a:gd fmla="val 1865" name="adj"/>
+            </a:avLst>
+          </a:prstGeom>
+          <a:solidFill>
+            <a:srgbClr val="FFFFFF"/>
+          </a:solidFill>
+          <a:ln cap="flat" cmpd="sng" w="12700">
+            <a:solidFill>
+              <a:srgbClr val="BBBBBB"/>
+            </a:solidFill>
+            <a:prstDash val="solid"/>
+            <a:round/>
+            <a:headEnd len="sm" w="sm" type="none"/>
+            <a:tailEnd len="sm" w="sm" type="none"/>
+          </a:ln>
+          <a:effectLst>
+            <a:outerShdw blurRad="88900" rotWithShape="0" algn="bl" dir="5400000" dist="25400">
+              <a:srgbClr val="000000">
+                <a:alpha val="18039"/>
+              </a:srgbClr>
+            </a:outerShdw>
+          </a:effectLst>
+        </p:spPr>
+        <p:txBody>
+          <a:bodyPr anchorCtr="0" anchor="ctr" bIns="91425" lIns="91425" spcFirstLastPara="1" rIns="91425" wrap="square" tIns="91425">
+            <a:noAutofit/>
+          </a:bodyPr>
+          <a:lstStyle/>
+          <a:p>
+            <a:pPr indent="0" lvl="0" marL="0" rtl="0" algn="l">
+              <a:spcBef>
+                <a:spcPts val="0"/>
+              </a:spcBef>
+              <a:spcAft>
+                <a:spcPts val="0"/>
+              </a:spcAft>
+              <a:buNone/>
+            </a:pPr>
+            <a:r>
+              <a:t/>
+            </a:r>
+            <a:endParaRPr/>
+          </a:p>
+        </p:txBody>
+      </p:sp>
+      <p:pic>
+        <p:nvPicPr>
+          <p:cNvPr descr="figs/f2A.png" id="161" name="Google Shape;161;p13"/>
+          <p:cNvPicPr preferRelativeResize="0"/>
+          <p:nvPr/>
+        </p:nvPicPr>
+        <p:blipFill rotWithShape="1">
+          <a:blip r:embed="rId3">
+            <a:alphaModFix/>
+          </a:blip>
+          <a:srcRect b="0" l="0" r="0" t="0"/>
+          <a:stretch/>
+        </p:blipFill>
+        <p:spPr>
+          <a:xfrm>
+            <a:off x="835025" y="1828800"/>
+            <a:ext cx="5337175" cy="3703325"/>
+          </a:xfrm>
+          <a:prstGeom prst="rect">
+            <a:avLst/>
+          </a:prstGeom>
+          <a:noFill/>
+          <a:ln>
+            <a:noFill/>
+          </a:ln>
+        </p:spPr>
+      </p:pic>
+      <p:sp>
+        <p:nvSpPr>
+          <p:cNvPr id="162" name="Google Shape;162;p13"/>
+          <p:cNvSpPr/>
+          <p:nvPr/>
+        </p:nvSpPr>
+        <p:spPr>
+          <a:xfrm>
+            <a:off x="6583680" y="1783080"/>
+            <a:ext cx="4937760" cy="1280160"/>
+          </a:xfrm>
+          <a:prstGeom prst="rect">
+            <a:avLst/>
+          </a:prstGeom>
+          <a:noFill/>
+          <a:ln>
+            <a:noFill/>
+          </a:ln>
+        </p:spPr>
+        <p:txBody>
+          <a:bodyPr anchorCtr="0" anchor="t" bIns="0" lIns="0" spcFirstLastPara="1" rIns="0" wrap="square" tIns="0">
+            <a:noAutofit/>
+          </a:bodyPr>
+          <a:lstStyle/>
+          <a:p>
+            <a:pPr indent="0" lvl="0" marL="0" marR="0" rtl="0" algn="l">
+              <a:spcBef>
+                <a:spcPts val="0"/>
+              </a:spcBef>
+              <a:spcAft>
+                <a:spcPts val="0"/>
+              </a:spcAft>
+              <a:buClr>
+                <a:srgbClr val="000000"/>
+              </a:buClr>
+              <a:buSzPts val="5200"/>
+              <a:buFont typeface="Arial"/>
+              <a:buNone/>
+            </a:pPr>
+            <a:r>
+              <a:rPr b="1" i="0" lang="en-US" sz="5200" u="none" cap="none" strike="noStrike">
+                <a:solidFill>
+                  <a:srgbClr val="000000"/>
+                </a:solidFill>
+                <a:latin typeface="Arial"/>
+                <a:ea typeface="Arial"/>
+                <a:cs typeface="Arial"/>
+                <a:sym typeface="Arial"/>
+              </a:rPr>
+              <a:t>ρ = −0.81</a:t>
+            </a:r>
+            <a:endParaRPr b="0" i="0" sz="5200" u="none" cap="none" strike="noStrike">
+              <a:solidFill>
+                <a:schemeClr val="dk1"/>
+              </a:solidFill>
+              <a:latin typeface="Calibri"/>
+              <a:ea typeface="Calibri"/>
+              <a:cs typeface="Calibri"/>
+              <a:sym typeface="Calibri"/>
+            </a:endParaRPr>
+          </a:p>
+          <a:p>
+            <a:pPr indent="0" lvl="0" marL="0" marR="0" rtl="0" algn="l">
+              <a:spcBef>
+                <a:spcPts val="0"/>
+              </a:spcBef>
+              <a:spcAft>
+                <a:spcPts val="0"/>
+              </a:spcAft>
+              <a:buClr>
+                <a:srgbClr val="6A6A6A"/>
+              </a:buClr>
+              <a:buSzPts val="1400"/>
+              <a:buFont typeface="Arial"/>
+              <a:buNone/>
+            </a:pPr>
+            <a:r>
+              <a:t/>
+            </a:r>
+            <a:endParaRPr b="0" i="0" sz="5200" u="none" cap="none" strike="noStrike">
+              <a:solidFill>
+                <a:schemeClr val="dk1"/>
+              </a:solidFill>
+              <a:latin typeface="Calibri"/>
+              <a:ea typeface="Calibri"/>
+              <a:cs typeface="Calibri"/>
+              <a:sym typeface="Calibri"/>
+            </a:endParaRPr>
+          </a:p>
+        </p:txBody>
+      </p:sp>
+      <p:sp>
+        <p:nvSpPr>
+          <p:cNvPr id="163" name="Google Shape;163;p13"/>
+          <p:cNvSpPr/>
+          <p:nvPr/>
+        </p:nvSpPr>
+        <p:spPr>
+          <a:xfrm>
+            <a:off x="6583680" y="3291840"/>
+            <a:ext cx="4983480" cy="512064"/>
+          </a:xfrm>
+          <a:prstGeom prst="roundRect">
+            <a:avLst>
+              <a:gd fmla="val 10714" name="adj"/>
+            </a:avLst>
+          </a:prstGeom>
+          <a:solidFill>
+            <a:srgbClr val="000000"/>
+          </a:solidFill>
+          <a:ln cap="flat" cmpd="sng" w="12700">
+            <a:solidFill>
+              <a:srgbClr val="BBBBBB"/>
+            </a:solidFill>
+            <a:prstDash val="solid"/>
+            <a:round/>
+            <a:headEnd len="sm" w="sm" type="none"/>
+            <a:tailEnd len="sm" w="sm" type="none"/>
+          </a:ln>
+        </p:spPr>
+        <p:txBody>
+          <a:bodyPr anchorCtr="0" anchor="ctr" bIns="91425" lIns="91425" spcFirstLastPara="1" rIns="91425" wrap="square" tIns="91425">
+            <a:noAutofit/>
+          </a:bodyPr>
+          <a:lstStyle/>
+          <a:p>
+            <a:pPr indent="0" lvl="0" marL="0" rtl="0" algn="l">
+              <a:spcBef>
+                <a:spcPts val="0"/>
+              </a:spcBef>
+              <a:spcAft>
+                <a:spcPts val="0"/>
+              </a:spcAft>
+              <a:buNone/>
+            </a:pPr>
+            <a:r>
+              <a:t/>
+            </a:r>
+            <a:endParaRPr/>
+          </a:p>
+        </p:txBody>
+      </p:sp>
+      <p:sp>
+        <p:nvSpPr>
+          <p:cNvPr id="164" name="Google Shape;164;p13"/>
+          <p:cNvSpPr/>
+          <p:nvPr/>
+        </p:nvSpPr>
+        <p:spPr>
+          <a:xfrm>
+            <a:off x="6766560" y="3291840"/>
+            <a:ext cx="3383280" cy="512064"/>
+          </a:xfrm>
+          <a:prstGeom prst="rect">
+            <a:avLst/>
+          </a:prstGeom>
+          <a:noFill/>
+          <a:ln>
+            <a:noFill/>
+          </a:ln>
+        </p:spPr>
+        <p:txBody>
+          <a:bodyPr anchorCtr="0" anchor="ctr" bIns="0" lIns="0" spcFirstLastPara="1" rIns="0" wrap="square" tIns="0">
+            <a:noAutofit/>
+          </a:bodyPr>
+          <a:lstStyle/>
+          <a:p>
+            <a:pPr indent="0" lvl="0" marL="0" marR="0" rtl="0" algn="l">
+              <a:spcBef>
+                <a:spcPts val="0"/>
+              </a:spcBef>
+              <a:spcAft>
+                <a:spcPts val="0"/>
+              </a:spcAft>
+              <a:buClr>
+                <a:srgbClr val="FFFFFF"/>
+              </a:buClr>
+              <a:buSzPts val="1500"/>
+              <a:buFont typeface="Arial"/>
+              <a:buNone/>
+            </a:pPr>
+            <a:r>
+              <a:rPr b="1" i="0" lang="en-US" sz="1500" u="none" cap="none" strike="noStrike">
+                <a:solidFill>
+                  <a:srgbClr val="FFFFFF"/>
+                </a:solidFill>
+                <a:latin typeface="Arial"/>
+                <a:ea typeface="Arial"/>
+                <a:cs typeface="Arial"/>
+                <a:sym typeface="Arial"/>
+              </a:rPr>
+              <a:t>scPTR (analytic)</a:t>
+            </a:r>
+            <a:endParaRPr b="0" i="0" sz="1500" u="none" cap="none" strike="noStrike">
+              <a:solidFill>
+                <a:schemeClr val="dk1"/>
+              </a:solidFill>
+              <a:latin typeface="Calibri"/>
+              <a:ea typeface="Calibri"/>
+              <a:cs typeface="Calibri"/>
+              <a:sym typeface="Calibri"/>
+            </a:endParaRPr>
+          </a:p>
+        </p:txBody>
+      </p:sp>
+      <p:sp>
+        <p:nvSpPr>
+          <p:cNvPr id="165" name="Google Shape;165;p13"/>
+          <p:cNvSpPr/>
+          <p:nvPr/>
+        </p:nvSpPr>
+        <p:spPr>
+          <a:xfrm>
+            <a:off x="10149840" y="3291840"/>
+            <a:ext cx="1234440" cy="512064"/>
+          </a:xfrm>
+          <a:prstGeom prst="rect">
+            <a:avLst/>
+          </a:prstGeom>
+          <a:noFill/>
+          <a:ln>
+            <a:noFill/>
+          </a:ln>
+        </p:spPr>
+        <p:txBody>
+          <a:bodyPr anchorCtr="0" anchor="ctr" bIns="0" lIns="0" spcFirstLastPara="1" rIns="0" wrap="square" tIns="0">
+            <a:noAutofit/>
+          </a:bodyPr>
+          <a:lstStyle/>
+          <a:p>
+            <a:pPr indent="0" lvl="0" marL="0" marR="0" rtl="0" algn="r">
+              <a:spcBef>
+                <a:spcPts val="0"/>
+              </a:spcBef>
+              <a:spcAft>
+                <a:spcPts val="0"/>
+              </a:spcAft>
+              <a:buClr>
+                <a:srgbClr val="FFFFFF"/>
+              </a:buClr>
+              <a:buSzPts val="1600"/>
+              <a:buFont typeface="Arial"/>
+              <a:buNone/>
+            </a:pPr>
+            <a:r>
+              <a:rPr b="1" i="0" lang="en-US" sz="1600" u="none" cap="none" strike="noStrike">
+                <a:solidFill>
+                  <a:srgbClr val="FFFFFF"/>
+                </a:solidFill>
+                <a:latin typeface="Arial"/>
+                <a:ea typeface="Arial"/>
+                <a:cs typeface="Arial"/>
+                <a:sym typeface="Arial"/>
+              </a:rPr>
+              <a:t>−0.81</a:t>
+            </a:r>
+            <a:endParaRPr b="0" i="0" sz="1600" u="none" cap="none" strike="noStrike">
+              <a:solidFill>
+                <a:schemeClr val="dk1"/>
+              </a:solidFill>
+              <a:latin typeface="Calibri"/>
+              <a:ea typeface="Calibri"/>
+              <a:cs typeface="Calibri"/>
+              <a:sym typeface="Calibri"/>
+            </a:endParaRPr>
+          </a:p>
+        </p:txBody>
+      </p:sp>
+      <p:sp>
+        <p:nvSpPr>
+          <p:cNvPr id="166" name="Google Shape;166;p13"/>
+          <p:cNvSpPr/>
+          <p:nvPr/>
+        </p:nvSpPr>
+        <p:spPr>
+          <a:xfrm>
+            <a:off x="6583680" y="3895344"/>
+            <a:ext cx="4983480" cy="512064"/>
+          </a:xfrm>
+          <a:prstGeom prst="roundRect">
+            <a:avLst>
+              <a:gd fmla="val 10714" name="adj"/>
+            </a:avLst>
+          </a:prstGeom>
+          <a:solidFill>
+            <a:srgbClr val="F2F2F2"/>
+          </a:solidFill>
+          <a:ln cap="flat" cmpd="sng" w="12700">
+            <a:solidFill>
+              <a:srgbClr val="BBBBBB"/>
+            </a:solidFill>
+            <a:prstDash val="solid"/>
+            <a:round/>
+            <a:headEnd len="sm" w="sm" type="none"/>
+            <a:tailEnd len="sm" w="sm" type="none"/>
+          </a:ln>
+        </p:spPr>
+        <p:txBody>
+          <a:bodyPr anchorCtr="0" anchor="ctr" bIns="91425" lIns="91425" spcFirstLastPara="1" rIns="91425" wrap="square" tIns="91425">
+            <a:noAutofit/>
+          </a:bodyPr>
+          <a:lstStyle/>
+          <a:p>
+            <a:pPr indent="0" lvl="0" marL="0" rtl="0" algn="l">
+              <a:spcBef>
+                <a:spcPts val="0"/>
+              </a:spcBef>
+              <a:spcAft>
+                <a:spcPts val="0"/>
+              </a:spcAft>
+              <a:buNone/>
+            </a:pPr>
+            <a:r>
+              <a:t/>
+            </a:r>
+            <a:endParaRPr/>
+          </a:p>
+        </p:txBody>
+      </p:sp>
+      <p:sp>
+        <p:nvSpPr>
+          <p:cNvPr id="167" name="Google Shape;167;p13"/>
+          <p:cNvSpPr/>
+          <p:nvPr/>
+        </p:nvSpPr>
+        <p:spPr>
+          <a:xfrm>
+            <a:off x="6766560" y="3895344"/>
+            <a:ext cx="3383280" cy="512064"/>
+          </a:xfrm>
+          <a:prstGeom prst="rect">
+            <a:avLst/>
+          </a:prstGeom>
+          <a:noFill/>
+          <a:ln>
+            <a:noFill/>
+          </a:ln>
+        </p:spPr>
+        <p:txBody>
+          <a:bodyPr anchorCtr="0" anchor="ctr" bIns="0" lIns="0" spcFirstLastPara="1" rIns="0" wrap="square" tIns="0">
+            <a:noAutofit/>
+          </a:bodyPr>
+          <a:lstStyle/>
+          <a:p>
+            <a:pPr indent="0" lvl="0" marL="0" marR="0" rtl="0" algn="l">
+              <a:spcBef>
+                <a:spcPts val="0"/>
+              </a:spcBef>
+              <a:spcAft>
+                <a:spcPts val="0"/>
+              </a:spcAft>
+              <a:buClr>
+                <a:srgbClr val="111111"/>
+              </a:buClr>
+              <a:buSzPts val="1500"/>
+              <a:buFont typeface="Arial"/>
+              <a:buNone/>
+            </a:pPr>
+            <a:r>
+              <a:rPr b="0" i="0" lang="en-US" sz="1500" u="none" cap="none" strike="noStrike">
+                <a:solidFill>
+                  <a:srgbClr val="111111"/>
+                </a:solidFill>
+                <a:latin typeface="Arial"/>
+                <a:ea typeface="Arial"/>
+                <a:cs typeface="Arial"/>
+                <a:sym typeface="Arial"/>
+              </a:rPr>
+              <a:t>UniTVelo</a:t>
+            </a:r>
+            <a:endParaRPr b="0" i="0" sz="1500" u="none" cap="none" strike="noStrike">
+              <a:solidFill>
+                <a:schemeClr val="dk1"/>
+              </a:solidFill>
+              <a:latin typeface="Calibri"/>
+              <a:ea typeface="Calibri"/>
+              <a:cs typeface="Calibri"/>
+              <a:sym typeface="Calibri"/>
+            </a:endParaRPr>
+          </a:p>
+        </p:txBody>
+      </p:sp>
+      <p:sp>
+        <p:nvSpPr>
+          <p:cNvPr id="168" name="Google Shape;168;p13"/>
+          <p:cNvSpPr/>
+          <p:nvPr/>
+        </p:nvSpPr>
+        <p:spPr>
+          <a:xfrm>
+            <a:off x="10149840" y="3895344"/>
+            <a:ext cx="1234440" cy="512064"/>
+          </a:xfrm>
+          <a:prstGeom prst="rect">
+            <a:avLst/>
+          </a:prstGeom>
+          <a:noFill/>
+          <a:ln>
+            <a:noFill/>
+          </a:ln>
+        </p:spPr>
+        <p:txBody>
+          <a:bodyPr anchorCtr="0" anchor="ctr" bIns="0" lIns="0" spcFirstLastPara="1" rIns="0" wrap="square" tIns="0">
+            <a:noAutofit/>
+          </a:bodyPr>
+          <a:lstStyle/>
+          <a:p>
+            <a:pPr indent="0" lvl="0" marL="0" marR="0" rtl="0" algn="r">
+              <a:spcBef>
+                <a:spcPts val="0"/>
+              </a:spcBef>
+              <a:spcAft>
+                <a:spcPts val="0"/>
+              </a:spcAft>
+              <a:buClr>
+                <a:srgbClr val="111111"/>
+              </a:buClr>
+              <a:buSzPts val="1600"/>
+              <a:buFont typeface="Arial"/>
+              <a:buNone/>
+            </a:pPr>
+            <a:r>
+              <a:rPr b="1" i="0" lang="en-US" sz="1600" u="none" cap="none" strike="noStrike">
+                <a:solidFill>
+                  <a:srgbClr val="111111"/>
+                </a:solidFill>
+                <a:latin typeface="Arial"/>
+                <a:ea typeface="Arial"/>
+                <a:cs typeface="Arial"/>
+                <a:sym typeface="Arial"/>
+              </a:rPr>
+              <a:t>−0.33</a:t>
+            </a:r>
+            <a:endParaRPr b="0" i="0" sz="1600" u="none" cap="none" strike="noStrike">
+              <a:solidFill>
+                <a:schemeClr val="dk1"/>
+              </a:solidFill>
+              <a:latin typeface="Calibri"/>
+              <a:ea typeface="Calibri"/>
+              <a:cs typeface="Calibri"/>
+              <a:sym typeface="Calibri"/>
+            </a:endParaRPr>
+          </a:p>
+        </p:txBody>
+      </p:sp>
+      <p:sp>
+        <p:nvSpPr>
+          <p:cNvPr id="169" name="Google Shape;169;p13"/>
+          <p:cNvSpPr/>
+          <p:nvPr/>
+        </p:nvSpPr>
+        <p:spPr>
+          <a:xfrm>
+            <a:off x="6583680" y="4498848"/>
+            <a:ext cx="4983480" cy="512064"/>
+          </a:xfrm>
+          <a:prstGeom prst="roundRect">
+            <a:avLst>
+              <a:gd fmla="val 10714" name="adj"/>
+            </a:avLst>
+          </a:prstGeom>
+          <a:solidFill>
+            <a:srgbClr val="F2F2F2"/>
+          </a:solidFill>
+          <a:ln cap="flat" cmpd="sng" w="12700">
+            <a:solidFill>
+              <a:srgbClr val="BBBBBB"/>
+            </a:solidFill>
+            <a:prstDash val="solid"/>
+            <a:round/>
+            <a:headEnd len="sm" w="sm" type="none"/>
+            <a:tailEnd len="sm" w="sm" type="none"/>
+          </a:ln>
+        </p:spPr>
+        <p:txBody>
+          <a:bodyPr anchorCtr="0" anchor="ctr" bIns="91425" lIns="91425" spcFirstLastPara="1" rIns="91425" wrap="square" tIns="91425">
+            <a:noAutofit/>
+          </a:bodyPr>
+          <a:lstStyle/>
+          <a:p>
+            <a:pPr indent="0" lvl="0" marL="0" rtl="0" algn="l">
+              <a:spcBef>
+                <a:spcPts val="0"/>
+              </a:spcBef>
+              <a:spcAft>
+                <a:spcPts val="0"/>
+              </a:spcAft>
+              <a:buNone/>
+            </a:pPr>
+            <a:r>
+              <a:t/>
+            </a:r>
+            <a:endParaRPr/>
+          </a:p>
+        </p:txBody>
+      </p:sp>
+      <p:sp>
+        <p:nvSpPr>
+          <p:cNvPr id="170" name="Google Shape;170;p13"/>
+          <p:cNvSpPr/>
+          <p:nvPr/>
+        </p:nvSpPr>
+        <p:spPr>
+          <a:xfrm>
+            <a:off x="6766560" y="4498848"/>
+            <a:ext cx="3383280" cy="512064"/>
+          </a:xfrm>
+          <a:prstGeom prst="rect">
+            <a:avLst/>
+          </a:prstGeom>
+          <a:noFill/>
+          <a:ln>
+            <a:noFill/>
+          </a:ln>
+        </p:spPr>
+        <p:txBody>
+          <a:bodyPr anchorCtr="0" anchor="ctr" bIns="0" lIns="0" spcFirstLastPara="1" rIns="0" wrap="square" tIns="0">
+            <a:noAutofit/>
+          </a:bodyPr>
+          <a:lstStyle/>
+          <a:p>
+            <a:pPr indent="0" lvl="0" marL="0" marR="0" rtl="0" algn="l">
+              <a:spcBef>
+                <a:spcPts val="0"/>
+              </a:spcBef>
+              <a:spcAft>
+                <a:spcPts val="0"/>
+              </a:spcAft>
+              <a:buClr>
+                <a:srgbClr val="111111"/>
+              </a:buClr>
+              <a:buSzPts val="1500"/>
+              <a:buFont typeface="Arial"/>
+              <a:buNone/>
+            </a:pPr>
+            <a:r>
+              <a:rPr b="0" i="0" lang="en-US" sz="1500" u="none" cap="none" strike="noStrike">
+                <a:solidFill>
+                  <a:srgbClr val="111111"/>
+                </a:solidFill>
+                <a:latin typeface="Arial"/>
+                <a:ea typeface="Arial"/>
+                <a:cs typeface="Arial"/>
+                <a:sym typeface="Arial"/>
+              </a:rPr>
+              <a:t>scVelo (steady-state)</a:t>
+            </a:r>
+            <a:endParaRPr b="0" i="0" sz="1500" u="none" cap="none" strike="noStrike">
+              <a:solidFill>
+                <a:schemeClr val="dk1"/>
+              </a:solidFill>
+              <a:latin typeface="Calibri"/>
+              <a:ea typeface="Calibri"/>
+              <a:cs typeface="Calibri"/>
+              <a:sym typeface="Calibri"/>
+            </a:endParaRPr>
+          </a:p>
+        </p:txBody>
+      </p:sp>
+      <p:sp>
+        <p:nvSpPr>
+          <p:cNvPr id="171" name="Google Shape;171;p13"/>
+          <p:cNvSpPr/>
+          <p:nvPr/>
+        </p:nvSpPr>
+        <p:spPr>
+          <a:xfrm>
+            <a:off x="10149840" y="4498848"/>
+            <a:ext cx="1234440" cy="512064"/>
+          </a:xfrm>
+          <a:prstGeom prst="rect">
+            <a:avLst/>
+          </a:prstGeom>
+          <a:noFill/>
+          <a:ln>
+            <a:noFill/>
+          </a:ln>
+        </p:spPr>
+        <p:txBody>
+          <a:bodyPr anchorCtr="0" anchor="ctr" bIns="0" lIns="0" spcFirstLastPara="1" rIns="0" wrap="square" tIns="0">
+            <a:noAutofit/>
+          </a:bodyPr>
+          <a:lstStyle/>
+          <a:p>
+            <a:pPr indent="0" lvl="0" marL="0" marR="0" rtl="0" algn="r">
+              <a:spcBef>
+                <a:spcPts val="0"/>
+              </a:spcBef>
+              <a:spcAft>
+                <a:spcPts val="0"/>
+              </a:spcAft>
+              <a:buClr>
+                <a:srgbClr val="111111"/>
+              </a:buClr>
+              <a:buSzPts val="1600"/>
+              <a:buFont typeface="Arial"/>
+              <a:buNone/>
+            </a:pPr>
+            <a:r>
+              <a:rPr b="1" i="0" lang="en-US" sz="1600" u="none" cap="none" strike="noStrike">
+                <a:solidFill>
+                  <a:srgbClr val="111111"/>
+                </a:solidFill>
+                <a:latin typeface="Arial"/>
+                <a:ea typeface="Arial"/>
+                <a:cs typeface="Arial"/>
+                <a:sym typeface="Arial"/>
+              </a:rPr>
+              <a:t>−0.37</a:t>
+            </a:r>
+            <a:endParaRPr b="0" i="0" sz="1600" u="none" cap="none" strike="noStrike">
+              <a:solidFill>
+                <a:schemeClr val="dk1"/>
+              </a:solidFill>
+              <a:latin typeface="Calibri"/>
+              <a:ea typeface="Calibri"/>
+              <a:cs typeface="Calibri"/>
+              <a:sym typeface="Calibri"/>
+            </a:endParaRPr>
+          </a:p>
+        </p:txBody>
+      </p:sp>
+      <p:sp>
+        <p:nvSpPr>
+          <p:cNvPr id="172" name="Google Shape;172;p13"/>
+          <p:cNvSpPr/>
+          <p:nvPr/>
+        </p:nvSpPr>
+        <p:spPr>
+          <a:xfrm>
+            <a:off x="6583680" y="5102352"/>
+            <a:ext cx="4983480" cy="512064"/>
+          </a:xfrm>
+          <a:prstGeom prst="roundRect">
+            <a:avLst>
+              <a:gd fmla="val 10714" name="adj"/>
+            </a:avLst>
+          </a:prstGeom>
+          <a:solidFill>
+            <a:srgbClr val="F2F2F2"/>
+          </a:solidFill>
+          <a:ln cap="flat" cmpd="sng" w="12700">
+            <a:solidFill>
+              <a:srgbClr val="BBBBBB"/>
+            </a:solidFill>
+            <a:prstDash val="solid"/>
+            <a:round/>
+            <a:headEnd len="sm" w="sm" type="none"/>
+            <a:tailEnd len="sm" w="sm" type="none"/>
+          </a:ln>
+        </p:spPr>
+        <p:txBody>
+          <a:bodyPr anchorCtr="0" anchor="ctr" bIns="91425" lIns="91425" spcFirstLastPara="1" rIns="91425" wrap="square" tIns="91425">
+            <a:noAutofit/>
+          </a:bodyPr>
+          <a:lstStyle/>
+          <a:p>
+            <a:pPr indent="0" lvl="0" marL="0" rtl="0" algn="l">
+              <a:spcBef>
+                <a:spcPts val="0"/>
+              </a:spcBef>
+              <a:spcAft>
+                <a:spcPts val="0"/>
+              </a:spcAft>
+              <a:buNone/>
+            </a:pPr>
+            <a:r>
+              <a:t/>
+            </a:r>
+            <a:endParaRPr/>
+          </a:p>
+        </p:txBody>
+      </p:sp>
+      <p:sp>
+        <p:nvSpPr>
+          <p:cNvPr id="173" name="Google Shape;173;p13"/>
+          <p:cNvSpPr/>
+          <p:nvPr/>
+        </p:nvSpPr>
+        <p:spPr>
+          <a:xfrm>
+            <a:off x="6766560" y="5102352"/>
+            <a:ext cx="3383280" cy="512064"/>
+          </a:xfrm>
+          <a:prstGeom prst="rect">
+            <a:avLst/>
+          </a:prstGeom>
+          <a:noFill/>
+          <a:ln>
+            <a:noFill/>
+          </a:ln>
+        </p:spPr>
+        <p:txBody>
+          <a:bodyPr anchorCtr="0" anchor="ctr" bIns="0" lIns="0" spcFirstLastPara="1" rIns="0" wrap="square" tIns="0">
+            <a:noAutofit/>
+          </a:bodyPr>
+          <a:lstStyle/>
+          <a:p>
+            <a:pPr indent="0" lvl="0" marL="0" marR="0" rtl="0" algn="l">
+              <a:spcBef>
+                <a:spcPts val="0"/>
+              </a:spcBef>
+              <a:spcAft>
+                <a:spcPts val="0"/>
+              </a:spcAft>
+              <a:buClr>
+                <a:srgbClr val="111111"/>
+              </a:buClr>
+              <a:buSzPts val="1500"/>
+              <a:buFont typeface="Arial"/>
+              <a:buNone/>
+            </a:pPr>
+            <a:r>
+              <a:rPr b="0" i="0" lang="en-US" sz="1500" u="none" cap="none" strike="noStrike">
+                <a:solidFill>
+                  <a:srgbClr val="111111"/>
+                </a:solidFill>
+                <a:latin typeface="Arial"/>
+                <a:ea typeface="Arial"/>
+                <a:cs typeface="Arial"/>
+                <a:sym typeface="Arial"/>
+              </a:rPr>
+              <a:t>velVI</a:t>
+            </a:r>
+            <a:endParaRPr b="0" i="0" sz="1500" u="none" cap="none" strike="noStrike">
+              <a:solidFill>
+                <a:schemeClr val="dk1"/>
+              </a:solidFill>
+              <a:latin typeface="Calibri"/>
+              <a:ea typeface="Calibri"/>
+              <a:cs typeface="Calibri"/>
+              <a:sym typeface="Calibri"/>
+            </a:endParaRPr>
+          </a:p>
+        </p:txBody>
+      </p:sp>
+      <p:sp>
+        <p:nvSpPr>
+          <p:cNvPr id="174" name="Google Shape;174;p13"/>
+          <p:cNvSpPr/>
+          <p:nvPr/>
+        </p:nvSpPr>
+        <p:spPr>
+          <a:xfrm>
+            <a:off x="10149840" y="5102352"/>
+            <a:ext cx="1234440" cy="512064"/>
+          </a:xfrm>
+          <a:prstGeom prst="rect">
+            <a:avLst/>
+          </a:prstGeom>
+          <a:noFill/>
+          <a:ln>
+            <a:noFill/>
+          </a:ln>
+        </p:spPr>
+        <p:txBody>
+          <a:bodyPr anchorCtr="0" anchor="ctr" bIns="0" lIns="0" spcFirstLastPara="1" rIns="0" wrap="square" tIns="0">
+            <a:noAutofit/>
+          </a:bodyPr>
+          <a:lstStyle/>
+          <a:p>
+            <a:pPr indent="0" lvl="0" marL="0" marR="0" rtl="0" algn="r">
+              <a:spcBef>
+                <a:spcPts val="0"/>
+              </a:spcBef>
+              <a:spcAft>
+                <a:spcPts val="0"/>
+              </a:spcAft>
+              <a:buClr>
+                <a:srgbClr val="111111"/>
+              </a:buClr>
+              <a:buSzPts val="1600"/>
+              <a:buFont typeface="Arial"/>
+              <a:buNone/>
+            </a:pPr>
+            <a:r>
+              <a:rPr b="1" i="0" lang="en-US" sz="1600" u="none" cap="none" strike="noStrike">
+                <a:solidFill>
+                  <a:srgbClr val="111111"/>
+                </a:solidFill>
+                <a:latin typeface="Arial"/>
+                <a:ea typeface="Arial"/>
+                <a:cs typeface="Arial"/>
+                <a:sym typeface="Arial"/>
+              </a:rPr>
+              <a:t>−0.28</a:t>
+            </a:r>
+            <a:endParaRPr b="0" i="0" sz="1600" u="none" cap="none" strike="noStrike">
+              <a:solidFill>
+                <a:schemeClr val="dk1"/>
+              </a:solidFill>
+              <a:latin typeface="Calibri"/>
+              <a:ea typeface="Calibri"/>
+              <a:cs typeface="Calibri"/>
+              <a:sym typeface="Calibri"/>
+            </a:endParaRPr>
+          </a:p>
+        </p:txBody>
+      </p:sp>
+      <p:sp>
+        <p:nvSpPr>
+          <p:cNvPr id="175" name="Google Shape;175;p13"/>
+          <p:cNvSpPr txBox="1"/>
+          <p:nvPr/>
+        </p:nvSpPr>
+        <p:spPr>
+          <a:xfrm>
+            <a:off x="6583675" y="2604575"/>
+            <a:ext cx="4937700" cy="400200"/>
+          </a:xfrm>
+          <a:prstGeom prst="rect">
+            <a:avLst/>
+          </a:prstGeom>
+          <a:noFill/>
+          <a:ln>
+            <a:noFill/>
+          </a:ln>
+        </p:spPr>
+        <p:txBody>
+          <a:bodyPr anchorCtr="0" anchor="t" bIns="91425" lIns="91425" spcFirstLastPara="1" rIns="91425" wrap="square" tIns="91425">
+            <a:spAutoFit/>
+          </a:bodyPr>
+          <a:lstStyle/>
+          <a:p>
+            <a:pPr indent="0" lvl="0" marL="0" rtl="0" algn="l">
+              <a:spcBef>
+                <a:spcPts val="0"/>
+              </a:spcBef>
+              <a:spcAft>
+                <a:spcPts val="0"/>
+              </a:spcAft>
+              <a:buNone/>
+            </a:pPr>
+            <a:r>
+              <a:rPr lang="en-US"/>
+              <a:t>scPTR on sci-fate 4sU labelling (cleanest ground truth) </a:t>
+            </a:r>
+            <a:endParaRPr/>
+          </a:p>
+        </p:txBody>
+      </p:sp>
+      <p:sp>
+        <p:nvSpPr>
+          <p:cNvPr id="176" name="Google Shape;176;p13"/>
+          <p:cNvSpPr txBox="1"/>
+          <p:nvPr/>
+        </p:nvSpPr>
+        <p:spPr>
+          <a:xfrm>
+            <a:off x="6583675" y="2891650"/>
+            <a:ext cx="3000000" cy="400200"/>
+          </a:xfrm>
+          <a:prstGeom prst="rect">
+            <a:avLst/>
+          </a:prstGeom>
+          <a:noFill/>
+          <a:ln>
+            <a:noFill/>
+          </a:ln>
+        </p:spPr>
+        <p:txBody>
+          <a:bodyPr anchorCtr="0" anchor="t" bIns="91425" lIns="91425" spcFirstLastPara="1" rIns="91425" wrap="square" tIns="91425">
+            <a:spAutoFit/>
+          </a:bodyPr>
+          <a:lstStyle/>
+          <a:p>
+            <a:pPr indent="0" lvl="0" marL="0" rtl="0" algn="l">
+              <a:spcBef>
+                <a:spcPts val="0"/>
+              </a:spcBef>
+              <a:spcAft>
+                <a:spcPts val="0"/>
+              </a:spcAft>
+              <a:buNone/>
+            </a:pPr>
+            <a:r>
+              <a:rPr lang="en-US"/>
+              <a:t>Spearman ρ — sci-fate 4sU </a:t>
+            </a:r>
+            <a:endParaRPr/>
+          </a:p>
+        </p:txBody>
+      </p:sp>
     </p:spTree>
   </p:cSld>
   <p:clrMapOvr>

--- a/presentations/scPTR talk.pptx
+++ b/presentations/scPTR talk.pptx
@@ -11102,53 +11102,24 @@
           </a:p>
         </p:txBody>
       </p:sp>
-      <p:sp>
-        <p:nvSpPr>
-          <p:cNvPr id="306" name="FigBg_306"/>
-          <p:cNvSpPr>
-            <a:spLocks noGrp="1"/>
-          </p:cNvSpPr>
-          <p:nvPr/>
-        </p:nvSpPr>
-        <p:spPr>
-          <a:xfrm>
-            <a:off x="365760" y="1442132"/>
-            <a:ext cx="11460480" cy="4110895"/>
-          </a:xfrm>
-          <a:prstGeom prst="roundRect">
-            <a:avLst/>
-          </a:prstGeom>
-          <a:solidFill>
-            <a:srgbClr val="FFFFFF"/>
-          </a:solidFill>
-          <a:ln w="0">
-            <a:noFill/>
-          </a:ln>
-        </p:spPr>
-        <p:txBody>
-          <a:bodyPr/>
-          <a:lstStyle/>
-          <a:p/>
-        </p:txBody>
-      </p:sp>
       <p:pic>
         <p:nvPicPr>
-          <p:cNvPr id="307" name="Picture 306" descr="image.png"/>
+          <p:cNvPr id="306" name="Picture 305" descr="fig_discussion_summary.png"/>
           <p:cNvPicPr>
             <a:picLocks noChangeAspect="1"/>
           </p:cNvPicPr>
           <p:nvPr/>
         </p:nvPicPr>
         <p:blipFill>
-          <a:blip r:embed="rId4"/>
+          <a:blip r:embed="rId5"/>
           <a:stretch>
             <a:fillRect/>
           </a:stretch>
         </p:blipFill>
         <p:spPr>
           <a:xfrm>
-            <a:off x="502920" y="1579292"/>
-            <a:ext cx="11186160" cy="3836575"/>
+            <a:off x="320040" y="861098"/>
+            <a:ext cx="11551920" cy="5135803"/>
           </a:xfrm>
           <a:prstGeom prst="rect">
             <a:avLst/>

--- a/presentations/scPTR talk.pptx
+++ b/presentations/scPTR talk.pptx
@@ -6687,15 +6687,13 @@
       <p:sp>
         <p:nvSpPr>
           <p:cNvPr id="4" name="FigBg_4"/>
-          <p:cNvSpPr>
-            <a:spLocks noGrp="1"/>
-          </p:cNvSpPr>
+          <p:cNvSpPr/>
           <p:nvPr/>
         </p:nvSpPr>
         <p:spPr>
           <a:xfrm>
-            <a:off x="447328" y="914400"/>
-            <a:ext cx="11297344" cy="5166360"/>
+            <a:off x="365760" y="1040214"/>
+            <a:ext cx="11460480" cy="4914732"/>
           </a:xfrm>
           <a:prstGeom prst="roundRect">
             <a:avLst/>
@@ -6715,22 +6713,22 @@
       </p:sp>
       <p:pic>
         <p:nvPicPr>
-          <p:cNvPr id="5" name="Picture 4" descr="image.png"/>
+          <p:cNvPr id="5" name="Picture 4" descr="fig_expression_vs_gamma_recovery.png"/>
           <p:cNvPicPr>
             <a:picLocks noChangeAspect="1"/>
           </p:cNvPicPr>
           <p:nvPr/>
         </p:nvPicPr>
         <p:blipFill>
-          <a:blip r:embed="rId2"/>
+          <a:blip r:embed="rId3"/>
           <a:stretch>
             <a:fillRect/>
           </a:stretch>
         </p:blipFill>
         <p:spPr>
           <a:xfrm>
-            <a:off x="584488" y="1051560"/>
-            <a:ext cx="11023024" cy="4892040"/>
+            <a:off x="502920" y="1177374"/>
+            <a:ext cx="11186160" cy="4640412"/>
           </a:xfrm>
           <a:prstGeom prst="rect">
             <a:avLst/>

--- a/presentations/scPTR talk.pptx
+++ b/presentations/scPTR talk.pptx
@@ -11109,15 +11109,15 @@
           <p:nvPr/>
         </p:nvPicPr>
         <p:blipFill>
-          <a:blip r:embed="rId5"/>
+          <a:blip r:embed="rId6"/>
           <a:stretch>
             <a:fillRect/>
           </a:stretch>
         </p:blipFill>
         <p:spPr>
           <a:xfrm>
-            <a:off x="320040" y="861098"/>
-            <a:ext cx="11551920" cy="5135803"/>
+            <a:off x="320040" y="764169"/>
+            <a:ext cx="11551920" cy="5329661"/>
           </a:xfrm>
           <a:prstGeom prst="rect">
             <a:avLst/>
